--- a/assets/pdf/CV_Antoine_CHEDEBOIS_GB.pptx
+++ b/assets/pdf/CV_Antoine_CHEDEBOIS_GB.pptx
@@ -185,7 +185,7 @@
           <a:p>
             <a:fld id="{1D8BD707-D9CF-40AE-B4C6-C98DA3205C09}" type="datetimeFigureOut">
               <a:rPr lang="en-US"/>
-              <a:t>1/8/2026</a:t>
+              <a:t>7/11/2026</a:t>
             </a:fld>
             <a:endParaRPr lang="en-US"/>
           </a:p>
@@ -362,7 +362,7 @@
           <a:p>
             <a:fld id="{1D8BD707-D9CF-40AE-B4C6-C98DA3205C09}" type="datetimeFigureOut">
               <a:rPr lang="en-US"/>
-              <a:t>1/8/2026</a:t>
+              <a:t>7/11/2026</a:t>
             </a:fld>
             <a:endParaRPr lang="en-US"/>
           </a:p>
@@ -576,7 +576,7 @@
           <a:p>
             <a:fld id="{1D8BD707-D9CF-40AE-B4C6-C98DA3205C09}" type="datetimeFigureOut">
               <a:rPr lang="en-US"/>
-              <a:t>1/8/2026</a:t>
+              <a:t>7/11/2026</a:t>
             </a:fld>
             <a:endParaRPr lang="en-US"/>
           </a:p>
@@ -724,7 +724,7 @@
           <a:p>
             <a:fld id="{1D8BD707-D9CF-40AE-B4C6-C98DA3205C09}" type="datetimeFigureOut">
               <a:rPr lang="en-US"/>
-              <a:t>1/8/2026</a:t>
+              <a:t>7/11/2026</a:t>
             </a:fld>
             <a:endParaRPr lang="en-US"/>
           </a:p>
@@ -843,7 +843,7 @@
           <a:p>
             <a:fld id="{1D8BD707-D9CF-40AE-B4C6-C98DA3205C09}" type="datetimeFigureOut">
               <a:rPr lang="en-US"/>
-              <a:t>1/8/2026</a:t>
+              <a:t>7/11/2026</a:t>
             </a:fld>
             <a:endParaRPr lang="en-US"/>
           </a:p>
@@ -1258,7 +1258,7 @@
           <a:p>
             <a:fld id="{1D8BD707-D9CF-40AE-B4C6-C98DA3205C09}" type="datetimeFigureOut">
               <a:rPr lang="en-US"/>
-              <a:t>1/8/2026</a:t>
+              <a:t>7/11/2026</a:t>
             </a:fld>
             <a:endParaRPr lang="en-US"/>
           </a:p>
@@ -2936,15 +2936,7 @@
             </a:pPr>
             <a:r>
               <a:rPr lang="en-US" noProof="0" dirty="0"/>
-              <a:t>Antoine</a:t>
-            </a:r>
-            <a:r>
-              <a:rPr lang="en-US" spc="-200" noProof="0" dirty="0"/>
-              <a:t> </a:t>
-            </a:r>
-            <a:r>
-              <a:rPr lang="en-US" spc="-10" noProof="0" dirty="0"/>
-              <a:t>CHEDEBOIS</a:t>
+              <a:t>Antoine CHEDEBOIS</a:t>
             </a:r>
           </a:p>
           <a:p>
@@ -2957,12 +2949,8 @@
               </a:spcBef>
             </a:pPr>
             <a:r>
-              <a:rPr lang="en-US" sz="1400" noProof="0"/>
-              <a:t>Engineering </a:t>
-            </a:r>
-            <a:r>
               <a:rPr lang="en-US" sz="1400" noProof="0" dirty="0"/>
-              <a:t>Squad Lead / Full Stack Tech Lead / DevOps</a:t>
+              <a:t>Senior Full Stack Engineer / Hands-on Tech Lead / AWS</a:t>
             </a:r>
           </a:p>
         </p:txBody>
@@ -3009,87 +2997,7 @@
                 <a:latin typeface="Calibri"/>
                 <a:cs typeface="Calibri"/>
               </a:rPr>
-              <a:t>49</a:t>
-            </a:r>
-            <a:r>
-              <a:rPr lang="en-US" sz="1000" spc="-5" noProof="0" dirty="0">
-                <a:solidFill>
-                  <a:srgbClr val="FFFFFF"/>
-                </a:solidFill>
-                <a:latin typeface="Calibri"/>
-                <a:cs typeface="Calibri"/>
-              </a:rPr>
-              <a:t> </a:t>
-            </a:r>
-            <a:r>
-              <a:rPr lang="en-US" sz="1000" noProof="0" dirty="0">
-                <a:solidFill>
-                  <a:srgbClr val="FFFFFF"/>
-                </a:solidFill>
-                <a:latin typeface="Calibri"/>
-                <a:cs typeface="Calibri"/>
-              </a:rPr>
-              <a:t>years</a:t>
-            </a:r>
-            <a:r>
-              <a:rPr lang="en-US" sz="1000" spc="-25" noProof="0" dirty="0">
-                <a:solidFill>
-                  <a:srgbClr val="FFFFFF"/>
-                </a:solidFill>
-                <a:latin typeface="Calibri"/>
-                <a:cs typeface="Calibri"/>
-              </a:rPr>
-              <a:t> </a:t>
-            </a:r>
-            <a:r>
-              <a:rPr lang="en-US" sz="1000" noProof="0" dirty="0">
-                <a:solidFill>
-                  <a:srgbClr val="FFFFFF"/>
-                </a:solidFill>
-                <a:latin typeface="Calibri"/>
-                <a:cs typeface="Calibri"/>
-              </a:rPr>
-              <a:t>old,</a:t>
-            </a:r>
-            <a:r>
-              <a:rPr lang="en-US" sz="1000" spc="-25" noProof="0" dirty="0">
-                <a:solidFill>
-                  <a:srgbClr val="FFFFFF"/>
-                </a:solidFill>
-                <a:latin typeface="Calibri"/>
-                <a:cs typeface="Calibri"/>
-              </a:rPr>
-              <a:t> </a:t>
-            </a:r>
-            <a:r>
-              <a:rPr lang="en-US" sz="1000" noProof="0" dirty="0">
-                <a:solidFill>
-                  <a:srgbClr val="FFFFFF"/>
-                </a:solidFill>
-                <a:latin typeface="Calibri"/>
-                <a:cs typeface="Calibri"/>
-              </a:rPr>
-              <a:t>3</a:t>
-            </a:r>
-            <a:r>
-              <a:rPr lang="en-US" sz="1000" spc="-20" noProof="0" dirty="0">
-                <a:solidFill>
-                  <a:srgbClr val="FFFFFF"/>
-                </a:solidFill>
-                <a:latin typeface="Calibri"/>
-                <a:cs typeface="Calibri"/>
-              </a:rPr>
-              <a:t> </a:t>
-            </a:r>
-            <a:r>
-              <a:rPr lang="en-US" sz="1000" spc="-10" noProof="0" dirty="0">
-                <a:solidFill>
-                  <a:srgbClr val="FFFFFF"/>
-                </a:solidFill>
-                <a:latin typeface="Calibri"/>
-                <a:cs typeface="Calibri"/>
-              </a:rPr>
-              <a:t>children</a:t>
+              <a:t>Remote from France - Paris</a:t>
             </a:r>
             <a:endParaRPr lang="en-US" sz="1000" noProof="0" dirty="0">
               <a:latin typeface="Calibri"/>
@@ -3118,27 +3026,7 @@
                 <a:latin typeface="Calibri"/>
                 <a:cs typeface="Calibri"/>
               </a:rPr>
-              <a:t>Paris,</a:t>
-            </a:r>
-            <a:r>
-              <a:rPr lang="en-US" sz="1000" spc="-35" noProof="0" dirty="0">
-                <a:solidFill>
-                  <a:srgbClr val="FFFFFF"/>
-                </a:solidFill>
-                <a:latin typeface="Calibri"/>
-                <a:cs typeface="Calibri"/>
-              </a:rPr>
-              <a:t> </a:t>
-            </a:r>
-            <a:r>
-              <a:rPr lang="en-US" sz="1000" spc="-10" noProof="0" dirty="0">
-                <a:solidFill>
-                  <a:srgbClr val="FFFFFF"/>
-                </a:solidFill>
-                <a:latin typeface="Calibri"/>
-                <a:cs typeface="Calibri"/>
-              </a:rPr>
-              <a:t>France</a:t>
+              <a:t>Hands-on Full Stack roles</a:t>
             </a:r>
             <a:endParaRPr lang="en-US" sz="1000" noProof="0" dirty="0">
               <a:latin typeface="Calibri"/>
@@ -3162,67 +3050,7 @@
                 <a:latin typeface="Arial"/>
                 <a:cs typeface="Arial"/>
               </a:rPr>
-              <a:t>•</a:t>
-            </a:r>
-            <a:r>
-              <a:rPr lang="en-US" sz="1000" spc="-45" noProof="0" dirty="0">
-                <a:solidFill>
-                  <a:srgbClr val="FFFFFF"/>
-                </a:solidFill>
-                <a:latin typeface="Arial"/>
-                <a:cs typeface="Arial"/>
-              </a:rPr>
-              <a:t> </a:t>
-            </a:r>
-            <a:r>
-              <a:rPr lang="en-US" sz="1000" noProof="0" dirty="0">
-                <a:solidFill>
-                  <a:srgbClr val="FFFFFF"/>
-                </a:solidFill>
-                <a:latin typeface="Calibri"/>
-                <a:cs typeface="Calibri"/>
-              </a:rPr>
-              <a:t>+33</a:t>
-            </a:r>
-            <a:r>
-              <a:rPr lang="en-US" sz="1000" spc="40" noProof="0" dirty="0">
-                <a:solidFill>
-                  <a:srgbClr val="FFFFFF"/>
-                </a:solidFill>
-                <a:latin typeface="Calibri"/>
-                <a:cs typeface="Calibri"/>
-              </a:rPr>
-              <a:t> </a:t>
-            </a:r>
-            <a:r>
-              <a:rPr lang="en-US" sz="1000" spc="-10" noProof="0" dirty="0">
-                <a:solidFill>
-                  <a:srgbClr val="FFFFFF"/>
-                </a:solidFill>
-                <a:latin typeface="Calibri"/>
-                <a:cs typeface="Calibri"/>
-              </a:rPr>
-              <a:t>6-75-</a:t>
-            </a:r>
-            <a:r>
-              <a:rPr lang="en-US" sz="1000" spc="-20" noProof="0" dirty="0">
-                <a:solidFill>
-                  <a:srgbClr val="FFFFFF"/>
-                </a:solidFill>
-                <a:latin typeface="Calibri"/>
-                <a:cs typeface="Calibri"/>
-              </a:rPr>
-              <a:t>05-35-</a:t>
-            </a:r>
-            <a:r>
-              <a:rPr lang="en-US" sz="1000" spc="-25" noProof="0" dirty="0">
-                <a:solidFill>
-                  <a:srgbClr val="FFFFFF"/>
-                </a:solidFill>
-                <a:latin typeface="Calibri"/>
-                <a:cs typeface="Calibri"/>
-              </a:rPr>
-              <a:t>32</a:t>
+              <a:t>• +33 6-75-05-35-32</a:t>
             </a:r>
             <a:endParaRPr lang="en-US" sz="1000" noProof="0" dirty="0">
               <a:latin typeface="Calibri"/>
@@ -3297,7 +3125,7 @@
                   </a:extLst>
                 </a:hlinkClick>
               </a:rPr>
-              <a:t>https://antoinechedebois.com</a:t>
+              <a:t>antoinechedebois.com</a:t>
             </a:r>
             <a:endParaRPr lang="en-US" sz="1000" noProof="0" dirty="0">
               <a:solidFill>
@@ -3317,8 +3145,8 @@
         </p:nvSpPr>
         <p:spPr>
           <a:xfrm>
-            <a:off x="2348230" y="4908996"/>
-            <a:ext cx="4419726" cy="958404"/>
+            <a:off x="2348230" y="4767740"/>
+            <a:ext cx="4419726" cy="1099660"/>
           </a:xfrm>
           <a:prstGeom prst="rect">
             <a:avLst/>
@@ -3351,77 +3179,7 @@
                 <a:latin typeface="Calibri"/>
                 <a:cs typeface="Calibri"/>
               </a:rPr>
-              <a:t>SENIOR</a:t>
-            </a:r>
-            <a:r>
-              <a:rPr lang="en-US" sz="1100" b="1" spc="-25" noProof="0" dirty="0">
-                <a:solidFill>
-                  <a:srgbClr val="3A6278"/>
-                </a:solidFill>
-                <a:latin typeface="Calibri"/>
-                <a:cs typeface="Calibri"/>
-              </a:rPr>
-              <a:t> </a:t>
-            </a:r>
-            <a:r>
-              <a:rPr lang="en-US" sz="1100" b="1" spc="-50" dirty="0">
-                <a:solidFill>
-                  <a:srgbClr val="3A6278"/>
-                </a:solidFill>
-                <a:latin typeface="Calibri"/>
-                <a:cs typeface="Calibri"/>
-              </a:rPr>
-              <a:t>FULL STACK</a:t>
-            </a:r>
-            <a:r>
-              <a:rPr lang="en-US" sz="1100" b="1" noProof="0" dirty="0">
-                <a:solidFill>
-                  <a:srgbClr val="3A6278"/>
-                </a:solidFill>
-                <a:latin typeface="Calibri"/>
-                <a:cs typeface="Calibri"/>
-              </a:rPr>
-              <a:t> /</a:t>
-            </a:r>
-            <a:r>
-              <a:rPr lang="en-US" sz="1100" b="1" spc="-5" noProof="0" dirty="0">
-                <a:solidFill>
-                  <a:srgbClr val="3A6278"/>
-                </a:solidFill>
-                <a:latin typeface="Calibri"/>
-                <a:cs typeface="Calibri"/>
-              </a:rPr>
-              <a:t> </a:t>
-            </a:r>
-            <a:r>
-              <a:rPr lang="en-US" sz="1100" b="1" spc="-10" noProof="0" dirty="0">
-                <a:solidFill>
-                  <a:srgbClr val="3A6278"/>
-                </a:solidFill>
-                <a:latin typeface="Calibri"/>
-                <a:cs typeface="Calibri"/>
-              </a:rPr>
-              <a:t>TECHNICAL</a:t>
-            </a:r>
-            <a:r>
-              <a:rPr lang="en-US" sz="1100" b="1" spc="-40" noProof="0" dirty="0">
-                <a:solidFill>
-                  <a:srgbClr val="3A6278"/>
-                </a:solidFill>
-                <a:latin typeface="Calibri"/>
-                <a:cs typeface="Calibri"/>
-              </a:rPr>
-              <a:t> </a:t>
-            </a:r>
-            <a:r>
-              <a:rPr lang="en-US" sz="1100" b="1" spc="-20" noProof="0" dirty="0">
-                <a:solidFill>
-                  <a:srgbClr val="3A6278"/>
-                </a:solidFill>
-                <a:latin typeface="Calibri"/>
-                <a:cs typeface="Calibri"/>
-              </a:rPr>
-              <a:t>LEAD</a:t>
+              <a:t>SENIOR FULL STACK / TECHNICAL LEAD</a:t>
             </a:r>
             <a:endParaRPr lang="en-US" sz="1100" noProof="0" dirty="0">
               <a:latin typeface="Calibri"/>
@@ -3442,82 +3200,8 @@
                 <a:latin typeface="Calibri"/>
                 <a:cs typeface="Calibri"/>
               </a:rPr>
-              <a:t>FRENCH</a:t>
-            </a:r>
-            <a:r>
-              <a:rPr lang="en-US" sz="1400" spc="-55" noProof="0" dirty="0">
-                <a:latin typeface="Calibri"/>
-                <a:cs typeface="Calibri"/>
-              </a:rPr>
-              <a:t> </a:t>
-            </a:r>
-            <a:r>
-              <a:rPr lang="en-US" sz="1400" noProof="0" dirty="0">
-                <a:latin typeface="Calibri"/>
-                <a:cs typeface="Calibri"/>
-              </a:rPr>
-              <a:t>ARMY</a:t>
-            </a:r>
-            <a:r>
-              <a:rPr lang="en-US" sz="1400" spc="-40" noProof="0" dirty="0">
-                <a:latin typeface="Calibri"/>
-                <a:cs typeface="Calibri"/>
-              </a:rPr>
-              <a:t> </a:t>
-            </a:r>
-            <a:r>
-              <a:rPr lang="en-US" sz="1400" noProof="0" dirty="0">
-                <a:latin typeface="Calibri"/>
-                <a:cs typeface="Calibri"/>
-              </a:rPr>
-              <a:t>|</a:t>
-            </a:r>
-            <a:r>
-              <a:rPr lang="en-US" sz="1400" spc="-25" noProof="0" dirty="0">
-                <a:latin typeface="Calibri"/>
-                <a:cs typeface="Calibri"/>
-              </a:rPr>
-              <a:t> </a:t>
-            </a:r>
-            <a:r>
-              <a:rPr lang="en-US" sz="1400" noProof="0" dirty="0">
-                <a:latin typeface="Calibri"/>
-                <a:cs typeface="Calibri"/>
-              </a:rPr>
-              <a:t>2017</a:t>
-            </a:r>
-            <a:r>
-              <a:rPr lang="en-US" sz="1400" spc="-25" noProof="0" dirty="0">
-                <a:latin typeface="Calibri"/>
-                <a:cs typeface="Calibri"/>
-              </a:rPr>
-              <a:t> </a:t>
-            </a:r>
-            <a:r>
-              <a:rPr lang="en-US" sz="1400" noProof="0" dirty="0">
-                <a:latin typeface="Calibri"/>
-                <a:cs typeface="Calibri"/>
-              </a:rPr>
-              <a:t>to</a:t>
-            </a:r>
-            <a:r>
-              <a:rPr lang="en-US" sz="1400" spc="-25" noProof="0" dirty="0">
-                <a:latin typeface="Calibri"/>
-                <a:cs typeface="Calibri"/>
-              </a:rPr>
-              <a:t> </a:t>
-            </a:r>
-            <a:r>
-              <a:rPr lang="en-US" sz="1400" spc="-20" noProof="0" dirty="0">
-                <a:latin typeface="Calibri"/>
-                <a:cs typeface="Calibri"/>
-              </a:rPr>
-              <a:t>2020</a:t>
-            </a:r>
-            <a:endParaRPr lang="en-US" sz="1400" noProof="0" dirty="0">
-              <a:latin typeface="Calibri"/>
-              <a:cs typeface="Calibri"/>
-            </a:endParaRPr>
+              <a:t>FRENCH ARMY | 2017 to 2020</a:t>
+            </a:r>
           </a:p>
           <a:p>
             <a:pPr marL="177165" marR="57785">
@@ -3533,285 +3217,8 @@
                 <a:latin typeface="Calibri"/>
                 <a:cs typeface="Calibri"/>
               </a:rPr>
-              <a:t>Technical</a:t>
-            </a:r>
-            <a:r>
-              <a:rPr lang="en-US" sz="900" spc="-10" noProof="0" dirty="0">
-                <a:latin typeface="Calibri"/>
-                <a:cs typeface="Calibri"/>
-              </a:rPr>
-              <a:t> </a:t>
-            </a:r>
-            <a:r>
-              <a:rPr lang="en-US" sz="900" noProof="0" dirty="0">
-                <a:latin typeface="Calibri"/>
-                <a:cs typeface="Calibri"/>
-              </a:rPr>
-              <a:t>leader</a:t>
-            </a:r>
-            <a:r>
-              <a:rPr lang="en-US" sz="900" spc="5" noProof="0" dirty="0">
-                <a:latin typeface="Calibri"/>
-                <a:cs typeface="Calibri"/>
-              </a:rPr>
-              <a:t> </a:t>
-            </a:r>
-            <a:r>
-              <a:rPr lang="en-US" sz="900" noProof="0" dirty="0">
-                <a:latin typeface="Calibri"/>
-                <a:cs typeface="Calibri"/>
-              </a:rPr>
-              <a:t>of</a:t>
-            </a:r>
-            <a:r>
-              <a:rPr lang="en-US" sz="900" spc="-25" noProof="0" dirty="0">
-                <a:latin typeface="Calibri"/>
-                <a:cs typeface="Calibri"/>
-              </a:rPr>
-              <a:t> </a:t>
-            </a:r>
-            <a:r>
-              <a:rPr lang="en-US" sz="900" noProof="0" dirty="0">
-                <a:latin typeface="Calibri"/>
-                <a:cs typeface="Calibri"/>
-              </a:rPr>
-              <a:t>a</a:t>
-            </a:r>
-            <a:r>
-              <a:rPr lang="en-US" sz="900" spc="-15" noProof="0" dirty="0">
-                <a:latin typeface="Calibri"/>
-                <a:cs typeface="Calibri"/>
-              </a:rPr>
-              <a:t> </a:t>
-            </a:r>
-            <a:r>
-              <a:rPr lang="en-US" sz="900" noProof="0" dirty="0">
-                <a:latin typeface="Calibri"/>
-                <a:cs typeface="Calibri"/>
-              </a:rPr>
-              <a:t>5-engineer</a:t>
-            </a:r>
-            <a:r>
-              <a:rPr lang="en-US" sz="900" spc="20" noProof="0" dirty="0">
-                <a:latin typeface="Calibri"/>
-                <a:cs typeface="Calibri"/>
-              </a:rPr>
-              <a:t> </a:t>
-            </a:r>
-            <a:r>
-              <a:rPr lang="en-US" sz="900" noProof="0" dirty="0">
-                <a:latin typeface="Calibri"/>
-                <a:cs typeface="Calibri"/>
-              </a:rPr>
-              <a:t>team.</a:t>
-            </a:r>
-            <a:r>
-              <a:rPr lang="en-US" sz="900" spc="-15" noProof="0" dirty="0">
-                <a:latin typeface="Calibri"/>
-                <a:cs typeface="Calibri"/>
-              </a:rPr>
-              <a:t> </a:t>
-            </a:r>
-            <a:r>
-              <a:rPr lang="en-US" sz="900" noProof="0" dirty="0">
-                <a:latin typeface="Calibri"/>
-                <a:cs typeface="Calibri"/>
-              </a:rPr>
-              <a:t>Translation</a:t>
-            </a:r>
-            <a:r>
-              <a:rPr lang="en-US" sz="900" spc="-15" noProof="0" dirty="0">
-                <a:latin typeface="Calibri"/>
-                <a:cs typeface="Calibri"/>
-              </a:rPr>
-              <a:t> </a:t>
-            </a:r>
-            <a:r>
-              <a:rPr lang="en-US" sz="900" noProof="0" dirty="0">
-                <a:latin typeface="Calibri"/>
-                <a:cs typeface="Calibri"/>
-              </a:rPr>
-              <a:t>of</a:t>
-            </a:r>
-            <a:r>
-              <a:rPr lang="en-US" sz="900" spc="-30" noProof="0" dirty="0">
-                <a:latin typeface="Calibri"/>
-                <a:cs typeface="Calibri"/>
-              </a:rPr>
-              <a:t> </a:t>
-            </a:r>
-            <a:r>
-              <a:rPr lang="en-US" sz="900" noProof="0" dirty="0">
-                <a:latin typeface="Calibri"/>
-                <a:cs typeface="Calibri"/>
-              </a:rPr>
-              <a:t>the</a:t>
-            </a:r>
-            <a:r>
-              <a:rPr lang="en-US" sz="900" spc="-10" noProof="0" dirty="0">
-                <a:latin typeface="Calibri"/>
-                <a:cs typeface="Calibri"/>
-              </a:rPr>
-              <a:t> </a:t>
-            </a:r>
-            <a:r>
-              <a:rPr lang="en-US" sz="900" noProof="0" dirty="0">
-                <a:latin typeface="Calibri"/>
-                <a:cs typeface="Calibri"/>
-              </a:rPr>
-              <a:t>customer</a:t>
-            </a:r>
-            <a:r>
-              <a:rPr lang="en-US" sz="900" spc="-15" noProof="0" dirty="0">
-                <a:latin typeface="Calibri"/>
-                <a:cs typeface="Calibri"/>
-              </a:rPr>
-              <a:t> </a:t>
-            </a:r>
-            <a:r>
-              <a:rPr lang="en-US" sz="900" noProof="0" dirty="0">
-                <a:latin typeface="Calibri"/>
-                <a:cs typeface="Calibri"/>
-              </a:rPr>
-              <a:t>needs in</a:t>
-            </a:r>
-            <a:r>
-              <a:rPr lang="en-US" sz="900" spc="-10" noProof="0" dirty="0">
-                <a:latin typeface="Calibri"/>
-                <a:cs typeface="Calibri"/>
-              </a:rPr>
-              <a:t> wireframes,</a:t>
-            </a:r>
-            <a:r>
-              <a:rPr lang="en-US" sz="900" spc="-15" noProof="0" dirty="0">
-                <a:latin typeface="Calibri"/>
-                <a:cs typeface="Calibri"/>
-              </a:rPr>
-              <a:t> </a:t>
-            </a:r>
-            <a:r>
-              <a:rPr lang="en-US" sz="900" noProof="0" dirty="0">
-                <a:latin typeface="Calibri"/>
-                <a:cs typeface="Calibri"/>
-              </a:rPr>
-              <a:t>HTML</a:t>
-            </a:r>
-            <a:r>
-              <a:rPr lang="en-US" sz="900" spc="-25" noProof="0" dirty="0">
-                <a:latin typeface="Calibri"/>
-                <a:cs typeface="Calibri"/>
-              </a:rPr>
-              <a:t> </a:t>
-            </a:r>
-            <a:r>
-              <a:rPr lang="en-US" sz="900" noProof="0" dirty="0">
-                <a:latin typeface="Calibri"/>
-                <a:cs typeface="Calibri"/>
-              </a:rPr>
-              <a:t>design</a:t>
-            </a:r>
-            <a:r>
-              <a:rPr lang="en-US" sz="900" spc="-5" noProof="0" dirty="0">
-                <a:latin typeface="Calibri"/>
-                <a:cs typeface="Calibri"/>
-              </a:rPr>
-              <a:t> </a:t>
-            </a:r>
-            <a:r>
-              <a:rPr lang="en-US" sz="900" noProof="0" dirty="0">
-                <a:latin typeface="Calibri"/>
-                <a:cs typeface="Calibri"/>
-              </a:rPr>
-              <a:t>and</a:t>
-            </a:r>
-            <a:r>
-              <a:rPr lang="en-US" sz="900" spc="-10" noProof="0" dirty="0">
-                <a:latin typeface="Calibri"/>
-                <a:cs typeface="Calibri"/>
-              </a:rPr>
-              <a:t> integration,</a:t>
-            </a:r>
-            <a:r>
-              <a:rPr lang="en-US" sz="900" spc="-5" noProof="0" dirty="0">
-                <a:latin typeface="Calibri"/>
-                <a:cs typeface="Calibri"/>
-              </a:rPr>
-              <a:t> </a:t>
-            </a:r>
-            <a:r>
-              <a:rPr lang="en-US" sz="900" spc="-10" noProof="0" dirty="0">
-                <a:latin typeface="Calibri"/>
-                <a:cs typeface="Calibri"/>
-              </a:rPr>
-              <a:t>frontend dev.</a:t>
-            </a:r>
-            <a:r>
-              <a:rPr lang="en-US" sz="900" noProof="0" dirty="0">
-                <a:latin typeface="Calibri"/>
-                <a:cs typeface="Calibri"/>
-              </a:rPr>
-              <a:t> using</a:t>
-            </a:r>
-            <a:r>
-              <a:rPr lang="en-US" sz="900" spc="-10" noProof="0" dirty="0">
-                <a:latin typeface="Calibri"/>
-                <a:cs typeface="Calibri"/>
-              </a:rPr>
-              <a:t> </a:t>
-            </a:r>
-            <a:r>
-              <a:rPr lang="en-US" sz="900" noProof="0" dirty="0">
-                <a:latin typeface="Calibri"/>
-                <a:cs typeface="Calibri"/>
-              </a:rPr>
-              <a:t>Angular</a:t>
-            </a:r>
-            <a:r>
-              <a:rPr lang="en-US" sz="900" spc="5" noProof="0" dirty="0">
-                <a:latin typeface="Calibri"/>
-                <a:cs typeface="Calibri"/>
-              </a:rPr>
-              <a:t> </a:t>
-            </a:r>
-            <a:r>
-              <a:rPr lang="en-US" sz="900" noProof="0" dirty="0">
-                <a:latin typeface="Calibri"/>
-                <a:cs typeface="Calibri"/>
-              </a:rPr>
-              <a:t>and</a:t>
-            </a:r>
-            <a:r>
-              <a:rPr lang="en-US" sz="900" spc="-10" noProof="0" dirty="0">
-                <a:latin typeface="Calibri"/>
-                <a:cs typeface="Calibri"/>
-              </a:rPr>
-              <a:t> </a:t>
-            </a:r>
-            <a:r>
-              <a:rPr lang="en-US" sz="900" noProof="0" dirty="0">
-                <a:latin typeface="Calibri"/>
-                <a:cs typeface="Calibri"/>
-              </a:rPr>
-              <a:t>backend dev. with</a:t>
-            </a:r>
-            <a:r>
-              <a:rPr lang="en-US" sz="900" spc="-25" noProof="0" dirty="0">
-                <a:latin typeface="Calibri"/>
-                <a:cs typeface="Calibri"/>
-              </a:rPr>
-              <a:t> </a:t>
-            </a:r>
-            <a:r>
-              <a:rPr lang="en-US" sz="900" spc="-10" noProof="0" dirty="0">
-                <a:latin typeface="Calibri"/>
-                <a:cs typeface="Calibri"/>
-              </a:rPr>
-              <a:t>Symfony.</a:t>
-            </a:r>
-            <a:endParaRPr lang="en-US" sz="900" noProof="0" dirty="0">
-              <a:latin typeface="Calibri"/>
-              <a:cs typeface="Calibri"/>
-            </a:endParaRPr>
+              <a:t>Led a 5-engineer team delivering internal web applications from user needs to production. Strong focus on product delivery, UI integration, APIs, code quality and team mentoring.</a:t>
+            </a:r>
           </a:p>
           <a:p>
             <a:pPr marL="177165" marR="5080">
@@ -3827,315 +3234,7 @@
                 <a:latin typeface="Calibri"/>
                 <a:cs typeface="Calibri"/>
               </a:rPr>
-              <a:t>Stack</a:t>
-            </a:r>
-            <a:r>
-              <a:rPr lang="en-US" sz="900" noProof="0" dirty="0">
-                <a:latin typeface="Calibri"/>
-                <a:cs typeface="Calibri"/>
-              </a:rPr>
-              <a:t>:</a:t>
-            </a:r>
-            <a:r>
-              <a:rPr lang="en-US" sz="900" spc="-30" noProof="0" dirty="0">
-                <a:latin typeface="Calibri"/>
-                <a:cs typeface="Calibri"/>
-              </a:rPr>
-              <a:t> </a:t>
-            </a:r>
-            <a:r>
-              <a:rPr lang="en-US" sz="900" noProof="0" dirty="0">
-                <a:latin typeface="Calibri"/>
-                <a:cs typeface="Calibri"/>
-              </a:rPr>
-              <a:t>Angular,</a:t>
-            </a:r>
-            <a:r>
-              <a:rPr lang="en-US" sz="900" spc="-20" noProof="0" dirty="0">
-                <a:latin typeface="Calibri"/>
-                <a:cs typeface="Calibri"/>
-              </a:rPr>
-              <a:t> </a:t>
-            </a:r>
-            <a:r>
-              <a:rPr lang="en-US" sz="900" spc="-10" noProof="0" dirty="0">
-                <a:latin typeface="Calibri"/>
-                <a:cs typeface="Calibri"/>
-              </a:rPr>
-              <a:t>Symfony,</a:t>
-            </a:r>
-            <a:r>
-              <a:rPr lang="en-US" sz="900" spc="-25" noProof="0" dirty="0">
-                <a:latin typeface="Calibri"/>
-                <a:cs typeface="Calibri"/>
-              </a:rPr>
-              <a:t> </a:t>
-            </a:r>
-            <a:r>
-              <a:rPr lang="en-US" sz="900" noProof="0" dirty="0">
-                <a:latin typeface="Calibri"/>
-                <a:cs typeface="Calibri"/>
-              </a:rPr>
-              <a:t>Bootstrap,</a:t>
-            </a:r>
-            <a:r>
-              <a:rPr lang="en-US" sz="900" spc="-30" noProof="0" dirty="0">
-                <a:latin typeface="Calibri"/>
-                <a:cs typeface="Calibri"/>
-              </a:rPr>
-              <a:t> </a:t>
-            </a:r>
-            <a:r>
-              <a:rPr lang="en-US" sz="900" noProof="0" dirty="0">
-                <a:latin typeface="Calibri"/>
-                <a:cs typeface="Calibri"/>
-              </a:rPr>
-              <a:t>LESS,</a:t>
-            </a:r>
-            <a:r>
-              <a:rPr lang="en-US" sz="900" spc="-25" noProof="0" dirty="0">
-                <a:latin typeface="Calibri"/>
-                <a:cs typeface="Calibri"/>
-              </a:rPr>
-              <a:t> </a:t>
-            </a:r>
-            <a:r>
-              <a:rPr lang="en-US" sz="900" noProof="0" dirty="0">
-                <a:latin typeface="Calibri"/>
-                <a:cs typeface="Calibri"/>
-              </a:rPr>
-              <a:t>MySQL,</a:t>
-            </a:r>
-            <a:r>
-              <a:rPr lang="en-US" sz="900" spc="-25" noProof="0" dirty="0">
-                <a:latin typeface="Calibri"/>
-                <a:cs typeface="Calibri"/>
-              </a:rPr>
-              <a:t> </a:t>
-            </a:r>
-            <a:r>
-              <a:rPr lang="en-US" sz="900" noProof="0" dirty="0">
-                <a:latin typeface="Calibri"/>
-                <a:cs typeface="Calibri"/>
-              </a:rPr>
-              <a:t>Redis,</a:t>
-            </a:r>
-            <a:r>
-              <a:rPr lang="en-US" sz="900" spc="-30" noProof="0" dirty="0">
-                <a:latin typeface="Calibri"/>
-                <a:cs typeface="Calibri"/>
-              </a:rPr>
-              <a:t> </a:t>
-            </a:r>
-            <a:r>
-              <a:rPr lang="en-US" sz="900" noProof="0" dirty="0">
-                <a:latin typeface="Calibri"/>
-                <a:cs typeface="Calibri"/>
-              </a:rPr>
-              <a:t>TypeScript,</a:t>
-            </a:r>
-            <a:r>
-              <a:rPr lang="en-US" sz="900" spc="-20" noProof="0" dirty="0">
-                <a:latin typeface="Calibri"/>
-                <a:cs typeface="Calibri"/>
-              </a:rPr>
-              <a:t> </a:t>
-            </a:r>
-            <a:r>
-              <a:rPr lang="en-US" sz="900" noProof="0" dirty="0">
-                <a:latin typeface="Calibri"/>
-                <a:cs typeface="Calibri"/>
-              </a:rPr>
-              <a:t>PHP</a:t>
-            </a:r>
-            <a:r>
-              <a:rPr lang="en-US" sz="900" spc="-25" noProof="0" dirty="0">
-                <a:latin typeface="Calibri"/>
-                <a:cs typeface="Calibri"/>
-              </a:rPr>
-              <a:t> </a:t>
-            </a:r>
-            <a:r>
-              <a:rPr lang="en-US" sz="900" spc="-10" noProof="0" dirty="0">
-                <a:latin typeface="Calibri"/>
-                <a:cs typeface="Calibri"/>
-              </a:rPr>
-              <a:t>Object</a:t>
-            </a:r>
-            <a:r>
-              <a:rPr lang="en-US" sz="900" noProof="0" dirty="0">
-                <a:latin typeface="Calibri"/>
-                <a:cs typeface="Calibri"/>
-              </a:rPr>
-              <a:t>,</a:t>
-            </a:r>
-            <a:r>
-              <a:rPr lang="en-US" sz="900" spc="-10" noProof="0" dirty="0">
-                <a:latin typeface="Calibri"/>
-                <a:cs typeface="Calibri"/>
-              </a:rPr>
-              <a:t> </a:t>
-            </a:r>
-            <a:r>
-              <a:rPr lang="en-US" sz="900" noProof="0" dirty="0">
-                <a:latin typeface="Calibri"/>
-                <a:cs typeface="Calibri"/>
-              </a:rPr>
-              <a:t>Gimp,</a:t>
-            </a:r>
-            <a:r>
-              <a:rPr lang="en-US" sz="900" spc="-10" noProof="0" dirty="0">
-                <a:latin typeface="Calibri"/>
-                <a:cs typeface="Calibri"/>
-              </a:rPr>
-              <a:t> </a:t>
-            </a:r>
-            <a:r>
-              <a:rPr lang="en-US" sz="900" noProof="0" dirty="0">
-                <a:latin typeface="Calibri"/>
-                <a:cs typeface="Calibri"/>
-              </a:rPr>
-              <a:t>Git,</a:t>
-            </a:r>
-            <a:r>
-              <a:rPr lang="en-US" sz="900" spc="-20" noProof="0" dirty="0">
-                <a:latin typeface="Calibri"/>
-                <a:cs typeface="Calibri"/>
-              </a:rPr>
-              <a:t> </a:t>
-            </a:r>
-            <a:r>
-              <a:rPr lang="en-US" sz="900" noProof="0" dirty="0">
-                <a:latin typeface="Calibri"/>
-                <a:cs typeface="Calibri"/>
-              </a:rPr>
-              <a:t>GitLab,</a:t>
-            </a:r>
-            <a:r>
-              <a:rPr lang="en-US" sz="900" spc="-15" noProof="0" dirty="0">
-                <a:latin typeface="Calibri"/>
-                <a:cs typeface="Calibri"/>
-              </a:rPr>
-              <a:t> </a:t>
-            </a:r>
-            <a:r>
-              <a:rPr lang="en-US" sz="900" noProof="0" dirty="0">
-                <a:latin typeface="Calibri"/>
-                <a:cs typeface="Calibri"/>
-              </a:rPr>
-              <a:t>Artifactory,</a:t>
-            </a:r>
-            <a:r>
-              <a:rPr lang="en-US" sz="900" spc="-20" noProof="0" dirty="0">
-                <a:latin typeface="Calibri"/>
-                <a:cs typeface="Calibri"/>
-              </a:rPr>
-              <a:t> </a:t>
-            </a:r>
-            <a:r>
-              <a:rPr lang="en-US" sz="900" noProof="0" dirty="0">
-                <a:latin typeface="Calibri"/>
-                <a:cs typeface="Calibri"/>
-              </a:rPr>
-              <a:t>Jira,</a:t>
-            </a:r>
-            <a:r>
-              <a:rPr lang="en-US" sz="900" spc="-15" noProof="0" dirty="0">
-                <a:latin typeface="Calibri"/>
-                <a:cs typeface="Calibri"/>
-              </a:rPr>
-              <a:t> </a:t>
-            </a:r>
-            <a:r>
-              <a:rPr lang="en-US" sz="900" spc="-10" noProof="0" dirty="0">
-                <a:latin typeface="Calibri"/>
-                <a:cs typeface="Calibri"/>
-              </a:rPr>
-              <a:t>Confluence, </a:t>
-            </a:r>
-            <a:r>
-              <a:rPr lang="en-US" sz="900" noProof="0" dirty="0">
-                <a:latin typeface="Calibri"/>
-                <a:cs typeface="Calibri"/>
-              </a:rPr>
-              <a:t>PHP</a:t>
-            </a:r>
-            <a:r>
-              <a:rPr lang="en-US" sz="900" spc="-30" noProof="0" dirty="0">
-                <a:latin typeface="Calibri"/>
-                <a:cs typeface="Calibri"/>
-              </a:rPr>
-              <a:t> </a:t>
-            </a:r>
-            <a:r>
-              <a:rPr lang="en-US" sz="900" noProof="0" dirty="0">
-                <a:latin typeface="Calibri"/>
-                <a:cs typeface="Calibri"/>
-              </a:rPr>
-              <a:t>Storm,</a:t>
-            </a:r>
-            <a:r>
-              <a:rPr lang="en-US" sz="900" spc="-15" noProof="0" dirty="0">
-                <a:latin typeface="Calibri"/>
-                <a:cs typeface="Calibri"/>
-              </a:rPr>
-              <a:t> </a:t>
-            </a:r>
-            <a:r>
-              <a:rPr lang="en-US" sz="900" noProof="0" dirty="0">
-                <a:latin typeface="Calibri"/>
-                <a:cs typeface="Calibri"/>
-              </a:rPr>
-              <a:t>Web</a:t>
-            </a:r>
-            <a:r>
-              <a:rPr lang="en-US" sz="900" spc="-15" noProof="0" dirty="0">
-                <a:latin typeface="Calibri"/>
-                <a:cs typeface="Calibri"/>
-              </a:rPr>
-              <a:t> </a:t>
-            </a:r>
-            <a:r>
-              <a:rPr lang="en-US" sz="900" noProof="0" dirty="0">
-                <a:latin typeface="Calibri"/>
-                <a:cs typeface="Calibri"/>
-              </a:rPr>
-              <a:t>Storm,</a:t>
-            </a:r>
-            <a:r>
-              <a:rPr lang="en-US" sz="900" spc="-25" noProof="0" dirty="0">
-                <a:latin typeface="Calibri"/>
-                <a:cs typeface="Calibri"/>
-              </a:rPr>
-              <a:t> </a:t>
-            </a:r>
-            <a:r>
-              <a:rPr lang="en-US" sz="900" spc="-10" noProof="0" dirty="0">
-                <a:latin typeface="Calibri"/>
-                <a:cs typeface="Calibri"/>
-              </a:rPr>
-              <a:t>Debian, </a:t>
-            </a:r>
-            <a:r>
-              <a:rPr lang="en-US" sz="900" noProof="0" dirty="0">
-                <a:latin typeface="Calibri"/>
-                <a:cs typeface="Calibri"/>
-              </a:rPr>
-              <a:t>Docker,</a:t>
-            </a:r>
-            <a:r>
-              <a:rPr lang="en-US" sz="900" spc="-25" noProof="0" dirty="0">
-                <a:latin typeface="Calibri"/>
-                <a:cs typeface="Calibri"/>
-              </a:rPr>
-              <a:t> </a:t>
-            </a:r>
-            <a:r>
-              <a:rPr lang="en-US" sz="900" spc="-10" noProof="0" dirty="0">
-                <a:latin typeface="Calibri"/>
-                <a:cs typeface="Calibri"/>
-              </a:rPr>
-              <a:t>Nginx...</a:t>
+              <a:t>Stack: Angular, TypeScript, REST APIs, PHP, MySQL, Redis, GitLab, Artifactory, Jira, Confluence, Docker, Debian, Nginx...</a:t>
             </a:r>
             <a:endParaRPr lang="en-US" sz="900" noProof="0" dirty="0">
               <a:latin typeface="Calibri"/>
@@ -4153,7 +3252,7 @@
         <p:spPr>
           <a:xfrm>
             <a:off x="2343150" y="5963920"/>
-            <a:ext cx="4419726" cy="970280"/>
+            <a:ext cx="4419726" cy="813428"/>
           </a:xfrm>
           <a:prstGeom prst="rect">
             <a:avLst/>
@@ -4186,27 +3285,7 @@
                 <a:latin typeface="Calibri"/>
                 <a:cs typeface="Calibri"/>
               </a:rPr>
-              <a:t>SENIOR </a:t>
-            </a:r>
-            <a:r>
-              <a:rPr lang="en-US" sz="1100" b="1" spc="-50" dirty="0">
-                <a:solidFill>
-                  <a:srgbClr val="3A6278"/>
-                </a:solidFill>
-                <a:latin typeface="Calibri"/>
-                <a:cs typeface="Calibri"/>
-              </a:rPr>
-              <a:t>FULL STACK </a:t>
-            </a:r>
-            <a:r>
-              <a:rPr lang="en-US" sz="1100" b="1" spc="-25" noProof="0" dirty="0">
-                <a:solidFill>
-                  <a:srgbClr val="3A6278"/>
-                </a:solidFill>
-                <a:latin typeface="Calibri"/>
-                <a:cs typeface="Calibri"/>
-              </a:rPr>
-              <a:t>/ TEACH LEAD</a:t>
+              <a:t>SENIOR FULL STACK / TECH LEAD</a:t>
             </a:r>
             <a:endParaRPr lang="en-US" sz="1100" noProof="0" dirty="0">
               <a:latin typeface="Calibri"/>
@@ -4227,82 +3306,8 @@
                 <a:latin typeface="Calibri"/>
                 <a:cs typeface="Calibri"/>
               </a:rPr>
-              <a:t>FRENCH</a:t>
-            </a:r>
-            <a:r>
-              <a:rPr lang="en-US" sz="1400" spc="-45" noProof="0" dirty="0">
-                <a:latin typeface="Calibri"/>
-                <a:cs typeface="Calibri"/>
-              </a:rPr>
-              <a:t> </a:t>
-            </a:r>
-            <a:r>
-              <a:rPr lang="en-US" sz="1400" spc="-10" noProof="0" dirty="0">
-                <a:latin typeface="Calibri"/>
-                <a:cs typeface="Calibri"/>
-              </a:rPr>
-              <a:t>TERRITORIAL</a:t>
-            </a:r>
-            <a:r>
-              <a:rPr lang="en-US" sz="1400" spc="-35" noProof="0" dirty="0">
-                <a:latin typeface="Calibri"/>
-                <a:cs typeface="Calibri"/>
-              </a:rPr>
-              <a:t> </a:t>
-            </a:r>
-            <a:r>
-              <a:rPr lang="en-US" sz="1400" spc="-10" noProof="0" dirty="0">
-                <a:latin typeface="Calibri"/>
-                <a:cs typeface="Calibri"/>
-              </a:rPr>
-              <a:t>COLLECTIVITY|</a:t>
-            </a:r>
-            <a:r>
-              <a:rPr lang="en-US" sz="1400" spc="-15" noProof="0" dirty="0">
-                <a:latin typeface="Calibri"/>
-                <a:cs typeface="Calibri"/>
-              </a:rPr>
-              <a:t> </a:t>
-            </a:r>
-            <a:r>
-              <a:rPr lang="en-US" sz="1400" noProof="0" dirty="0">
-                <a:latin typeface="Calibri"/>
-                <a:cs typeface="Calibri"/>
-              </a:rPr>
-              <a:t>2016</a:t>
-            </a:r>
-            <a:r>
-              <a:rPr lang="en-US" sz="1400" spc="-15" noProof="0" dirty="0">
-                <a:latin typeface="Calibri"/>
-                <a:cs typeface="Calibri"/>
-              </a:rPr>
-              <a:t> </a:t>
-            </a:r>
-            <a:r>
-              <a:rPr lang="en-US" sz="1400" noProof="0" dirty="0">
-                <a:latin typeface="Calibri"/>
-                <a:cs typeface="Calibri"/>
-              </a:rPr>
-              <a:t>to</a:t>
-            </a:r>
-            <a:r>
-              <a:rPr lang="en-US" sz="1400" spc="-10" noProof="0" dirty="0">
-                <a:latin typeface="Calibri"/>
-                <a:cs typeface="Calibri"/>
-              </a:rPr>
-              <a:t> </a:t>
-            </a:r>
-            <a:r>
-              <a:rPr lang="en-US" sz="1400" spc="-20" noProof="0" dirty="0">
-                <a:latin typeface="Calibri"/>
-                <a:cs typeface="Calibri"/>
-              </a:rPr>
-              <a:t>2017</a:t>
-            </a:r>
-            <a:endParaRPr lang="en-US" sz="1400" noProof="0" dirty="0">
-              <a:latin typeface="Calibri"/>
-              <a:cs typeface="Calibri"/>
-            </a:endParaRPr>
+              <a:t>FRENCH TERRITORIAL COLLECTIVITY | 2016 to 2017</a:t>
+            </a:r>
           </a:p>
           <a:p>
             <a:pPr marL="177165" marR="249554">
@@ -4318,231 +3323,7 @@
                 <a:latin typeface="Calibri"/>
                 <a:cs typeface="Calibri"/>
               </a:rPr>
-              <a:t>Development</a:t>
-            </a:r>
-            <a:r>
-              <a:rPr lang="en-US" sz="900" noProof="0" dirty="0">
-                <a:latin typeface="Calibri"/>
-                <a:cs typeface="Calibri"/>
-              </a:rPr>
-              <a:t> of</a:t>
-            </a:r>
-            <a:r>
-              <a:rPr lang="en-US" sz="900" spc="-30" noProof="0" dirty="0">
-                <a:latin typeface="Calibri"/>
-                <a:cs typeface="Calibri"/>
-              </a:rPr>
-              <a:t> </a:t>
-            </a:r>
-            <a:r>
-              <a:rPr lang="en-US" sz="900" noProof="0" dirty="0">
-                <a:latin typeface="Calibri"/>
-                <a:cs typeface="Calibri"/>
-              </a:rPr>
-              <a:t>Web</a:t>
-            </a:r>
-            <a:r>
-              <a:rPr lang="en-US" sz="900" spc="-20" noProof="0" dirty="0">
-                <a:latin typeface="Calibri"/>
-                <a:cs typeface="Calibri"/>
-              </a:rPr>
-              <a:t> </a:t>
-            </a:r>
-            <a:r>
-              <a:rPr lang="en-US" sz="900" noProof="0" dirty="0">
-                <a:latin typeface="Calibri"/>
-                <a:cs typeface="Calibri"/>
-              </a:rPr>
-              <a:t>applications</a:t>
-            </a:r>
-            <a:r>
-              <a:rPr lang="en-US" sz="900" spc="-5" noProof="0" dirty="0">
-                <a:latin typeface="Calibri"/>
-                <a:cs typeface="Calibri"/>
-              </a:rPr>
-              <a:t> </a:t>
-            </a:r>
-            <a:r>
-              <a:rPr lang="en-US" sz="900" noProof="0" dirty="0">
-                <a:latin typeface="Calibri"/>
-                <a:cs typeface="Calibri"/>
-              </a:rPr>
-              <a:t>for</a:t>
-            </a:r>
-            <a:r>
-              <a:rPr lang="en-US" sz="900" spc="-30" noProof="0" dirty="0">
-                <a:latin typeface="Calibri"/>
-                <a:cs typeface="Calibri"/>
-              </a:rPr>
-              <a:t> </a:t>
-            </a:r>
-            <a:r>
-              <a:rPr lang="en-US" sz="900" noProof="0" dirty="0">
-                <a:latin typeface="Calibri"/>
-                <a:cs typeface="Calibri"/>
-              </a:rPr>
-              <a:t>agents</a:t>
-            </a:r>
-            <a:r>
-              <a:rPr lang="en-US" sz="900" spc="-5" noProof="0" dirty="0">
-                <a:latin typeface="Calibri"/>
-                <a:cs typeface="Calibri"/>
-              </a:rPr>
-              <a:t> </a:t>
-            </a:r>
-            <a:r>
-              <a:rPr lang="en-US" sz="900" noProof="0" dirty="0">
-                <a:latin typeface="Calibri"/>
-                <a:cs typeface="Calibri"/>
-              </a:rPr>
-              <a:t>and</a:t>
-            </a:r>
-            <a:r>
-              <a:rPr lang="en-US" sz="900" spc="-20" noProof="0" dirty="0">
-                <a:latin typeface="Calibri"/>
-                <a:cs typeface="Calibri"/>
-              </a:rPr>
-              <a:t> </a:t>
-            </a:r>
-            <a:r>
-              <a:rPr lang="en-US" sz="900" noProof="0" dirty="0">
-                <a:latin typeface="Calibri"/>
-                <a:cs typeface="Calibri"/>
-              </a:rPr>
-              <a:t>users</a:t>
-            </a:r>
-            <a:r>
-              <a:rPr lang="en-US" sz="900" spc="-5" noProof="0" dirty="0">
-                <a:latin typeface="Calibri"/>
-                <a:cs typeface="Calibri"/>
-              </a:rPr>
-              <a:t> </a:t>
-            </a:r>
-            <a:r>
-              <a:rPr lang="en-US" sz="900" noProof="0" dirty="0">
-                <a:latin typeface="Calibri"/>
-                <a:cs typeface="Calibri"/>
-              </a:rPr>
-              <a:t>of</a:t>
-            </a:r>
-            <a:r>
-              <a:rPr lang="en-US" sz="900" spc="-30" noProof="0" dirty="0">
-                <a:latin typeface="Calibri"/>
-                <a:cs typeface="Calibri"/>
-              </a:rPr>
-              <a:t> </a:t>
-            </a:r>
-            <a:r>
-              <a:rPr lang="en-US" sz="900" noProof="0" dirty="0">
-                <a:latin typeface="Calibri"/>
-                <a:cs typeface="Calibri"/>
-              </a:rPr>
-              <a:t>the</a:t>
-            </a:r>
-            <a:r>
-              <a:rPr lang="en-US" sz="900" spc="-10" noProof="0" dirty="0">
-                <a:latin typeface="Calibri"/>
-                <a:cs typeface="Calibri"/>
-              </a:rPr>
-              <a:t> </a:t>
-            </a:r>
-            <a:r>
-              <a:rPr lang="en-US" sz="900" noProof="0" dirty="0">
-                <a:latin typeface="Calibri"/>
-                <a:cs typeface="Calibri"/>
-              </a:rPr>
-              <a:t>Council.</a:t>
-            </a:r>
-            <a:r>
-              <a:rPr lang="en-US" sz="900" spc="-10" noProof="0" dirty="0">
-                <a:latin typeface="Calibri"/>
-                <a:cs typeface="Calibri"/>
-              </a:rPr>
-              <a:t> </a:t>
-            </a:r>
-            <a:r>
-              <a:rPr lang="en-US" sz="900" noProof="0" dirty="0">
-                <a:latin typeface="Calibri"/>
-                <a:cs typeface="Calibri"/>
-              </a:rPr>
-              <a:t>Lead</a:t>
-            </a:r>
-            <a:r>
-              <a:rPr lang="en-US" sz="900" spc="-20" noProof="0" dirty="0">
-                <a:latin typeface="Calibri"/>
-                <a:cs typeface="Calibri"/>
-              </a:rPr>
-              <a:t> </a:t>
-            </a:r>
-            <a:r>
-              <a:rPr lang="en-US" sz="900" noProof="0" dirty="0">
-                <a:latin typeface="Calibri"/>
-                <a:cs typeface="Calibri"/>
-              </a:rPr>
-              <a:t>dev</a:t>
-            </a:r>
-            <a:r>
-              <a:rPr lang="en-US" sz="900" spc="-15" noProof="0" dirty="0">
-                <a:latin typeface="Calibri"/>
-                <a:cs typeface="Calibri"/>
-              </a:rPr>
-              <a:t> </a:t>
-            </a:r>
-            <a:r>
-              <a:rPr lang="en-US" sz="900" noProof="0" dirty="0">
-                <a:latin typeface="Calibri"/>
-                <a:cs typeface="Calibri"/>
-              </a:rPr>
-              <a:t>of</a:t>
-            </a:r>
-            <a:r>
-              <a:rPr lang="en-US" sz="900" spc="-20" noProof="0" dirty="0">
-                <a:latin typeface="Calibri"/>
-                <a:cs typeface="Calibri"/>
-              </a:rPr>
-              <a:t> </a:t>
-            </a:r>
-            <a:r>
-              <a:rPr lang="en-US" sz="900" spc="-50" noProof="0" dirty="0">
-                <a:latin typeface="Calibri"/>
-                <a:cs typeface="Calibri"/>
-              </a:rPr>
-              <a:t>a</a:t>
-            </a:r>
-            <a:r>
-              <a:rPr lang="en-US" sz="900" spc="500" noProof="0" dirty="0">
-                <a:latin typeface="Calibri"/>
-                <a:cs typeface="Calibri"/>
-              </a:rPr>
-              <a:t> </a:t>
-            </a:r>
-            <a:r>
-              <a:rPr lang="en-US" sz="900" noProof="0" dirty="0">
-                <a:latin typeface="Calibri"/>
-                <a:cs typeface="Calibri"/>
-              </a:rPr>
-              <a:t>small</a:t>
-            </a:r>
-            <a:r>
-              <a:rPr lang="en-US" sz="900" spc="-5" noProof="0" dirty="0">
-                <a:latin typeface="Calibri"/>
-                <a:cs typeface="Calibri"/>
-              </a:rPr>
-              <a:t> 3 dev </a:t>
-            </a:r>
-            <a:r>
-              <a:rPr lang="en-US" sz="900" noProof="0" dirty="0">
-                <a:latin typeface="Calibri"/>
-                <a:cs typeface="Calibri"/>
-              </a:rPr>
-              <a:t>team</a:t>
-            </a:r>
-            <a:r>
-              <a:rPr lang="en-US" sz="900" spc="-10" noProof="0" dirty="0">
-                <a:latin typeface="Calibri"/>
-                <a:cs typeface="Calibri"/>
-              </a:rPr>
-              <a:t>.</a:t>
+              <a:t>Built web applications for public agents and end users. Led a small 3-developer team on API integrations, search features and data-driven applications.</a:t>
             </a:r>
             <a:endParaRPr lang="en-US" sz="900" noProof="0" dirty="0">
               <a:latin typeface="Calibri"/>
@@ -4563,196 +3344,7 @@
                 <a:latin typeface="Calibri"/>
                 <a:cs typeface="Calibri"/>
               </a:rPr>
-              <a:t>Stack</a:t>
-            </a:r>
-            <a:r>
-              <a:rPr lang="en-US" sz="900" noProof="0" dirty="0">
-                <a:latin typeface="Calibri"/>
-                <a:cs typeface="Calibri"/>
-              </a:rPr>
-              <a:t>:</a:t>
-            </a:r>
-            <a:r>
-              <a:rPr lang="en-US" sz="900" spc="-35" noProof="0" dirty="0">
-                <a:latin typeface="Calibri"/>
-                <a:cs typeface="Calibri"/>
-              </a:rPr>
-              <a:t> </a:t>
-            </a:r>
-            <a:r>
-              <a:rPr lang="en-US" sz="900" noProof="0" dirty="0">
-                <a:latin typeface="Calibri"/>
-                <a:cs typeface="Calibri"/>
-              </a:rPr>
-              <a:t>Node.js,</a:t>
-            </a:r>
-            <a:r>
-              <a:rPr lang="en-US" sz="900" spc="-30" noProof="0" dirty="0">
-                <a:latin typeface="Calibri"/>
-                <a:cs typeface="Calibri"/>
-              </a:rPr>
-              <a:t> </a:t>
-            </a:r>
-            <a:r>
-              <a:rPr lang="en-US" sz="900" noProof="0" dirty="0">
-                <a:latin typeface="Calibri"/>
-                <a:cs typeface="Calibri"/>
-              </a:rPr>
-              <a:t>jQuery,</a:t>
-            </a:r>
-            <a:r>
-              <a:rPr lang="en-US" sz="900" spc="-20" noProof="0" dirty="0">
-                <a:latin typeface="Calibri"/>
-                <a:cs typeface="Calibri"/>
-              </a:rPr>
-              <a:t> </a:t>
-            </a:r>
-            <a:r>
-              <a:rPr lang="en-US" sz="900" noProof="0" dirty="0">
-                <a:latin typeface="Calibri"/>
-                <a:cs typeface="Calibri"/>
-              </a:rPr>
-              <a:t>Elasticsearch,</a:t>
-            </a:r>
-            <a:r>
-              <a:rPr lang="en-US" sz="900" spc="-25" noProof="0" dirty="0">
-                <a:latin typeface="Calibri"/>
-                <a:cs typeface="Calibri"/>
-              </a:rPr>
-              <a:t> </a:t>
-            </a:r>
-            <a:r>
-              <a:rPr lang="en-US" sz="900" noProof="0" dirty="0" err="1">
-                <a:latin typeface="Calibri"/>
-                <a:cs typeface="Calibri"/>
-              </a:rPr>
-              <a:t>CakePHP</a:t>
-            </a:r>
-            <a:r>
-              <a:rPr lang="en-US" sz="900" noProof="0" dirty="0">
-                <a:latin typeface="Calibri"/>
-                <a:cs typeface="Calibri"/>
-              </a:rPr>
-              <a:t>,</a:t>
-            </a:r>
-            <a:r>
-              <a:rPr lang="en-US" sz="900" spc="-40" noProof="0" dirty="0">
-                <a:latin typeface="Calibri"/>
-                <a:cs typeface="Calibri"/>
-              </a:rPr>
-              <a:t> </a:t>
-            </a:r>
-            <a:r>
-              <a:rPr lang="en-US" sz="900" noProof="0" dirty="0">
-                <a:latin typeface="Calibri"/>
-                <a:cs typeface="Calibri"/>
-              </a:rPr>
-              <a:t>PostgreSQL,</a:t>
-            </a:r>
-            <a:r>
-              <a:rPr lang="en-US" sz="900" spc="-15" noProof="0" dirty="0">
-                <a:latin typeface="Calibri"/>
-                <a:cs typeface="Calibri"/>
-              </a:rPr>
-              <a:t> </a:t>
-            </a:r>
-            <a:r>
-              <a:rPr lang="en-US" sz="900" noProof="0" dirty="0">
-                <a:latin typeface="Calibri"/>
-                <a:cs typeface="Calibri"/>
-              </a:rPr>
-              <a:t>Bootstrap,</a:t>
-            </a:r>
-            <a:r>
-              <a:rPr lang="en-US" sz="900" spc="-35" noProof="0" dirty="0">
-                <a:latin typeface="Calibri"/>
-                <a:cs typeface="Calibri"/>
-              </a:rPr>
-              <a:t> </a:t>
-            </a:r>
-            <a:r>
-              <a:rPr lang="en-US" sz="900" noProof="0" dirty="0">
-                <a:latin typeface="Calibri"/>
-                <a:cs typeface="Calibri"/>
-              </a:rPr>
-              <a:t>SASS,</a:t>
-            </a:r>
-            <a:r>
-              <a:rPr lang="en-US" sz="900" spc="-15" noProof="0" dirty="0">
-                <a:latin typeface="Calibri"/>
-                <a:cs typeface="Calibri"/>
-              </a:rPr>
-              <a:t> </a:t>
-            </a:r>
-            <a:r>
-              <a:rPr lang="en-US" sz="900" noProof="0" dirty="0">
-                <a:latin typeface="Calibri"/>
-                <a:cs typeface="Calibri"/>
-              </a:rPr>
-              <a:t>RESTful</a:t>
-            </a:r>
-            <a:r>
-              <a:rPr lang="en-US" sz="900" spc="-30" noProof="0" dirty="0">
-                <a:latin typeface="Calibri"/>
-                <a:cs typeface="Calibri"/>
-              </a:rPr>
-              <a:t> </a:t>
-            </a:r>
-            <a:r>
-              <a:rPr lang="en-US" sz="900" spc="-20" noProof="0" dirty="0">
-                <a:latin typeface="Calibri"/>
-                <a:cs typeface="Calibri"/>
-              </a:rPr>
-              <a:t>API,</a:t>
-            </a:r>
-            <a:r>
-              <a:rPr lang="en-US" sz="900" spc="500" noProof="0" dirty="0">
-                <a:latin typeface="Calibri"/>
-                <a:cs typeface="Calibri"/>
-              </a:rPr>
-              <a:t> </a:t>
-            </a:r>
-            <a:r>
-              <a:rPr lang="en-US" sz="900" noProof="0" dirty="0">
-                <a:latin typeface="Calibri"/>
-                <a:cs typeface="Calibri"/>
-              </a:rPr>
-              <a:t>Oracle,</a:t>
-            </a:r>
-            <a:r>
-              <a:rPr lang="en-US" sz="900" spc="-5" noProof="0" dirty="0">
-                <a:latin typeface="Calibri"/>
-                <a:cs typeface="Calibri"/>
-              </a:rPr>
-              <a:t> </a:t>
-            </a:r>
-            <a:r>
-              <a:rPr lang="en-US" sz="900" noProof="0" dirty="0">
-                <a:latin typeface="Calibri"/>
-                <a:cs typeface="Calibri"/>
-              </a:rPr>
-              <a:t>CentOS, </a:t>
-            </a:r>
-            <a:r>
-              <a:rPr lang="en-US" sz="900" spc="-10" noProof="0" dirty="0">
-                <a:latin typeface="Calibri"/>
-                <a:cs typeface="Calibri"/>
-              </a:rPr>
-              <a:t>Photoshop,</a:t>
-            </a:r>
-            <a:r>
-              <a:rPr lang="en-US" sz="900" spc="-5" noProof="0" dirty="0">
-                <a:latin typeface="Calibri"/>
-                <a:cs typeface="Calibri"/>
-              </a:rPr>
-              <a:t> </a:t>
-            </a:r>
-            <a:r>
-              <a:rPr lang="en-US" sz="900" spc="-10" noProof="0" dirty="0">
-                <a:latin typeface="Calibri"/>
-                <a:cs typeface="Calibri"/>
-              </a:rPr>
-              <a:t>Git...</a:t>
+              <a:t>Stack: Node.js, REST APIs, PHP, Elasticsearch, PostgreSQL, Oracle, Bootstrap, SASS, Git...</a:t>
             </a:r>
             <a:endParaRPr lang="en-US" sz="900" noProof="0" dirty="0">
               <a:latin typeface="Calibri"/>
@@ -4803,47 +3395,7 @@
                 <a:latin typeface="Calibri"/>
                 <a:cs typeface="Calibri"/>
               </a:rPr>
-              <a:t>SENIOR FULL</a:t>
-            </a:r>
-            <a:r>
-              <a:rPr lang="en-US" sz="1100" b="1" spc="-20" noProof="0" dirty="0">
-                <a:solidFill>
-                  <a:srgbClr val="3A6278"/>
-                </a:solidFill>
-                <a:latin typeface="Calibri"/>
-                <a:cs typeface="Calibri"/>
-              </a:rPr>
-              <a:t> </a:t>
-            </a:r>
-            <a:r>
-              <a:rPr lang="en-US" sz="1100" b="1" noProof="0" dirty="0">
-                <a:solidFill>
-                  <a:srgbClr val="3A6278"/>
-                </a:solidFill>
-                <a:latin typeface="Calibri"/>
-                <a:cs typeface="Calibri"/>
-              </a:rPr>
-              <a:t>STACK</a:t>
-            </a:r>
-            <a:r>
-              <a:rPr lang="en-US" sz="1100" b="1" spc="-20" noProof="0" dirty="0">
-                <a:solidFill>
-                  <a:srgbClr val="3A6278"/>
-                </a:solidFill>
-                <a:latin typeface="Calibri"/>
-                <a:cs typeface="Calibri"/>
-              </a:rPr>
-              <a:t> </a:t>
-            </a:r>
-            <a:r>
-              <a:rPr lang="en-US" sz="1100" b="1" spc="-25" noProof="0" dirty="0">
-                <a:solidFill>
-                  <a:srgbClr val="3A6278"/>
-                </a:solidFill>
-                <a:latin typeface="Calibri"/>
-                <a:cs typeface="Calibri"/>
-              </a:rPr>
-              <a:t>DEV</a:t>
+              <a:t>SENIOR FULL STACK ENGINEER</a:t>
             </a:r>
             <a:endParaRPr lang="en-US" sz="1100" noProof="0" dirty="0">
               <a:latin typeface="Calibri"/>
@@ -4864,68 +3416,8 @@
                 <a:latin typeface="Calibri"/>
                 <a:cs typeface="Calibri"/>
               </a:rPr>
-              <a:t>BELAIR</a:t>
-            </a:r>
-            <a:r>
-              <a:rPr lang="en-US" sz="1400" spc="-45" noProof="0" dirty="0">
-                <a:latin typeface="Calibri"/>
-                <a:cs typeface="Calibri"/>
-              </a:rPr>
-              <a:t> </a:t>
-            </a:r>
-            <a:r>
-              <a:rPr lang="en-US" sz="1400" spc="-10" noProof="0" dirty="0">
-                <a:latin typeface="Calibri"/>
-                <a:cs typeface="Calibri"/>
-              </a:rPr>
-              <a:t>INFORMATIQUE|</a:t>
-            </a:r>
-            <a:r>
-              <a:rPr lang="en-US" sz="1400" spc="-55" noProof="0" dirty="0">
-                <a:latin typeface="Calibri"/>
-                <a:cs typeface="Calibri"/>
-              </a:rPr>
-              <a:t> </a:t>
-            </a:r>
-            <a:r>
-              <a:rPr lang="en-US" sz="1400" noProof="0" dirty="0">
-                <a:latin typeface="Calibri"/>
-                <a:cs typeface="Calibri"/>
-              </a:rPr>
-              <a:t>2012</a:t>
-            </a:r>
-            <a:r>
-              <a:rPr lang="en-US" sz="1400" spc="-45" noProof="0" dirty="0">
-                <a:latin typeface="Calibri"/>
-                <a:cs typeface="Calibri"/>
-              </a:rPr>
-              <a:t> </a:t>
-            </a:r>
-            <a:r>
-              <a:rPr lang="en-US" sz="1400" noProof="0" dirty="0">
-                <a:latin typeface="Calibri"/>
-                <a:cs typeface="Calibri"/>
-              </a:rPr>
-              <a:t>to</a:t>
-            </a:r>
-            <a:r>
-              <a:rPr lang="en-US" sz="1400" spc="-30" noProof="0" dirty="0">
-                <a:latin typeface="Calibri"/>
-                <a:cs typeface="Calibri"/>
-              </a:rPr>
-              <a:t> </a:t>
-            </a:r>
-            <a:r>
-              <a:rPr lang="en-US" sz="1400" spc="-20" noProof="0" dirty="0">
-                <a:latin typeface="Calibri"/>
-                <a:cs typeface="Calibri"/>
-              </a:rPr>
-              <a:t>2016</a:t>
-            </a:r>
-            <a:endParaRPr lang="en-US" sz="1400" noProof="0" dirty="0">
-              <a:latin typeface="Calibri"/>
-              <a:cs typeface="Calibri"/>
-            </a:endParaRPr>
+              <a:t>BELAIR INFORMATIQUE | 2012 to 2016</a:t>
+            </a:r>
           </a:p>
           <a:p>
             <a:pPr marL="177165" marR="477520">
@@ -4941,96 +3433,8 @@
                 <a:latin typeface="Calibri"/>
                 <a:cs typeface="Calibri"/>
               </a:rPr>
-              <a:t>Web</a:t>
-            </a:r>
-            <a:r>
-              <a:rPr lang="en-US" sz="900" spc="-25" noProof="0" dirty="0">
-                <a:latin typeface="Calibri"/>
-                <a:cs typeface="Calibri"/>
-              </a:rPr>
-              <a:t> </a:t>
-            </a:r>
-            <a:r>
-              <a:rPr lang="en-US" sz="900" spc="-10" noProof="0" dirty="0">
-                <a:latin typeface="Calibri"/>
-                <a:cs typeface="Calibri"/>
-              </a:rPr>
-              <a:t>dev.</a:t>
-            </a:r>
-            <a:r>
-              <a:rPr lang="en-US" sz="900" spc="5" noProof="0" dirty="0">
-                <a:latin typeface="Calibri"/>
-                <a:cs typeface="Calibri"/>
-              </a:rPr>
-              <a:t> </a:t>
-            </a:r>
-            <a:r>
-              <a:rPr lang="en-US" sz="900" noProof="0" dirty="0">
-                <a:latin typeface="Calibri"/>
-                <a:cs typeface="Calibri"/>
-              </a:rPr>
-              <a:t>Working on a SaaS solution for insurance brokers.</a:t>
-            </a:r>
-            <a:r>
-              <a:rPr lang="en-US" sz="900" spc="-25" noProof="0" dirty="0">
-                <a:latin typeface="Calibri"/>
-                <a:cs typeface="Calibri"/>
-              </a:rPr>
-              <a:t> Creation, deployment and maintenance of my deliveries. T</a:t>
-            </a:r>
-            <a:r>
-              <a:rPr lang="en-US" sz="900" noProof="0" dirty="0">
-                <a:latin typeface="Calibri"/>
-                <a:cs typeface="Calibri"/>
-              </a:rPr>
-              <a:t>echnical</a:t>
-            </a:r>
-            <a:r>
-              <a:rPr lang="en-US" sz="900" spc="-5" noProof="0" dirty="0">
-                <a:latin typeface="Calibri"/>
-                <a:cs typeface="Calibri"/>
-              </a:rPr>
-              <a:t> </a:t>
-            </a:r>
-            <a:r>
-              <a:rPr lang="en-US" sz="900" noProof="0" dirty="0">
-                <a:latin typeface="Calibri"/>
-                <a:cs typeface="Calibri"/>
-              </a:rPr>
-              <a:t>writing /</a:t>
-            </a:r>
-            <a:r>
-              <a:rPr lang="en-US" sz="900" spc="-5" noProof="0" dirty="0">
-                <a:latin typeface="Calibri"/>
-                <a:cs typeface="Calibri"/>
-              </a:rPr>
-              <a:t> </a:t>
-            </a:r>
-            <a:r>
-              <a:rPr lang="en-US" sz="900" noProof="0" dirty="0">
-                <a:latin typeface="Calibri"/>
-                <a:cs typeface="Calibri"/>
-              </a:rPr>
-              <a:t>small</a:t>
-            </a:r>
-            <a:r>
-              <a:rPr lang="en-US" sz="900" spc="-25" noProof="0" dirty="0">
-                <a:latin typeface="Calibri"/>
-                <a:cs typeface="Calibri"/>
-              </a:rPr>
-              <a:t> </a:t>
-            </a:r>
-            <a:r>
-              <a:rPr lang="en-US" sz="900" spc="-10" noProof="0" dirty="0">
-                <a:latin typeface="Calibri"/>
-                <a:cs typeface="Calibri"/>
-              </a:rPr>
-              <a:t>projects management.</a:t>
-            </a:r>
-            <a:endParaRPr lang="en-US" sz="900" noProof="0" dirty="0">
-              <a:latin typeface="Calibri"/>
-              <a:cs typeface="Calibri"/>
-            </a:endParaRPr>
+              <a:t>Developed SaaS features for insurance brokers with end-to-end ownership from design to delivery. Managed releases, technical documentation and small projects.</a:t>
+            </a:r>
           </a:p>
           <a:p>
             <a:pPr marL="177165" marR="132080">
@@ -5046,231 +3450,7 @@
                 <a:latin typeface="Calibri"/>
                 <a:cs typeface="Calibri"/>
               </a:rPr>
-              <a:t>Stack</a:t>
-            </a:r>
-            <a:r>
-              <a:rPr lang="en-US" sz="900" noProof="0" dirty="0">
-                <a:latin typeface="Calibri"/>
-                <a:cs typeface="Calibri"/>
-              </a:rPr>
-              <a:t>:</a:t>
-            </a:r>
-            <a:r>
-              <a:rPr lang="en-US" sz="900" spc="-20" noProof="0" dirty="0">
-                <a:latin typeface="Calibri"/>
-                <a:cs typeface="Calibri"/>
-              </a:rPr>
-              <a:t> SPA / </a:t>
-            </a:r>
-            <a:r>
-              <a:rPr lang="en-US" sz="900" noProof="0" dirty="0">
-                <a:latin typeface="Calibri"/>
-                <a:cs typeface="Calibri"/>
-              </a:rPr>
-              <a:t>jQuery (&amp; </a:t>
-            </a:r>
-            <a:r>
-              <a:rPr lang="en-US" sz="900" spc="-10" noProof="0" dirty="0">
-                <a:latin typeface="Calibri"/>
-                <a:cs typeface="Calibri"/>
-              </a:rPr>
-              <a:t>mobile) /</a:t>
-            </a:r>
-            <a:r>
-              <a:rPr lang="en-US" sz="900" spc="-25" noProof="0" dirty="0">
-                <a:latin typeface="Calibri"/>
-                <a:cs typeface="Calibri"/>
-              </a:rPr>
-              <a:t> </a:t>
-            </a:r>
-            <a:r>
-              <a:rPr lang="en-US" sz="900" noProof="0" dirty="0">
-                <a:latin typeface="Calibri"/>
-                <a:cs typeface="Calibri"/>
-              </a:rPr>
-              <a:t>Ajax</a:t>
-            </a:r>
-            <a:r>
-              <a:rPr lang="en-US" sz="900" spc="-20" noProof="0" dirty="0">
-                <a:latin typeface="Calibri"/>
-                <a:cs typeface="Calibri"/>
-              </a:rPr>
-              <a:t> </a:t>
-            </a:r>
-            <a:r>
-              <a:rPr lang="en-US" sz="900" noProof="0" dirty="0">
-                <a:latin typeface="Calibri"/>
-                <a:cs typeface="Calibri"/>
-              </a:rPr>
-              <a:t>/</a:t>
-            </a:r>
-            <a:r>
-              <a:rPr lang="en-US" sz="900" spc="-25" noProof="0" dirty="0">
-                <a:latin typeface="Calibri"/>
-                <a:cs typeface="Calibri"/>
-              </a:rPr>
-              <a:t> </a:t>
-            </a:r>
-            <a:r>
-              <a:rPr lang="en-US" sz="900" noProof="0" dirty="0">
-                <a:latin typeface="Calibri"/>
-                <a:cs typeface="Calibri"/>
-              </a:rPr>
-              <a:t>PHP</a:t>
-            </a:r>
-            <a:r>
-              <a:rPr lang="en-US" sz="900" spc="-20" noProof="0" dirty="0">
-                <a:latin typeface="Calibri"/>
-                <a:cs typeface="Calibri"/>
-              </a:rPr>
-              <a:t> </a:t>
-            </a:r>
-            <a:r>
-              <a:rPr lang="en-US" sz="900" noProof="0" dirty="0">
-                <a:latin typeface="Calibri"/>
-                <a:cs typeface="Calibri"/>
-              </a:rPr>
-              <a:t>OO/</a:t>
-            </a:r>
-            <a:r>
-              <a:rPr lang="en-US" sz="900" spc="-25" noProof="0" dirty="0">
-                <a:latin typeface="Calibri"/>
-                <a:cs typeface="Calibri"/>
-              </a:rPr>
-              <a:t> </a:t>
-            </a:r>
-            <a:r>
-              <a:rPr lang="en-US" sz="900" noProof="0" dirty="0">
-                <a:latin typeface="Calibri"/>
-                <a:cs typeface="Calibri"/>
-              </a:rPr>
-              <a:t>MVC / MySQL</a:t>
-            </a:r>
-            <a:r>
-              <a:rPr lang="en-US" sz="900" spc="-20" noProof="0" dirty="0">
-                <a:latin typeface="Calibri"/>
-                <a:cs typeface="Calibri"/>
-              </a:rPr>
-              <a:t> </a:t>
-            </a:r>
-            <a:r>
-              <a:rPr lang="en-US" sz="900" noProof="0" dirty="0">
-                <a:latin typeface="Calibri"/>
-                <a:cs typeface="Calibri"/>
-              </a:rPr>
-              <a:t>/</a:t>
-            </a:r>
-            <a:r>
-              <a:rPr lang="en-US" sz="900" spc="-20" noProof="0" dirty="0">
-                <a:latin typeface="Calibri"/>
-                <a:cs typeface="Calibri"/>
-              </a:rPr>
-              <a:t> </a:t>
-            </a:r>
-            <a:r>
-              <a:rPr lang="en-US" sz="900" noProof="0" dirty="0">
-                <a:latin typeface="Calibri"/>
-                <a:cs typeface="Calibri"/>
-              </a:rPr>
-              <a:t>Apache</a:t>
-            </a:r>
-            <a:r>
-              <a:rPr lang="en-US" sz="900" spc="-5" noProof="0" dirty="0">
-                <a:latin typeface="Calibri"/>
-                <a:cs typeface="Calibri"/>
-              </a:rPr>
-              <a:t> </a:t>
-            </a:r>
-            <a:r>
-              <a:rPr lang="en-US" sz="900" noProof="0" dirty="0">
-                <a:latin typeface="Calibri"/>
-                <a:cs typeface="Calibri"/>
-              </a:rPr>
-              <a:t>/</a:t>
-            </a:r>
-            <a:r>
-              <a:rPr lang="en-US" sz="900" spc="-30" noProof="0" dirty="0">
-                <a:latin typeface="Calibri"/>
-                <a:cs typeface="Calibri"/>
-              </a:rPr>
-              <a:t> </a:t>
-            </a:r>
-            <a:r>
-              <a:rPr lang="en-US" sz="900" noProof="0" dirty="0">
-                <a:latin typeface="Calibri"/>
-                <a:cs typeface="Calibri"/>
-              </a:rPr>
-              <a:t>Bootstrap</a:t>
-            </a:r>
-            <a:r>
-              <a:rPr lang="en-US" sz="900" spc="-20" noProof="0" dirty="0">
-                <a:latin typeface="Calibri"/>
-                <a:cs typeface="Calibri"/>
-              </a:rPr>
-              <a:t> </a:t>
-            </a:r>
-            <a:r>
-              <a:rPr lang="en-US" sz="900" noProof="0" dirty="0">
-                <a:latin typeface="Calibri"/>
-                <a:cs typeface="Calibri"/>
-              </a:rPr>
-              <a:t>/</a:t>
-            </a:r>
-            <a:r>
-              <a:rPr lang="en-US" sz="900" spc="-25" noProof="0" dirty="0">
-                <a:latin typeface="Calibri"/>
-                <a:cs typeface="Calibri"/>
-              </a:rPr>
-              <a:t> </a:t>
-            </a:r>
-            <a:r>
-              <a:rPr lang="en-US" sz="900" noProof="0" dirty="0">
-                <a:latin typeface="Calibri"/>
-                <a:cs typeface="Calibri"/>
-              </a:rPr>
-              <a:t>SASS /</a:t>
-            </a:r>
-            <a:r>
-              <a:rPr lang="en-US" sz="900" spc="-25" noProof="0" dirty="0">
-                <a:latin typeface="Calibri"/>
-                <a:cs typeface="Calibri"/>
-              </a:rPr>
-              <a:t> </a:t>
-            </a:r>
-            <a:r>
-              <a:rPr lang="en-US" sz="900" noProof="0" dirty="0">
-                <a:latin typeface="Calibri"/>
-                <a:cs typeface="Calibri"/>
-              </a:rPr>
-              <a:t>Ubuntu</a:t>
-            </a:r>
-            <a:r>
-              <a:rPr lang="en-US" sz="900" spc="-5" noProof="0" dirty="0">
-                <a:latin typeface="Calibri"/>
-                <a:cs typeface="Calibri"/>
-              </a:rPr>
-              <a:t> </a:t>
-            </a:r>
-            <a:r>
-              <a:rPr lang="en-US" sz="900" noProof="0" dirty="0">
-                <a:latin typeface="Calibri"/>
-                <a:cs typeface="Calibri"/>
-              </a:rPr>
-              <a:t>/</a:t>
-            </a:r>
-            <a:r>
-              <a:rPr lang="en-US" sz="900" spc="-20" noProof="0" dirty="0">
-                <a:latin typeface="Calibri"/>
-                <a:cs typeface="Calibri"/>
-              </a:rPr>
-              <a:t> </a:t>
-            </a:r>
-            <a:r>
-              <a:rPr lang="en-US" sz="900" spc="-10" noProof="0" dirty="0">
-                <a:latin typeface="Calibri"/>
-                <a:cs typeface="Calibri"/>
-              </a:rPr>
-              <a:t>Photoshop...</a:t>
+              <a:t>Stack: JavaScript, Ajax, MVC, PHP, MySQL, Apache, Bootstrap, SASS, Linux...</a:t>
             </a:r>
             <a:endParaRPr lang="en-US" sz="900" noProof="0" dirty="0">
               <a:latin typeface="Calibri"/>
@@ -5321,117 +3501,7 @@
                 <a:latin typeface="Calibri"/>
                 <a:cs typeface="Calibri"/>
               </a:rPr>
-              <a:t>WEB</a:t>
-            </a:r>
-            <a:r>
-              <a:rPr lang="en-US" sz="1100" b="1" spc="-15" noProof="0" dirty="0">
-                <a:solidFill>
-                  <a:srgbClr val="3A6278"/>
-                </a:solidFill>
-                <a:latin typeface="Calibri"/>
-                <a:cs typeface="Calibri"/>
-              </a:rPr>
-              <a:t> </a:t>
-            </a:r>
-            <a:r>
-              <a:rPr lang="en-US" sz="1100" b="1" noProof="0" dirty="0">
-                <a:solidFill>
-                  <a:srgbClr val="3A6278"/>
-                </a:solidFill>
-                <a:latin typeface="Calibri"/>
-                <a:cs typeface="Calibri"/>
-              </a:rPr>
-              <a:t>DEV</a:t>
-            </a:r>
-            <a:r>
-              <a:rPr lang="en-US" sz="1100" b="1" spc="-20" noProof="0" dirty="0">
-                <a:solidFill>
-                  <a:srgbClr val="3A6278"/>
-                </a:solidFill>
-                <a:latin typeface="Calibri"/>
-                <a:cs typeface="Calibri"/>
-              </a:rPr>
-              <a:t> </a:t>
-            </a:r>
-            <a:r>
-              <a:rPr lang="en-US" sz="1100" b="1" noProof="0" dirty="0">
-                <a:solidFill>
-                  <a:srgbClr val="3A6278"/>
-                </a:solidFill>
-                <a:latin typeface="Calibri"/>
-                <a:cs typeface="Calibri"/>
-              </a:rPr>
-              <a:t>/</a:t>
-            </a:r>
-            <a:r>
-              <a:rPr lang="en-US" sz="1100" b="1" spc="-10" noProof="0" dirty="0">
-                <a:solidFill>
-                  <a:srgbClr val="3A6278"/>
-                </a:solidFill>
-                <a:latin typeface="Calibri"/>
-                <a:cs typeface="Calibri"/>
-              </a:rPr>
-              <a:t> </a:t>
-            </a:r>
-            <a:r>
-              <a:rPr lang="en-US" sz="1100" b="1" noProof="0" dirty="0">
-                <a:solidFill>
-                  <a:srgbClr val="3A6278"/>
-                </a:solidFill>
-                <a:latin typeface="Calibri"/>
-                <a:cs typeface="Calibri"/>
-              </a:rPr>
-              <a:t>WEBMASTER</a:t>
-            </a:r>
-            <a:r>
-              <a:rPr lang="en-US" sz="1100" b="1" spc="-25" noProof="0" dirty="0">
-                <a:solidFill>
-                  <a:srgbClr val="3A6278"/>
-                </a:solidFill>
-                <a:latin typeface="Calibri"/>
-                <a:cs typeface="Calibri"/>
-              </a:rPr>
-              <a:t> </a:t>
-            </a:r>
-            <a:r>
-              <a:rPr lang="en-US" sz="1100" b="1" noProof="0" dirty="0">
-                <a:solidFill>
-                  <a:srgbClr val="3A6278"/>
-                </a:solidFill>
-                <a:latin typeface="Calibri"/>
-                <a:cs typeface="Calibri"/>
-              </a:rPr>
-              <a:t>/</a:t>
-            </a:r>
-            <a:r>
-              <a:rPr lang="en-US" sz="1100" b="1" spc="-10" noProof="0" dirty="0">
-                <a:solidFill>
-                  <a:srgbClr val="3A6278"/>
-                </a:solidFill>
-                <a:latin typeface="Calibri"/>
-                <a:cs typeface="Calibri"/>
-              </a:rPr>
-              <a:t> PROJECT</a:t>
-            </a:r>
-            <a:r>
-              <a:rPr lang="en-US" sz="1100" b="1" spc="-30" noProof="0" dirty="0">
-                <a:solidFill>
-                  <a:srgbClr val="3A6278"/>
-                </a:solidFill>
-                <a:latin typeface="Calibri"/>
-                <a:cs typeface="Calibri"/>
-              </a:rPr>
-              <a:t> </a:t>
-            </a:r>
-            <a:r>
-              <a:rPr lang="en-US" sz="1100" b="1" spc="-10" noProof="0" dirty="0">
-                <a:solidFill>
-                  <a:srgbClr val="3A6278"/>
-                </a:solidFill>
-                <a:latin typeface="Calibri"/>
-                <a:cs typeface="Calibri"/>
-              </a:rPr>
-              <a:t>MANAGER</a:t>
+              <a:t>WEB DEVELOPER / PROJECT MANAGER</a:t>
             </a:r>
             <a:endParaRPr lang="en-US" sz="1100" noProof="0" dirty="0">
               <a:latin typeface="Calibri"/>
@@ -5449,49 +3519,7 @@
                 <a:latin typeface="Calibri"/>
                 <a:cs typeface="Calibri"/>
               </a:rPr>
-              <a:t>COTEP|</a:t>
-            </a:r>
-            <a:r>
-              <a:rPr lang="en-US" sz="1400" spc="-40" noProof="0" dirty="0">
-                <a:latin typeface="Calibri"/>
-                <a:cs typeface="Calibri"/>
-              </a:rPr>
-              <a:t> </a:t>
-            </a:r>
-            <a:r>
-              <a:rPr lang="en-US" sz="1400" noProof="0" dirty="0">
-                <a:latin typeface="Calibri"/>
-                <a:cs typeface="Calibri"/>
-              </a:rPr>
-              <a:t>2002</a:t>
-            </a:r>
-            <a:r>
-              <a:rPr lang="en-US" sz="1400" spc="-40" noProof="0" dirty="0">
-                <a:latin typeface="Calibri"/>
-                <a:cs typeface="Calibri"/>
-              </a:rPr>
-              <a:t> </a:t>
-            </a:r>
-            <a:r>
-              <a:rPr lang="en-US" sz="1400" noProof="0" dirty="0">
-                <a:latin typeface="Calibri"/>
-                <a:cs typeface="Calibri"/>
-              </a:rPr>
-              <a:t>to</a:t>
-            </a:r>
-            <a:r>
-              <a:rPr lang="en-US" sz="1400" spc="-40" noProof="0" dirty="0">
-                <a:latin typeface="Calibri"/>
-                <a:cs typeface="Calibri"/>
-              </a:rPr>
-              <a:t> </a:t>
-            </a:r>
-            <a:r>
-              <a:rPr lang="en-US" sz="1400" spc="-20" noProof="0" dirty="0">
-                <a:latin typeface="Calibri"/>
-                <a:cs typeface="Calibri"/>
-              </a:rPr>
-              <a:t>2012</a:t>
+              <a:t>COTEP | 2002 to 2012</a:t>
             </a:r>
             <a:endParaRPr lang="en-US" sz="1400" noProof="0" dirty="0">
               <a:latin typeface="Calibri"/>
@@ -5512,131 +3540,8 @@
                 <a:latin typeface="Calibri"/>
                 <a:cs typeface="Calibri"/>
               </a:rPr>
-              <a:t>Web</a:t>
-            </a:r>
-            <a:r>
-              <a:rPr lang="en-US" sz="900" spc="-15" noProof="0" dirty="0">
-                <a:latin typeface="Calibri"/>
-                <a:cs typeface="Calibri"/>
-              </a:rPr>
-              <a:t> </a:t>
-            </a:r>
-            <a:r>
-              <a:rPr lang="en-US" sz="900" spc="-10" noProof="0" dirty="0">
-                <a:latin typeface="Calibri"/>
-                <a:cs typeface="Calibri"/>
-              </a:rPr>
-              <a:t>development</a:t>
-            </a:r>
-            <a:r>
-              <a:rPr lang="en-US" sz="900" spc="10" noProof="0" dirty="0">
-                <a:latin typeface="Calibri"/>
-                <a:cs typeface="Calibri"/>
-              </a:rPr>
-              <a:t> </a:t>
-            </a:r>
-            <a:r>
-              <a:rPr lang="en-US" sz="900" noProof="0" dirty="0">
-                <a:latin typeface="Calibri"/>
-                <a:cs typeface="Calibri"/>
-              </a:rPr>
-              <a:t>and</a:t>
-            </a:r>
-            <a:r>
-              <a:rPr lang="en-US" sz="900" spc="-5" noProof="0" dirty="0">
-                <a:latin typeface="Calibri"/>
-                <a:cs typeface="Calibri"/>
-              </a:rPr>
-              <a:t> </a:t>
-            </a:r>
-            <a:r>
-              <a:rPr lang="en-US" sz="900" noProof="0" dirty="0">
-                <a:latin typeface="Calibri"/>
-                <a:cs typeface="Calibri"/>
-              </a:rPr>
-              <a:t>project</a:t>
-            </a:r>
-            <a:r>
-              <a:rPr lang="en-US" sz="900" spc="-10" noProof="0" dirty="0">
-                <a:latin typeface="Calibri"/>
-                <a:cs typeface="Calibri"/>
-              </a:rPr>
-              <a:t> management</a:t>
-            </a:r>
-            <a:r>
-              <a:rPr lang="en-US" sz="900" spc="10" noProof="0" dirty="0">
-                <a:latin typeface="Calibri"/>
-                <a:cs typeface="Calibri"/>
-              </a:rPr>
-              <a:t> </a:t>
-            </a:r>
-            <a:r>
-              <a:rPr lang="en-US" sz="900" noProof="0" dirty="0">
-                <a:latin typeface="Calibri"/>
-                <a:cs typeface="Calibri"/>
-              </a:rPr>
-              <a:t>for</a:t>
-            </a:r>
-            <a:r>
-              <a:rPr lang="en-US" sz="900" spc="-20" noProof="0" dirty="0">
-                <a:latin typeface="Calibri"/>
-                <a:cs typeface="Calibri"/>
-              </a:rPr>
-              <a:t> </a:t>
-            </a:r>
-            <a:r>
-              <a:rPr lang="en-US" sz="900" noProof="0" dirty="0">
-                <a:latin typeface="Calibri"/>
-                <a:cs typeface="Calibri"/>
-              </a:rPr>
-              <a:t>a</a:t>
-            </a:r>
-            <a:r>
-              <a:rPr lang="en-US" sz="900" spc="-15" noProof="0" dirty="0">
-                <a:latin typeface="Calibri"/>
-                <a:cs typeface="Calibri"/>
-              </a:rPr>
-              <a:t> </a:t>
-            </a:r>
-            <a:r>
-              <a:rPr lang="en-US" sz="900" noProof="0" dirty="0">
-                <a:latin typeface="Calibri"/>
-                <a:cs typeface="Calibri"/>
-              </a:rPr>
-              <a:t>digital</a:t>
-            </a:r>
-            <a:r>
-              <a:rPr lang="en-US" sz="900" spc="10" noProof="0" dirty="0">
-                <a:latin typeface="Calibri"/>
-                <a:cs typeface="Calibri"/>
-              </a:rPr>
-              <a:t> </a:t>
-            </a:r>
-            <a:r>
-              <a:rPr lang="en-US" sz="900" noProof="0" dirty="0">
-                <a:latin typeface="Calibri"/>
-                <a:cs typeface="Calibri"/>
-              </a:rPr>
-              <a:t>signage</a:t>
-            </a:r>
-            <a:r>
-              <a:rPr lang="en-US" sz="900" spc="-5" noProof="0" dirty="0">
-                <a:latin typeface="Calibri"/>
-                <a:cs typeface="Calibri"/>
-              </a:rPr>
-              <a:t> </a:t>
-            </a:r>
-            <a:r>
-              <a:rPr lang="en-US" sz="900" spc="-10" noProof="0" dirty="0">
-                <a:latin typeface="Calibri"/>
-                <a:cs typeface="Calibri"/>
-              </a:rPr>
-              <a:t>company.</a:t>
-            </a:r>
-            <a:endParaRPr lang="en-US" sz="900" noProof="0" dirty="0">
-              <a:latin typeface="Calibri"/>
-              <a:cs typeface="Calibri"/>
-            </a:endParaRPr>
+              <a:t>Developed web products and managed customer projects for a digital signage company.</a:t>
+            </a:r>
           </a:p>
         </p:txBody>
       </p:sp>
@@ -5682,47 +3587,7 @@
                 <a:latin typeface="Calibri"/>
                 <a:cs typeface="Calibri"/>
               </a:rPr>
-              <a:t>FREELANCE</a:t>
-            </a:r>
-            <a:r>
-              <a:rPr lang="en-US" sz="1400" b="1" spc="-40" noProof="0" dirty="0">
-                <a:solidFill>
-                  <a:srgbClr val="3A6278"/>
-                </a:solidFill>
-                <a:latin typeface="Calibri"/>
-                <a:cs typeface="Calibri"/>
-              </a:rPr>
-              <a:t> </a:t>
-            </a:r>
-            <a:r>
-              <a:rPr lang="en-US" sz="1400" b="1" spc="-40" dirty="0">
-                <a:solidFill>
-                  <a:srgbClr val="3A6278"/>
-                </a:solidFill>
-                <a:latin typeface="Calibri"/>
-                <a:cs typeface="Calibri"/>
-              </a:rPr>
-              <a:t>SOFTWARE</a:t>
-            </a:r>
-            <a:r>
-              <a:rPr lang="en-US" sz="1400" b="1" spc="-35" noProof="0" dirty="0">
-                <a:solidFill>
-                  <a:srgbClr val="3A6278"/>
-                </a:solidFill>
-                <a:latin typeface="Calibri"/>
-                <a:cs typeface="Calibri"/>
-              </a:rPr>
-              <a:t> </a:t>
-            </a:r>
-            <a:r>
-              <a:rPr lang="en-US" sz="1400" b="1" spc="-25" noProof="0" dirty="0">
-                <a:solidFill>
-                  <a:srgbClr val="3A6278"/>
-                </a:solidFill>
-                <a:latin typeface="Calibri"/>
-                <a:cs typeface="Calibri"/>
-              </a:rPr>
-              <a:t>ENGINEER</a:t>
+              <a:t>FREELANCE FULL STACK ENGINEER</a:t>
             </a:r>
             <a:endParaRPr lang="en-US" sz="1400" noProof="0" dirty="0">
               <a:latin typeface="Calibri"/>
@@ -5743,40 +3608,8 @@
                 <a:latin typeface="Calibri"/>
                 <a:cs typeface="Calibri"/>
               </a:rPr>
-              <a:t>2009</a:t>
-            </a:r>
-            <a:r>
-              <a:rPr lang="en-US" sz="1400" spc="-35" noProof="0" dirty="0">
-                <a:latin typeface="Calibri"/>
-                <a:cs typeface="Calibri"/>
-              </a:rPr>
-              <a:t> </a:t>
-            </a:r>
-            <a:r>
-              <a:rPr lang="en-US" sz="1400" noProof="0" dirty="0">
-                <a:latin typeface="Calibri"/>
-                <a:cs typeface="Calibri"/>
-              </a:rPr>
-              <a:t>to</a:t>
-            </a:r>
-            <a:r>
-              <a:rPr lang="en-US" sz="1400" spc="-30" noProof="0" dirty="0">
-                <a:latin typeface="Calibri"/>
-                <a:cs typeface="Calibri"/>
-              </a:rPr>
-              <a:t> </a:t>
-            </a:r>
-            <a:r>
-              <a:rPr lang="en-US" sz="1400" spc="-50" noProof="0" dirty="0">
-                <a:latin typeface="Calibri"/>
-                <a:cs typeface="Calibri"/>
-              </a:rPr>
-              <a:t>…</a:t>
-            </a:r>
-            <a:endParaRPr lang="en-US" sz="1400" noProof="0" dirty="0">
-              <a:latin typeface="Calibri"/>
-              <a:cs typeface="Calibri"/>
-            </a:endParaRPr>
+              <a:t>2009 to present</a:t>
+            </a:r>
           </a:p>
           <a:p>
             <a:pPr marL="177165">
@@ -5792,152 +3625,8 @@
                 <a:latin typeface="Calibri"/>
                 <a:cs typeface="Calibri"/>
               </a:rPr>
-              <a:t>Building various projects for</a:t>
-            </a:r>
-            <a:r>
-              <a:rPr lang="en-US" sz="900" spc="-10" noProof="0" dirty="0">
-                <a:latin typeface="Calibri"/>
-                <a:cs typeface="Calibri"/>
-              </a:rPr>
-              <a:t> </a:t>
-            </a:r>
-            <a:r>
-              <a:rPr lang="en-US" sz="900" noProof="0" dirty="0">
-                <a:latin typeface="Calibri"/>
-                <a:cs typeface="Calibri"/>
-              </a:rPr>
-              <a:t>my</a:t>
-            </a:r>
-            <a:r>
-              <a:rPr lang="en-US" sz="900" spc="-25" noProof="0" dirty="0">
-                <a:latin typeface="Calibri"/>
-                <a:cs typeface="Calibri"/>
-              </a:rPr>
-              <a:t> </a:t>
-            </a:r>
-            <a:r>
-              <a:rPr lang="en-US" sz="900" noProof="0" dirty="0">
-                <a:latin typeface="Calibri"/>
-                <a:cs typeface="Calibri"/>
-              </a:rPr>
-              <a:t>own</a:t>
-            </a:r>
-            <a:r>
-              <a:rPr lang="en-US" sz="900" spc="-15" noProof="0" dirty="0">
-                <a:latin typeface="Calibri"/>
-                <a:cs typeface="Calibri"/>
-              </a:rPr>
-              <a:t> </a:t>
-            </a:r>
-            <a:r>
-              <a:rPr lang="en-US" sz="900" noProof="0" dirty="0">
-                <a:latin typeface="Calibri"/>
-                <a:cs typeface="Calibri"/>
-              </a:rPr>
-              <a:t>customers: French</a:t>
-            </a:r>
-            <a:r>
-              <a:rPr lang="en-US" sz="900" spc="195" noProof="0" dirty="0">
-                <a:latin typeface="Calibri"/>
-                <a:cs typeface="Calibri"/>
-              </a:rPr>
-              <a:t> </a:t>
-            </a:r>
-            <a:r>
-              <a:rPr lang="en-US" sz="900" spc="-10" noProof="0" dirty="0">
-                <a:latin typeface="Calibri"/>
-                <a:cs typeface="Calibri"/>
-              </a:rPr>
-              <a:t>Administration and Government,</a:t>
-            </a:r>
-            <a:r>
-              <a:rPr lang="en-US" sz="900" spc="10" noProof="0" dirty="0">
-                <a:latin typeface="Calibri"/>
-                <a:cs typeface="Calibri"/>
-              </a:rPr>
-              <a:t> </a:t>
-            </a:r>
-            <a:r>
-              <a:rPr lang="en-US" sz="900" spc="-10" noProof="0" dirty="0">
-                <a:latin typeface="Calibri"/>
-                <a:cs typeface="Calibri"/>
-              </a:rPr>
-              <a:t>Environmental</a:t>
-            </a:r>
-            <a:r>
-              <a:rPr lang="en-US" sz="900" spc="-5" noProof="0" dirty="0">
-                <a:latin typeface="Calibri"/>
-                <a:cs typeface="Calibri"/>
-              </a:rPr>
-              <a:t> </a:t>
-            </a:r>
-            <a:r>
-              <a:rPr lang="en-US" sz="900" spc="-10" noProof="0" dirty="0">
-                <a:latin typeface="Calibri"/>
-                <a:cs typeface="Calibri"/>
-              </a:rPr>
-              <a:t>Association, </a:t>
-            </a:r>
-            <a:r>
-              <a:rPr lang="en-US" sz="900" noProof="0" dirty="0">
-                <a:latin typeface="Calibri"/>
-                <a:cs typeface="Calibri"/>
-              </a:rPr>
-              <a:t>Transport</a:t>
-            </a:r>
-            <a:r>
-              <a:rPr lang="en-US" sz="900" spc="-25" noProof="0" dirty="0">
-                <a:latin typeface="Calibri"/>
-                <a:cs typeface="Calibri"/>
-              </a:rPr>
-              <a:t> </a:t>
-            </a:r>
-            <a:r>
-              <a:rPr lang="en-US" sz="900" noProof="0" dirty="0">
-                <a:latin typeface="Calibri"/>
-                <a:cs typeface="Calibri"/>
-              </a:rPr>
-              <a:t>Express</a:t>
-            </a:r>
-            <a:r>
-              <a:rPr lang="en-US" sz="900" spc="-25" noProof="0" dirty="0">
-                <a:latin typeface="Calibri"/>
-                <a:cs typeface="Calibri"/>
-              </a:rPr>
-              <a:t> </a:t>
-            </a:r>
-            <a:r>
-              <a:rPr lang="en-US" sz="900" spc="-10" noProof="0" dirty="0">
-                <a:latin typeface="Calibri"/>
-                <a:cs typeface="Calibri"/>
-              </a:rPr>
-              <a:t>Company,</a:t>
-            </a:r>
-            <a:r>
-              <a:rPr lang="en-US" sz="900" spc="-25" noProof="0" dirty="0">
-                <a:latin typeface="Calibri"/>
-                <a:cs typeface="Calibri"/>
-              </a:rPr>
-              <a:t> </a:t>
-            </a:r>
-            <a:r>
-              <a:rPr lang="en-US" sz="900" noProof="0" dirty="0">
-                <a:latin typeface="Calibri"/>
-                <a:cs typeface="Calibri"/>
-              </a:rPr>
-              <a:t>Insurance</a:t>
-            </a:r>
-            <a:r>
-              <a:rPr lang="en-US" sz="900" spc="-10" noProof="0" dirty="0">
-                <a:latin typeface="Calibri"/>
-                <a:cs typeface="Calibri"/>
-              </a:rPr>
-              <a:t> Broker…</a:t>
-            </a:r>
-            <a:endParaRPr lang="en-US" sz="900" noProof="0" dirty="0">
-              <a:latin typeface="Calibri"/>
-              <a:cs typeface="Calibri"/>
-            </a:endParaRPr>
+              <a:t>Delivered custom web products and automation tools for public and private customers. Remote collaboration, product framing and end-to-end delivery.</a:t>
+            </a:r>
           </a:p>
         </p:txBody>
       </p:sp>
@@ -6025,257 +3714,7 @@
                 <a:latin typeface="Calibri"/>
                 <a:cs typeface="Calibri"/>
               </a:rPr>
-              <a:t>With 20+</a:t>
-            </a:r>
-            <a:r>
-              <a:rPr lang="en-US" sz="1000" spc="50" noProof="0" dirty="0">
-                <a:solidFill>
-                  <a:srgbClr val="3A6278"/>
-                </a:solidFill>
-                <a:latin typeface="Calibri"/>
-                <a:cs typeface="Calibri"/>
-              </a:rPr>
-              <a:t> </a:t>
-            </a:r>
-            <a:r>
-              <a:rPr lang="en-US" sz="1000" noProof="0" dirty="0">
-                <a:solidFill>
-                  <a:srgbClr val="3A6278"/>
-                </a:solidFill>
-                <a:latin typeface="Calibri"/>
-                <a:cs typeface="Calibri"/>
-              </a:rPr>
-              <a:t>years</a:t>
-            </a:r>
-            <a:r>
-              <a:rPr lang="en-US" sz="1000" spc="40" noProof="0" dirty="0">
-                <a:solidFill>
-                  <a:srgbClr val="3A6278"/>
-                </a:solidFill>
-                <a:latin typeface="Calibri"/>
-                <a:cs typeface="Calibri"/>
-              </a:rPr>
-              <a:t> </a:t>
-            </a:r>
-            <a:r>
-              <a:rPr lang="en-US" sz="1000" noProof="0" dirty="0">
-                <a:solidFill>
-                  <a:srgbClr val="3A6278"/>
-                </a:solidFill>
-                <a:latin typeface="Calibri"/>
-                <a:cs typeface="Calibri"/>
-              </a:rPr>
-              <a:t>of</a:t>
-            </a:r>
-            <a:r>
-              <a:rPr lang="en-US" sz="1000" spc="45" noProof="0" dirty="0">
-                <a:solidFill>
-                  <a:srgbClr val="3A6278"/>
-                </a:solidFill>
-                <a:latin typeface="Calibri"/>
-                <a:cs typeface="Calibri"/>
-              </a:rPr>
-              <a:t> </a:t>
-            </a:r>
-            <a:r>
-              <a:rPr lang="en-US" sz="1000" noProof="0" dirty="0">
-                <a:solidFill>
-                  <a:srgbClr val="3A6278"/>
-                </a:solidFill>
-                <a:latin typeface="Calibri"/>
-                <a:cs typeface="Calibri"/>
-              </a:rPr>
-              <a:t>experience,</a:t>
-            </a:r>
-            <a:r>
-              <a:rPr lang="en-US" sz="1000" spc="50" noProof="0" dirty="0">
-                <a:solidFill>
-                  <a:srgbClr val="3A6278"/>
-                </a:solidFill>
-                <a:latin typeface="Calibri"/>
-                <a:cs typeface="Calibri"/>
-              </a:rPr>
-              <a:t> </a:t>
-            </a:r>
-            <a:r>
-              <a:rPr lang="en-US" sz="1000" noProof="0" dirty="0">
-                <a:solidFill>
-                  <a:srgbClr val="3A6278"/>
-                </a:solidFill>
-                <a:latin typeface="Calibri"/>
-                <a:cs typeface="Calibri"/>
-              </a:rPr>
-              <a:t>I</a:t>
-            </a:r>
-            <a:r>
-              <a:rPr lang="en-US" sz="1000" spc="55" noProof="0" dirty="0">
-                <a:solidFill>
-                  <a:srgbClr val="3A6278"/>
-                </a:solidFill>
-                <a:latin typeface="Calibri"/>
-                <a:cs typeface="Calibri"/>
-              </a:rPr>
-              <a:t> </a:t>
-            </a:r>
-            <a:r>
-              <a:rPr lang="en-US" sz="1000" noProof="0" dirty="0">
-                <a:solidFill>
-                  <a:srgbClr val="3A6278"/>
-                </a:solidFill>
-                <a:latin typeface="Calibri"/>
-                <a:cs typeface="Calibri"/>
-              </a:rPr>
-              <a:t>can conduct</a:t>
-            </a:r>
-            <a:r>
-              <a:rPr lang="en-US" sz="1000" spc="-25" noProof="0" dirty="0">
-                <a:solidFill>
-                  <a:srgbClr val="3A6278"/>
-                </a:solidFill>
-                <a:latin typeface="Calibri"/>
-                <a:cs typeface="Calibri"/>
-              </a:rPr>
-              <a:t> agile dev team to build </a:t>
-            </a:r>
-            <a:r>
-              <a:rPr lang="en-US" sz="1000" noProof="0" dirty="0">
-                <a:solidFill>
-                  <a:srgbClr val="3A6278"/>
-                </a:solidFill>
-                <a:latin typeface="Calibri"/>
-                <a:cs typeface="Calibri"/>
-              </a:rPr>
-              <a:t>complex</a:t>
-            </a:r>
-            <a:r>
-              <a:rPr lang="en-US" sz="1000" spc="-15" noProof="0" dirty="0">
-                <a:solidFill>
-                  <a:srgbClr val="3A6278"/>
-                </a:solidFill>
-                <a:latin typeface="Calibri"/>
-                <a:cs typeface="Calibri"/>
-              </a:rPr>
-              <a:t> and high traffic </a:t>
-            </a:r>
-            <a:r>
-              <a:rPr lang="en-US" sz="1000" noProof="0" dirty="0">
-                <a:solidFill>
-                  <a:srgbClr val="3A6278"/>
-                </a:solidFill>
-                <a:latin typeface="Calibri"/>
-                <a:cs typeface="Calibri"/>
-              </a:rPr>
-              <a:t>projects</a:t>
-            </a:r>
-            <a:r>
-              <a:rPr lang="en-US" sz="1000" spc="-10" noProof="0" dirty="0">
-                <a:solidFill>
-                  <a:srgbClr val="3A6278"/>
-                </a:solidFill>
-                <a:latin typeface="Calibri"/>
-                <a:cs typeface="Calibri"/>
-              </a:rPr>
-              <a:t>. </a:t>
-            </a:r>
-            <a:r>
-              <a:rPr lang="en-US" sz="1000" spc="15" noProof="0" dirty="0">
-                <a:solidFill>
-                  <a:srgbClr val="3A6278"/>
-                </a:solidFill>
-                <a:latin typeface="Calibri"/>
-                <a:cs typeface="Calibri"/>
-              </a:rPr>
-              <a:t>Frontend (JS/TypeScript), Backend (</a:t>
-            </a:r>
-            <a:r>
-              <a:rPr lang="en-US" sz="1000" noProof="0" dirty="0">
-                <a:solidFill>
-                  <a:srgbClr val="3A6278"/>
-                </a:solidFill>
-                <a:latin typeface="Calibri"/>
-                <a:cs typeface="Calibri"/>
-              </a:rPr>
-              <a:t>PHP/Python) dev,</a:t>
-            </a:r>
-            <a:r>
-              <a:rPr lang="en-US" sz="1000" spc="25" noProof="0" dirty="0">
-                <a:solidFill>
-                  <a:srgbClr val="3A6278"/>
-                </a:solidFill>
-                <a:latin typeface="Calibri"/>
-                <a:cs typeface="Calibri"/>
-              </a:rPr>
-              <a:t> AWS </a:t>
-            </a:r>
-            <a:r>
-              <a:rPr lang="en-US" sz="1000" spc="-10" noProof="0" dirty="0">
-                <a:solidFill>
-                  <a:srgbClr val="3A6278"/>
-                </a:solidFill>
-                <a:latin typeface="Calibri"/>
-                <a:cs typeface="Calibri"/>
-              </a:rPr>
-              <a:t>Cloud Expert (DevOps) a</a:t>
-            </a:r>
-            <a:r>
-              <a:rPr lang="en-US" sz="1000" noProof="0" dirty="0">
-                <a:solidFill>
-                  <a:srgbClr val="3A6278"/>
-                </a:solidFill>
-                <a:latin typeface="Calibri"/>
-                <a:cs typeface="Calibri"/>
-              </a:rPr>
-              <a:t>nd</a:t>
-            </a:r>
-            <a:r>
-              <a:rPr lang="en-US" sz="1000" spc="45" noProof="0" dirty="0">
-                <a:solidFill>
-                  <a:srgbClr val="3A6278"/>
-                </a:solidFill>
-                <a:latin typeface="Calibri"/>
-                <a:cs typeface="Calibri"/>
-              </a:rPr>
-              <a:t> </a:t>
-            </a:r>
-            <a:r>
-              <a:rPr lang="en-US" sz="1000" noProof="0" dirty="0">
-                <a:solidFill>
-                  <a:srgbClr val="3A6278"/>
-                </a:solidFill>
-                <a:latin typeface="Calibri"/>
-                <a:cs typeface="Calibri"/>
-              </a:rPr>
-              <a:t>Scrum</a:t>
-            </a:r>
-            <a:r>
-              <a:rPr lang="en-US" sz="1000" spc="50" noProof="0" dirty="0">
-                <a:solidFill>
-                  <a:srgbClr val="3A6278"/>
-                </a:solidFill>
-                <a:latin typeface="Calibri"/>
-                <a:cs typeface="Calibri"/>
-              </a:rPr>
-              <a:t> </a:t>
-            </a:r>
-            <a:r>
-              <a:rPr lang="en-US" sz="1000" noProof="0" dirty="0">
-                <a:solidFill>
-                  <a:srgbClr val="3A6278"/>
-                </a:solidFill>
-                <a:latin typeface="Calibri"/>
-                <a:cs typeface="Calibri"/>
-              </a:rPr>
-              <a:t>Master.</a:t>
-            </a:r>
-            <a:r>
-              <a:rPr lang="en-US" sz="1000" spc="45" noProof="0" dirty="0">
-                <a:solidFill>
-                  <a:srgbClr val="3A6278"/>
-                </a:solidFill>
-                <a:latin typeface="Calibri"/>
-                <a:cs typeface="Calibri"/>
-              </a:rPr>
-              <a:t> </a:t>
+              <a:t>Senior Full Stack Engineer &amp; hands-on Tech Lead with 25+ years' experience, including 6 years at Amazon in full remote. I build and run modern web products with TypeScript, React/Vue/Angular/Astro, Python, PHP and AWS.</a:t>
             </a:r>
             <a:endParaRPr lang="en-US" sz="1000" noProof="0" dirty="0">
               <a:latin typeface="Calibri"/>
@@ -6791,47 +4230,7 @@
                 <a:latin typeface="Calibri"/>
                 <a:cs typeface="Calibri"/>
               </a:rPr>
-              <a:t>React /</a:t>
-            </a:r>
-            <a:r>
-              <a:rPr lang="en-US" sz="1200" b="1" spc="-5" noProof="0" dirty="0">
-                <a:solidFill>
-                  <a:srgbClr val="FFFFFF"/>
-                </a:solidFill>
-                <a:latin typeface="Calibri"/>
-                <a:cs typeface="Calibri"/>
-              </a:rPr>
-              <a:t> </a:t>
-            </a:r>
-            <a:r>
-              <a:rPr lang="en-US" sz="1200" b="1" noProof="0" dirty="0">
-                <a:solidFill>
-                  <a:srgbClr val="FFFFFF"/>
-                </a:solidFill>
-                <a:latin typeface="Calibri"/>
-                <a:cs typeface="Calibri"/>
-              </a:rPr>
-              <a:t>Angular /</a:t>
-            </a:r>
-            <a:r>
-              <a:rPr lang="en-US" sz="1200" b="1" spc="-20" noProof="0" dirty="0">
-                <a:solidFill>
-                  <a:srgbClr val="FFFFFF"/>
-                </a:solidFill>
-                <a:latin typeface="Calibri"/>
-                <a:cs typeface="Calibri"/>
-              </a:rPr>
-              <a:t> Vue</a:t>
-            </a:r>
-            <a:r>
-              <a:rPr lang="en-US" sz="1200" b="1" noProof="0" dirty="0">
-                <a:solidFill>
-                  <a:srgbClr val="FFFFFF"/>
-                </a:solidFill>
-                <a:latin typeface="Calibri"/>
-                <a:cs typeface="Calibri"/>
-              </a:rPr>
-              <a:t> / TS</a:t>
+              <a:t>JavaScript / TypeScript</a:t>
             </a:r>
             <a:endParaRPr lang="en-US" sz="1200" noProof="0" dirty="0">
               <a:latin typeface="Calibri"/>
@@ -6877,87 +4276,7 @@
                 <a:latin typeface="Calibri"/>
                 <a:cs typeface="Calibri"/>
               </a:rPr>
-              <a:t>PHP</a:t>
-            </a:r>
-            <a:r>
-              <a:rPr lang="en-US" sz="1200" b="1" spc="5" noProof="0" dirty="0">
-                <a:solidFill>
-                  <a:srgbClr val="FFFFFF"/>
-                </a:solidFill>
-                <a:latin typeface="Calibri"/>
-                <a:cs typeface="Calibri"/>
-              </a:rPr>
-              <a:t> </a:t>
-            </a:r>
-            <a:r>
-              <a:rPr lang="en-US" sz="1200" b="1" noProof="0" dirty="0">
-                <a:solidFill>
-                  <a:srgbClr val="FFFFFF"/>
-                </a:solidFill>
-                <a:latin typeface="Calibri"/>
-                <a:cs typeface="Calibri"/>
-              </a:rPr>
-              <a:t>/</a:t>
-            </a:r>
-            <a:r>
-              <a:rPr lang="en-US" sz="1200" b="1" spc="-5" noProof="0" dirty="0">
-                <a:solidFill>
-                  <a:srgbClr val="FFFFFF"/>
-                </a:solidFill>
-                <a:latin typeface="Calibri"/>
-                <a:cs typeface="Calibri"/>
-              </a:rPr>
-              <a:t> </a:t>
-            </a:r>
-            <a:r>
-              <a:rPr lang="en-US" sz="1200" b="1" spc="-10" noProof="0" dirty="0">
-                <a:solidFill>
-                  <a:srgbClr val="FFFFFF"/>
-                </a:solidFill>
-                <a:latin typeface="Calibri"/>
-                <a:cs typeface="Calibri"/>
-              </a:rPr>
-              <a:t>Symfony</a:t>
-            </a:r>
-            <a:r>
-              <a:rPr lang="en-US" sz="1200" b="1" spc="-20" noProof="0" dirty="0">
-                <a:solidFill>
-                  <a:srgbClr val="FFFFFF"/>
-                </a:solidFill>
-                <a:latin typeface="Calibri"/>
-                <a:cs typeface="Calibri"/>
-              </a:rPr>
-              <a:t> </a:t>
-            </a:r>
-            <a:r>
-              <a:rPr lang="en-US" sz="1200" b="1" noProof="0" dirty="0">
-                <a:solidFill>
-                  <a:srgbClr val="FFFFFF"/>
-                </a:solidFill>
-                <a:latin typeface="Calibri"/>
-                <a:cs typeface="Calibri"/>
-              </a:rPr>
-              <a:t>/</a:t>
-            </a:r>
-            <a:r>
-              <a:rPr lang="en-US" sz="1200" b="1" spc="-40" noProof="0" dirty="0">
-                <a:solidFill>
-                  <a:srgbClr val="FFFFFF"/>
-                </a:solidFill>
-                <a:latin typeface="Calibri"/>
-                <a:cs typeface="Calibri"/>
-              </a:rPr>
-              <a:t> </a:t>
-            </a:r>
-            <a:r>
-              <a:rPr lang="en-US" sz="1200" b="1" spc="-10" noProof="0" dirty="0">
-                <a:solidFill>
-                  <a:srgbClr val="FFFFFF"/>
-                </a:solidFill>
-                <a:latin typeface="Calibri"/>
-                <a:cs typeface="Calibri"/>
-              </a:rPr>
-              <a:t>Magento</a:t>
+              <a:t>Full Stack / Node.js / APIs</a:t>
             </a:r>
             <a:endParaRPr lang="en-US" sz="1200" noProof="0" dirty="0">
               <a:latin typeface="Calibri"/>
@@ -7231,47 +4550,7 @@
                 <a:latin typeface="Calibri"/>
                 <a:cs typeface="Calibri"/>
               </a:rPr>
-              <a:t>SQL</a:t>
-            </a:r>
-            <a:r>
-              <a:rPr lang="en-US" sz="1200" b="1" spc="-10" noProof="0" dirty="0">
-                <a:solidFill>
-                  <a:srgbClr val="FFFFFF"/>
-                </a:solidFill>
-                <a:latin typeface="Calibri"/>
-                <a:cs typeface="Calibri"/>
-              </a:rPr>
-              <a:t> </a:t>
-            </a:r>
-            <a:r>
-              <a:rPr lang="en-US" sz="1200" b="1" noProof="0" dirty="0">
-                <a:solidFill>
-                  <a:srgbClr val="FFFFFF"/>
-                </a:solidFill>
-                <a:latin typeface="Calibri"/>
-                <a:cs typeface="Calibri"/>
-              </a:rPr>
-              <a:t>/ No</a:t>
-            </a:r>
-            <a:r>
-              <a:rPr lang="en-US" sz="1200" b="1" spc="-10" noProof="0" dirty="0">
-                <a:solidFill>
-                  <a:srgbClr val="FFFFFF"/>
-                </a:solidFill>
-                <a:latin typeface="Calibri"/>
-                <a:cs typeface="Calibri"/>
-              </a:rPr>
-              <a:t>SQL </a:t>
-            </a:r>
-            <a:r>
-              <a:rPr lang="en-US" sz="1200" b="1" noProof="0" dirty="0">
-                <a:solidFill>
-                  <a:srgbClr val="FFFFFF"/>
-                </a:solidFill>
-                <a:latin typeface="Calibri"/>
-                <a:cs typeface="Calibri"/>
-              </a:rPr>
-              <a:t>Databases</a:t>
+              <a:t>SQL / NoSQL / Data</a:t>
             </a:r>
             <a:endParaRPr lang="en-US" sz="1200" noProof="0" dirty="0">
               <a:latin typeface="Calibri"/>
@@ -7420,47 +4699,7 @@
                 <a:latin typeface="Calibri"/>
                 <a:cs typeface="Calibri"/>
               </a:rPr>
-              <a:t>Cloud</a:t>
-            </a:r>
-            <a:r>
-              <a:rPr lang="en-US" sz="1200" b="1" spc="-10" noProof="0" dirty="0">
-                <a:solidFill>
-                  <a:srgbClr val="FFFFFF"/>
-                </a:solidFill>
-                <a:latin typeface="Calibri"/>
-                <a:cs typeface="Calibri"/>
-              </a:rPr>
-              <a:t> Computing </a:t>
-            </a:r>
-            <a:r>
-              <a:rPr lang="en-US" sz="1200" b="1" noProof="0" dirty="0">
-                <a:solidFill>
-                  <a:srgbClr val="FFFFFF"/>
-                </a:solidFill>
-                <a:latin typeface="Calibri"/>
-                <a:cs typeface="Calibri"/>
-              </a:rPr>
-              <a:t>/</a:t>
-            </a:r>
-            <a:r>
-              <a:rPr lang="en-US" sz="1200" b="1" spc="-25" noProof="0" dirty="0">
-                <a:solidFill>
-                  <a:srgbClr val="FFFFFF"/>
-                </a:solidFill>
-                <a:latin typeface="Calibri"/>
-                <a:cs typeface="Calibri"/>
-              </a:rPr>
-              <a:t> </a:t>
-            </a:r>
-            <a:r>
-              <a:rPr lang="en-US" sz="1200" b="1" noProof="0" dirty="0">
-                <a:solidFill>
-                  <a:srgbClr val="FFFFFF"/>
-                </a:solidFill>
-                <a:latin typeface="Calibri"/>
-                <a:cs typeface="Calibri"/>
-              </a:rPr>
-              <a:t>AWS </a:t>
+              <a:t>Cloud Computing / AWS</a:t>
             </a:r>
             <a:endParaRPr lang="en-US" sz="1200" noProof="0" dirty="0">
               <a:latin typeface="Calibri"/>
@@ -7631,87 +4870,7 @@
                 <a:latin typeface="Calibri"/>
                 <a:cs typeface="Calibri"/>
               </a:rPr>
-              <a:t>Design</a:t>
-            </a:r>
-            <a:r>
-              <a:rPr lang="en-US" sz="1200" b="1" spc="-15" noProof="0" dirty="0">
-                <a:solidFill>
-                  <a:srgbClr val="FFFFFF"/>
-                </a:solidFill>
-                <a:latin typeface="Calibri"/>
-                <a:cs typeface="Calibri"/>
-              </a:rPr>
-              <a:t> </a:t>
-            </a:r>
-            <a:r>
-              <a:rPr lang="en-US" sz="1200" b="1" noProof="0" dirty="0">
-                <a:solidFill>
-                  <a:srgbClr val="FFFFFF"/>
-                </a:solidFill>
-                <a:latin typeface="Calibri"/>
-                <a:cs typeface="Calibri"/>
-              </a:rPr>
-              <a:t>/</a:t>
-            </a:r>
-            <a:r>
-              <a:rPr lang="en-US" sz="1200" b="1" spc="-25" noProof="0" dirty="0">
-                <a:solidFill>
-                  <a:srgbClr val="FFFFFF"/>
-                </a:solidFill>
-                <a:latin typeface="Calibri"/>
-                <a:cs typeface="Calibri"/>
-              </a:rPr>
-              <a:t> </a:t>
-            </a:r>
-            <a:r>
-              <a:rPr lang="en-US" sz="1200" b="1" noProof="0" dirty="0">
-                <a:solidFill>
-                  <a:srgbClr val="FFFFFF"/>
-                </a:solidFill>
-                <a:latin typeface="Calibri"/>
-                <a:cs typeface="Calibri"/>
-              </a:rPr>
-              <a:t>Photoshop</a:t>
-            </a:r>
-            <a:r>
-              <a:rPr lang="en-US" sz="1200" b="1" spc="-25" noProof="0" dirty="0">
-                <a:solidFill>
-                  <a:srgbClr val="FFFFFF"/>
-                </a:solidFill>
-                <a:latin typeface="Calibri"/>
-                <a:cs typeface="Calibri"/>
-              </a:rPr>
-              <a:t> </a:t>
-            </a:r>
-            <a:r>
-              <a:rPr lang="en-US" sz="1200" b="1" noProof="0" dirty="0">
-                <a:solidFill>
-                  <a:srgbClr val="FFFFFF"/>
-                </a:solidFill>
-                <a:latin typeface="Calibri"/>
-                <a:cs typeface="Calibri"/>
-              </a:rPr>
-              <a:t>/</a:t>
-            </a:r>
-            <a:r>
-              <a:rPr lang="en-US" sz="1200" b="1" spc="-25" noProof="0" dirty="0">
-                <a:solidFill>
-                  <a:srgbClr val="FFFFFF"/>
-                </a:solidFill>
-                <a:latin typeface="Calibri"/>
-                <a:cs typeface="Calibri"/>
-              </a:rPr>
-              <a:t> </a:t>
-            </a:r>
-            <a:r>
-              <a:rPr lang="en-US" sz="1200" b="1" spc="-20" noProof="0" dirty="0">
-                <a:solidFill>
-                  <a:srgbClr val="FFFFFF"/>
-                </a:solidFill>
-                <a:latin typeface="Calibri"/>
-                <a:cs typeface="Calibri"/>
-              </a:rPr>
-              <a:t>Gimp</a:t>
+              <a:t>Product Engineering</a:t>
             </a:r>
             <a:endParaRPr lang="en-US" sz="1200" noProof="0" dirty="0">
               <a:latin typeface="Calibri"/>
@@ -7896,7 +5055,7 @@
         <p:spPr>
           <a:xfrm>
             <a:off x="374015" y="4478885"/>
-            <a:ext cx="1508760" cy="208279"/>
+            <a:ext cx="1508760" cy="197490"/>
           </a:xfrm>
           <a:prstGeom prst="rect">
             <a:avLst/>
@@ -7924,87 +5083,7 @@
                 <a:latin typeface="Calibri"/>
                 <a:cs typeface="Calibri"/>
               </a:rPr>
-              <a:t>Python</a:t>
-            </a:r>
-            <a:r>
-              <a:rPr lang="en-US" sz="1200" b="1" spc="-5" noProof="0" dirty="0">
-                <a:solidFill>
-                  <a:srgbClr val="FFFFFF"/>
-                </a:solidFill>
-                <a:latin typeface="Calibri"/>
-                <a:cs typeface="Calibri"/>
-              </a:rPr>
-              <a:t> </a:t>
-            </a:r>
-            <a:r>
-              <a:rPr lang="en-US" sz="1200" b="1" noProof="0" dirty="0">
-                <a:solidFill>
-                  <a:srgbClr val="FFFFFF"/>
-                </a:solidFill>
-                <a:latin typeface="Calibri"/>
-                <a:cs typeface="Calibri"/>
-              </a:rPr>
-              <a:t>/</a:t>
-            </a:r>
-            <a:r>
-              <a:rPr lang="en-US" sz="1200" b="1" spc="-5" noProof="0" dirty="0">
-                <a:solidFill>
-                  <a:srgbClr val="FFFFFF"/>
-                </a:solidFill>
-                <a:latin typeface="Calibri"/>
-                <a:cs typeface="Calibri"/>
-              </a:rPr>
-              <a:t> </a:t>
-            </a:r>
-            <a:r>
-              <a:rPr lang="en-US" sz="1200" b="1" noProof="0" dirty="0">
-                <a:solidFill>
-                  <a:srgbClr val="FFFFFF"/>
-                </a:solidFill>
-                <a:latin typeface="Calibri"/>
-                <a:cs typeface="Calibri"/>
-              </a:rPr>
-              <a:t>Flask</a:t>
-            </a:r>
-            <a:r>
-              <a:rPr lang="en-US" sz="1200" b="1" spc="-15" noProof="0" dirty="0">
-                <a:solidFill>
-                  <a:srgbClr val="FFFFFF"/>
-                </a:solidFill>
-                <a:latin typeface="Calibri"/>
-                <a:cs typeface="Calibri"/>
-              </a:rPr>
-              <a:t> </a:t>
-            </a:r>
-            <a:r>
-              <a:rPr lang="en-US" sz="1200" b="1" noProof="0" dirty="0">
-                <a:solidFill>
-                  <a:srgbClr val="FFFFFF"/>
-                </a:solidFill>
-                <a:latin typeface="Calibri"/>
-                <a:cs typeface="Calibri"/>
-              </a:rPr>
-              <a:t>/</a:t>
-            </a:r>
-            <a:r>
-              <a:rPr lang="en-US" sz="1200" b="1" spc="-15" noProof="0" dirty="0">
-                <a:solidFill>
-                  <a:srgbClr val="FFFFFF"/>
-                </a:solidFill>
-                <a:latin typeface="Calibri"/>
-                <a:cs typeface="Calibri"/>
-              </a:rPr>
-              <a:t> </a:t>
-            </a:r>
-            <a:r>
-              <a:rPr lang="en-US" sz="1200" b="1" spc="-10" noProof="0" dirty="0">
-                <a:solidFill>
-                  <a:srgbClr val="FFFFFF"/>
-                </a:solidFill>
-                <a:latin typeface="Calibri"/>
-                <a:cs typeface="Calibri"/>
-              </a:rPr>
-              <a:t>Django</a:t>
+              <a:t>Python / PHP</a:t>
             </a:r>
             <a:endParaRPr lang="en-US" sz="1200" noProof="0" dirty="0">
               <a:latin typeface="Calibri"/>
@@ -8208,9 +5287,9 @@
         <p:grpSpPr>
           <a:xfrm>
             <a:off x="391160" y="6553200"/>
-            <a:ext cx="1750695" cy="448944"/>
+            <a:ext cx="1750695" cy="443985"/>
             <a:chOff x="306705" y="7780656"/>
-            <a:chExt cx="1750695" cy="448944"/>
+            <a:chExt cx="1750695" cy="443985"/>
           </a:xfrm>
         </p:grpSpPr>
         <p:sp>
@@ -8256,47 +5335,7 @@
                   <a:latin typeface="Calibri"/>
                   <a:cs typeface="Calibri"/>
                 </a:rPr>
-                <a:t>AI</a:t>
-              </a:r>
-              <a:r>
-                <a:rPr lang="en-US" sz="1200" b="1" spc="-15" noProof="0" dirty="0">
-                  <a:solidFill>
-                    <a:srgbClr val="FFFFFF"/>
-                  </a:solidFill>
-                  <a:latin typeface="Calibri"/>
-                  <a:cs typeface="Calibri"/>
-                </a:rPr>
-                <a:t> </a:t>
-              </a:r>
-              <a:r>
-                <a:rPr lang="en-US" sz="1200" b="1" noProof="0" dirty="0">
-                  <a:solidFill>
-                    <a:srgbClr val="FFFFFF"/>
-                  </a:solidFill>
-                  <a:latin typeface="Calibri"/>
-                  <a:cs typeface="Calibri"/>
-                </a:rPr>
-                <a:t>/</a:t>
-              </a:r>
-              <a:r>
-                <a:rPr lang="en-US" sz="1200" b="1" spc="-25" noProof="0" dirty="0">
-                  <a:solidFill>
-                    <a:srgbClr val="FFFFFF"/>
-                  </a:solidFill>
-                  <a:latin typeface="Calibri"/>
-                  <a:cs typeface="Calibri"/>
-                </a:rPr>
-                <a:t> </a:t>
-              </a:r>
-              <a:r>
-                <a:rPr lang="en-US" sz="1200" b="1" noProof="0" dirty="0">
-                  <a:solidFill>
-                    <a:srgbClr val="FFFFFF"/>
-                  </a:solidFill>
-                  <a:latin typeface="Calibri"/>
-                  <a:cs typeface="Calibri"/>
-                </a:rPr>
-                <a:t>Machine Learning</a:t>
+                <a:t>ML / AI / GenAI</a:t>
               </a:r>
               <a:endParaRPr lang="en-US" sz="1200" noProof="0" dirty="0">
                 <a:latin typeface="Calibri"/>
@@ -8307,10 +5346,10 @@
         </p:sp>
         <p:grpSp>
           <p:nvGrpSpPr>
-            <p:cNvPr id="103" name="Groupe 102">
+            <p:cNvPr id="96" name="object 79">
               <a:extLst>
                 <a:ext uri="{FF2B5EF4-FFF2-40B4-BE49-F238E27FC236}">
-                  <a16:creationId xmlns:a16="http://schemas.microsoft.com/office/drawing/2014/main" id="{0366A200-F480-14CB-9924-1F1ACA91A4FF}"/>
+                  <a16:creationId xmlns:a16="http://schemas.microsoft.com/office/drawing/2014/main" id="{76686C02-0D5D-BBF7-487D-041FCB1D8AAB}"/>
                 </a:ext>
               </a:extLst>
             </p:cNvPr>
@@ -8320,150 +5359,101 @@
           <p:grpSpPr>
             <a:xfrm>
               <a:off x="656079" y="8002138"/>
-              <a:ext cx="1203958" cy="227462"/>
-              <a:chOff x="656079" y="7784206"/>
-              <a:chExt cx="1203958" cy="227462"/>
+              <a:ext cx="1203958" cy="222503"/>
+              <a:chOff x="658368" y="7882128"/>
+              <a:chExt cx="1203958" cy="222503"/>
             </a:xfrm>
           </p:grpSpPr>
-          <p:grpSp>
-            <p:nvGrpSpPr>
-              <p:cNvPr id="96" name="object 79">
+          <p:pic>
+            <p:nvPicPr>
+              <p:cNvPr id="97" name="object 80">
                 <a:extLst>
                   <a:ext uri="{FF2B5EF4-FFF2-40B4-BE49-F238E27FC236}">
-                    <a16:creationId xmlns:a16="http://schemas.microsoft.com/office/drawing/2014/main" id="{76686C02-0D5D-BBF7-487D-041FCB1D8AAB}"/>
+                    <a16:creationId xmlns:a16="http://schemas.microsoft.com/office/drawing/2014/main" id="{97B809AE-7E24-7C2D-094A-EFAB68DA3BFB}"/>
                   </a:ext>
                 </a:extLst>
               </p:cNvPr>
-              <p:cNvGrpSpPr/>
+              <p:cNvPicPr/>
               <p:nvPr/>
-            </p:nvGrpSpPr>
-            <p:grpSpPr>
+            </p:nvPicPr>
+            <p:blipFill>
+              <a:blip r:embed="rId19" cstate="print"/>
+              <a:stretch>
+                <a:fillRect/>
+              </a:stretch>
+            </p:blipFill>
+            <p:spPr>
               <a:xfrm>
-                <a:off x="656079" y="7784206"/>
-                <a:ext cx="1203958" cy="222503"/>
-                <a:chOff x="658368" y="7882128"/>
-                <a:chExt cx="1203958" cy="222503"/>
+                <a:off x="658368" y="7886700"/>
+                <a:ext cx="217931" cy="217931"/>
               </a:xfrm>
-            </p:grpSpPr>
-            <p:pic>
-              <p:nvPicPr>
-                <p:cNvPr id="97" name="object 80">
-                  <a:extLst>
-                    <a:ext uri="{FF2B5EF4-FFF2-40B4-BE49-F238E27FC236}">
-                      <a16:creationId xmlns:a16="http://schemas.microsoft.com/office/drawing/2014/main" id="{97B809AE-7E24-7C2D-094A-EFAB68DA3BFB}"/>
-                    </a:ext>
-                  </a:extLst>
-                </p:cNvPr>
-                <p:cNvPicPr/>
-                <p:nvPr/>
-              </p:nvPicPr>
-              <p:blipFill>
-                <a:blip r:embed="rId19" cstate="print"/>
-                <a:stretch>
-                  <a:fillRect/>
-                </a:stretch>
-              </p:blipFill>
-              <p:spPr>
-                <a:xfrm>
-                  <a:off x="658368" y="7886700"/>
-                  <a:ext cx="217931" cy="217931"/>
-                </a:xfrm>
-                <a:prstGeom prst="rect">
-                  <a:avLst/>
-                </a:prstGeom>
-              </p:spPr>
-            </p:pic>
-            <p:pic>
-              <p:nvPicPr>
-                <p:cNvPr id="98" name="object 81">
-                  <a:extLst>
-                    <a:ext uri="{FF2B5EF4-FFF2-40B4-BE49-F238E27FC236}">
-                      <a16:creationId xmlns:a16="http://schemas.microsoft.com/office/drawing/2014/main" id="{6270CE1B-E0F2-C8F3-73D3-DFB088DF53B8}"/>
-                    </a:ext>
-                  </a:extLst>
-                </p:cNvPr>
-                <p:cNvPicPr/>
-                <p:nvPr/>
-              </p:nvPicPr>
-              <p:blipFill>
-                <a:blip r:embed="rId19" cstate="print"/>
-                <a:stretch>
-                  <a:fillRect/>
-                </a:stretch>
-              </p:blipFill>
-              <p:spPr>
-                <a:xfrm>
-                  <a:off x="905256" y="7886700"/>
-                  <a:ext cx="217931" cy="217931"/>
-                </a:xfrm>
-                <a:prstGeom prst="rect">
-                  <a:avLst/>
-                </a:prstGeom>
-              </p:spPr>
-            </p:pic>
-            <p:pic>
-              <p:nvPicPr>
-                <p:cNvPr id="100" name="object 83">
-                  <a:extLst>
-                    <a:ext uri="{FF2B5EF4-FFF2-40B4-BE49-F238E27FC236}">
-                      <a16:creationId xmlns:a16="http://schemas.microsoft.com/office/drawing/2014/main" id="{DDCAA6C4-3417-17D9-90DB-0EA8FC9FF33C}"/>
-                    </a:ext>
-                  </a:extLst>
-                </p:cNvPr>
-                <p:cNvPicPr/>
-                <p:nvPr/>
-              </p:nvPicPr>
-              <p:blipFill>
-                <a:blip r:embed="rId25" cstate="print"/>
-                <a:stretch>
-                  <a:fillRect/>
-                </a:stretch>
-              </p:blipFill>
-              <p:spPr>
-                <a:xfrm>
-                  <a:off x="1644395" y="7886700"/>
-                  <a:ext cx="217931" cy="217931"/>
-                </a:xfrm>
-                <a:prstGeom prst="rect">
-                  <a:avLst/>
-                </a:prstGeom>
-              </p:spPr>
-            </p:pic>
-            <p:pic>
-              <p:nvPicPr>
-                <p:cNvPr id="101" name="object 84">
-                  <a:extLst>
-                    <a:ext uri="{FF2B5EF4-FFF2-40B4-BE49-F238E27FC236}">
-                      <a16:creationId xmlns:a16="http://schemas.microsoft.com/office/drawing/2014/main" id="{29EFDA6D-6E70-DE6E-E65A-F51D5D3729EC}"/>
-                    </a:ext>
-                  </a:extLst>
-                </p:cNvPr>
-                <p:cNvPicPr/>
-                <p:nvPr/>
-              </p:nvPicPr>
-              <p:blipFill>
-                <a:blip r:embed="rId22" cstate="print"/>
-                <a:stretch>
-                  <a:fillRect/>
-                </a:stretch>
-              </p:blipFill>
-              <p:spPr>
-                <a:xfrm>
-                  <a:off x="1395984" y="7882128"/>
-                  <a:ext cx="216407" cy="216408"/>
-                </a:xfrm>
-                <a:prstGeom prst="rect">
-                  <a:avLst/>
-                </a:prstGeom>
-              </p:spPr>
-            </p:pic>
-          </p:grpSp>
+              <a:prstGeom prst="rect">
+                <a:avLst/>
+              </a:prstGeom>
+            </p:spPr>
+          </p:pic>
           <p:pic>
             <p:nvPicPr>
-              <p:cNvPr id="102" name="object 84">
+              <p:cNvPr id="98" name="object 81">
                 <a:extLst>
                   <a:ext uri="{FF2B5EF4-FFF2-40B4-BE49-F238E27FC236}">
-                    <a16:creationId xmlns:a16="http://schemas.microsoft.com/office/drawing/2014/main" id="{9A5FDC64-C3D5-93F7-666F-D1BF6E8A64B0}"/>
+                    <a16:creationId xmlns:a16="http://schemas.microsoft.com/office/drawing/2014/main" id="{6270CE1B-E0F2-C8F3-73D3-DFB088DF53B8}"/>
+                  </a:ext>
+                </a:extLst>
+              </p:cNvPr>
+              <p:cNvPicPr/>
+              <p:nvPr/>
+            </p:nvPicPr>
+            <p:blipFill>
+              <a:blip r:embed="rId19" cstate="print"/>
+              <a:stretch>
+                <a:fillRect/>
+              </a:stretch>
+            </p:blipFill>
+            <p:spPr>
+              <a:xfrm>
+                <a:off x="905256" y="7886700"/>
+                <a:ext cx="217931" cy="217931"/>
+              </a:xfrm>
+              <a:prstGeom prst="rect">
+                <a:avLst/>
+              </a:prstGeom>
+            </p:spPr>
+          </p:pic>
+          <p:pic>
+            <p:nvPicPr>
+              <p:cNvPr id="100" name="object 83">
+                <a:extLst>
+                  <a:ext uri="{FF2B5EF4-FFF2-40B4-BE49-F238E27FC236}">
+                    <a16:creationId xmlns:a16="http://schemas.microsoft.com/office/drawing/2014/main" id="{DDCAA6C4-3417-17D9-90DB-0EA8FC9FF33C}"/>
+                  </a:ext>
+                </a:extLst>
+              </p:cNvPr>
+              <p:cNvPicPr/>
+              <p:nvPr/>
+            </p:nvPicPr>
+            <p:blipFill>
+              <a:blip r:embed="rId25" cstate="print"/>
+              <a:stretch>
+                <a:fillRect/>
+              </a:stretch>
+            </p:blipFill>
+            <p:spPr>
+              <a:xfrm>
+                <a:off x="1644395" y="7886700"/>
+                <a:ext cx="217931" cy="217931"/>
+              </a:xfrm>
+              <a:prstGeom prst="rect">
+                <a:avLst/>
+              </a:prstGeom>
+            </p:spPr>
+          </p:pic>
+          <p:pic>
+            <p:nvPicPr>
+              <p:cNvPr id="101" name="object 84">
+                <a:extLst>
+                  <a:ext uri="{FF2B5EF4-FFF2-40B4-BE49-F238E27FC236}">
+                    <a16:creationId xmlns:a16="http://schemas.microsoft.com/office/drawing/2014/main" id="{29EFDA6D-6E70-DE6E-E65A-F51D5D3729EC}"/>
                   </a:ext>
                 </a:extLst>
               </p:cNvPr>
@@ -8478,7 +5468,7 @@
             </p:blipFill>
             <p:spPr>
               <a:xfrm>
-                <a:off x="1152587" y="7795260"/>
+                <a:off x="1395984" y="7882128"/>
                 <a:ext cx="216407" cy="216408"/>
               </a:xfrm>
               <a:prstGeom prst="rect">
@@ -8502,10 +5492,10 @@
         </p:nvGrpSpPr>
         <p:grpSpPr>
           <a:xfrm>
-            <a:off x="267335" y="7047573"/>
-            <a:ext cx="1840864" cy="491678"/>
-            <a:chOff x="158052" y="4007169"/>
-            <a:chExt cx="1840864" cy="491678"/>
+            <a:off x="388619" y="7047573"/>
+            <a:ext cx="1719579" cy="491678"/>
+            <a:chOff x="279336" y="4007169"/>
+            <a:chExt cx="1719579" cy="491678"/>
           </a:xfrm>
         </p:grpSpPr>
         <p:grpSp>
@@ -8647,8 +5637,8 @@
           </p:nvSpPr>
           <p:spPr>
             <a:xfrm>
-              <a:off x="158052" y="4007169"/>
-              <a:ext cx="1840864" cy="197490"/>
+              <a:off x="279336" y="4007169"/>
+              <a:ext cx="1719579" cy="197490"/>
             </a:xfrm>
             <a:prstGeom prst="rect">
               <a:avLst/>
@@ -8660,7 +5650,7 @@
             </a:bodyPr>
             <a:lstStyle/>
             <a:p>
-              <a:pPr algn="ctr">
+              <a:pPr algn="l">
                 <a:lnSpc>
                   <a:spcPct val="100000"/>
                 </a:lnSpc>
@@ -8676,77 +5666,7 @@
                   <a:latin typeface="Calibri"/>
                   <a:cs typeface="Calibri"/>
                 </a:rPr>
-                <a:t>HTML</a:t>
-              </a:r>
-              <a:r>
-                <a:rPr lang="en-US" sz="1200" b="1" spc="20" noProof="0" dirty="0">
-                  <a:solidFill>
-                    <a:srgbClr val="FFFFFF"/>
-                  </a:solidFill>
-                  <a:latin typeface="Calibri"/>
-                  <a:cs typeface="Calibri"/>
-                </a:rPr>
-                <a:t> </a:t>
-              </a:r>
-              <a:r>
-                <a:rPr lang="en-US" sz="1200" b="1" noProof="0" dirty="0">
-                  <a:solidFill>
-                    <a:srgbClr val="FFFFFF"/>
-                  </a:solidFill>
-                  <a:latin typeface="Calibri"/>
-                  <a:cs typeface="Calibri"/>
-                </a:rPr>
-                <a:t>/</a:t>
-              </a:r>
-              <a:r>
-                <a:rPr lang="en-US" sz="1200" b="1" spc="-20" noProof="0" dirty="0">
-                  <a:solidFill>
-                    <a:srgbClr val="FFFFFF"/>
-                  </a:solidFill>
-                  <a:latin typeface="Calibri"/>
-                  <a:cs typeface="Calibri"/>
-                </a:rPr>
-                <a:t> </a:t>
-              </a:r>
-              <a:r>
-                <a:rPr lang="en-US" sz="1200" b="1" noProof="0" dirty="0">
-                  <a:solidFill>
-                    <a:srgbClr val="FFFFFF"/>
-                  </a:solidFill>
-                  <a:latin typeface="Calibri"/>
-                  <a:cs typeface="Calibri"/>
-                </a:rPr>
-                <a:t>CSS / LESS</a:t>
-              </a:r>
-              <a:r>
-                <a:rPr lang="en-US" sz="1200" b="1" spc="-15" noProof="0" dirty="0">
-                  <a:solidFill>
-                    <a:srgbClr val="FFFFFF"/>
-                  </a:solidFill>
-                  <a:latin typeface="Calibri"/>
-                  <a:cs typeface="Calibri"/>
-                </a:rPr>
-                <a:t> </a:t>
-              </a:r>
-              <a:r>
-                <a:rPr lang="en-US" sz="1200" b="1" noProof="0" dirty="0">
-                  <a:solidFill>
-                    <a:srgbClr val="FFFFFF"/>
-                  </a:solidFill>
-                  <a:latin typeface="Calibri"/>
-                  <a:cs typeface="Calibri"/>
-                </a:rPr>
-                <a:t>/ </a:t>
-              </a:r>
-              <a:r>
-                <a:rPr lang="en-US" sz="1200" b="1" spc="-20" noProof="0" dirty="0">
-                  <a:solidFill>
-                    <a:srgbClr val="FFFFFF"/>
-                  </a:solidFill>
-                  <a:latin typeface="Calibri"/>
-                  <a:cs typeface="Calibri"/>
-                </a:rPr>
-                <a:t>SASS</a:t>
+                <a:t>HTML / CSS</a:t>
               </a:r>
               <a:endParaRPr lang="en-US" sz="1200" noProof="0" dirty="0">
                 <a:latin typeface="Calibri"/>
@@ -9012,7 +5932,7 @@
         <p:spPr>
           <a:xfrm>
             <a:off x="2340736" y="3478089"/>
-            <a:ext cx="4419726" cy="1373325"/>
+            <a:ext cx="4419726" cy="1265603"/>
           </a:xfrm>
           <a:prstGeom prst="rect">
             <a:avLst/>
@@ -9045,47 +5965,7 @@
                 <a:latin typeface="Calibri"/>
                 <a:cs typeface="Calibri"/>
               </a:rPr>
-              <a:t>SENIOR</a:t>
-            </a:r>
-            <a:r>
-              <a:rPr lang="en-US" sz="1100" b="1" spc="-25" noProof="0" dirty="0">
-                <a:solidFill>
-                  <a:srgbClr val="3A6278"/>
-                </a:solidFill>
-                <a:latin typeface="Calibri"/>
-                <a:cs typeface="Calibri"/>
-              </a:rPr>
-              <a:t> </a:t>
-            </a:r>
-            <a:r>
-              <a:rPr lang="en-US" sz="1100" b="1" noProof="0" dirty="0">
-                <a:solidFill>
-                  <a:srgbClr val="3A6278"/>
-                </a:solidFill>
-                <a:latin typeface="Calibri"/>
-                <a:cs typeface="Calibri"/>
-              </a:rPr>
-              <a:t>DEV /</a:t>
-            </a:r>
-            <a:r>
-              <a:rPr lang="en-US" sz="1100" b="1" spc="-5" noProof="0" dirty="0">
-                <a:solidFill>
-                  <a:srgbClr val="3A6278"/>
-                </a:solidFill>
-                <a:latin typeface="Calibri"/>
-                <a:cs typeface="Calibri"/>
-              </a:rPr>
-              <a:t> TECH </a:t>
-            </a:r>
-            <a:r>
-              <a:rPr lang="en-US" sz="1100" b="1" spc="-20" noProof="0" dirty="0">
-                <a:solidFill>
-                  <a:srgbClr val="3A6278"/>
-                </a:solidFill>
-                <a:latin typeface="Calibri"/>
-                <a:cs typeface="Calibri"/>
-              </a:rPr>
-              <a:t>LEAD / DEVOPS</a:t>
+              <a:t>SENIOR FULL STACK ENGINEER / TECH LEAD</a:t>
             </a:r>
             <a:endParaRPr lang="en-US" sz="1100" noProof="0" dirty="0">
               <a:latin typeface="Calibri"/>
@@ -9106,75 +5986,15 @@
                 <a:latin typeface="Calibri"/>
                 <a:cs typeface="Calibri"/>
               </a:rPr>
-              <a:t>AMAZON|</a:t>
-            </a:r>
-            <a:r>
-              <a:rPr lang="en-US" sz="1400" spc="-55" noProof="0" dirty="0">
-                <a:latin typeface="Calibri"/>
-                <a:cs typeface="Calibri"/>
-              </a:rPr>
-              <a:t> </a:t>
-            </a:r>
-            <a:r>
-              <a:rPr lang="en-US" sz="1400" noProof="0" dirty="0">
-                <a:latin typeface="Calibri"/>
-                <a:cs typeface="Calibri"/>
-              </a:rPr>
-              <a:t>Mar</a:t>
-            </a:r>
-            <a:r>
-              <a:rPr lang="en-US" sz="1400" spc="-45" noProof="0" dirty="0">
-                <a:latin typeface="Calibri"/>
-                <a:cs typeface="Calibri"/>
-              </a:rPr>
-              <a:t> </a:t>
-            </a:r>
-            <a:r>
-              <a:rPr lang="en-US" sz="1400" noProof="0" dirty="0">
-                <a:latin typeface="Calibri"/>
-                <a:cs typeface="Calibri"/>
-              </a:rPr>
-              <a:t>2020</a:t>
-            </a:r>
-            <a:r>
-              <a:rPr lang="en-US" sz="1400" spc="-25" noProof="0" dirty="0">
-                <a:latin typeface="Calibri"/>
-                <a:cs typeface="Calibri"/>
-              </a:rPr>
-              <a:t> </a:t>
-            </a:r>
-            <a:r>
-              <a:rPr lang="en-US" sz="1400" noProof="0" dirty="0">
-                <a:latin typeface="Calibri"/>
-                <a:cs typeface="Calibri"/>
-              </a:rPr>
-              <a:t>to</a:t>
-            </a:r>
-            <a:r>
-              <a:rPr lang="en-US" sz="1400" spc="-25" noProof="0" dirty="0">
-                <a:latin typeface="Calibri"/>
-                <a:cs typeface="Calibri"/>
-              </a:rPr>
-              <a:t> </a:t>
-            </a:r>
-            <a:r>
-              <a:rPr lang="en-US" sz="1400" spc="-50" noProof="0" dirty="0">
-                <a:latin typeface="Calibri"/>
-                <a:cs typeface="Calibri"/>
-              </a:rPr>
-              <a:t>Nov 2025 </a:t>
-            </a:r>
-            <a:r>
-              <a:rPr lang="en-US" sz="1200" spc="-50" noProof="0" dirty="0">
+              <a:t>AMAZON | 2020 to 2026 </a:t>
+            </a:r>
+            <a:r>
+              <a:rPr lang="en-US" sz="1100" noProof="0" dirty="0">
                 <a:latin typeface="Calibri"/>
                 <a:cs typeface="Calibri"/>
               </a:rPr>
               <a:t>(FULL REMOTE)</a:t>
             </a:r>
-            <a:endParaRPr lang="en-US" sz="1200" noProof="0" dirty="0">
-              <a:latin typeface="Calibri"/>
-              <a:cs typeface="Calibri"/>
-            </a:endParaRPr>
           </a:p>
           <a:p>
             <a:pPr marL="177165" marR="269240">
@@ -9190,299 +6010,8 @@
                 <a:latin typeface="Calibri"/>
                 <a:cs typeface="Calibri"/>
               </a:rPr>
-              <a:t>Technical</a:t>
-            </a:r>
-            <a:r>
-              <a:rPr lang="en-US" sz="900" spc="-20" noProof="0" dirty="0">
-                <a:latin typeface="Calibri"/>
-                <a:cs typeface="Calibri"/>
-              </a:rPr>
-              <a:t> </a:t>
-            </a:r>
-            <a:r>
-              <a:rPr lang="en-US" sz="900" noProof="0" dirty="0">
-                <a:latin typeface="Calibri"/>
-                <a:cs typeface="Calibri"/>
-              </a:rPr>
-              <a:t>leader</a:t>
-            </a:r>
-            <a:r>
-              <a:rPr lang="en-US" sz="900" spc="5" noProof="0" dirty="0">
-                <a:latin typeface="Calibri"/>
-                <a:cs typeface="Calibri"/>
-              </a:rPr>
-              <a:t> </a:t>
-            </a:r>
-            <a:r>
-              <a:rPr lang="en-US" sz="900" noProof="0" dirty="0">
-                <a:latin typeface="Calibri"/>
-                <a:cs typeface="Calibri"/>
-              </a:rPr>
-              <a:t>of</a:t>
-            </a:r>
-            <a:r>
-              <a:rPr lang="en-US" sz="900" spc="-30" noProof="0" dirty="0">
-                <a:latin typeface="Calibri"/>
-                <a:cs typeface="Calibri"/>
-              </a:rPr>
-              <a:t> </a:t>
-            </a:r>
-            <a:r>
-              <a:rPr lang="en-US" sz="900" noProof="0" dirty="0">
-                <a:latin typeface="Calibri"/>
-                <a:cs typeface="Calibri"/>
-              </a:rPr>
-              <a:t>a</a:t>
-            </a:r>
-            <a:r>
-              <a:rPr lang="en-US" sz="900" spc="-20" noProof="0" dirty="0">
-                <a:latin typeface="Calibri"/>
-                <a:cs typeface="Calibri"/>
-              </a:rPr>
-              <a:t> </a:t>
-            </a:r>
-            <a:r>
-              <a:rPr lang="en-US" sz="900" noProof="0" dirty="0">
-                <a:latin typeface="Calibri"/>
-                <a:cs typeface="Calibri"/>
-              </a:rPr>
-              <a:t>5-engineer</a:t>
-            </a:r>
-            <a:r>
-              <a:rPr lang="en-US" sz="900" spc="15" noProof="0" dirty="0">
-                <a:latin typeface="Calibri"/>
-                <a:cs typeface="Calibri"/>
-              </a:rPr>
-              <a:t> </a:t>
-            </a:r>
-            <a:r>
-              <a:rPr lang="en-US" sz="900" noProof="0" dirty="0">
-                <a:latin typeface="Calibri"/>
-                <a:cs typeface="Calibri"/>
-              </a:rPr>
-              <a:t>dev</a:t>
-            </a:r>
-            <a:r>
-              <a:rPr lang="en-US" sz="900" spc="-10" noProof="0" dirty="0">
-                <a:latin typeface="Calibri"/>
-                <a:cs typeface="Calibri"/>
-              </a:rPr>
-              <a:t> </a:t>
-            </a:r>
-            <a:r>
-              <a:rPr lang="en-US" sz="900" noProof="0" dirty="0">
-                <a:latin typeface="Calibri"/>
-                <a:cs typeface="Calibri"/>
-              </a:rPr>
-              <a:t>team.</a:t>
-            </a:r>
-            <a:r>
-              <a:rPr lang="en-US" sz="900" spc="-15" noProof="0" dirty="0">
-                <a:latin typeface="Calibri"/>
-                <a:cs typeface="Calibri"/>
-              </a:rPr>
-              <a:t> </a:t>
-            </a:r>
-            <a:r>
-              <a:rPr lang="en-US" sz="900" noProof="0" dirty="0">
-                <a:latin typeface="Calibri"/>
-                <a:cs typeface="Calibri"/>
-              </a:rPr>
-              <a:t>Build and Run of</a:t>
-            </a:r>
-            <a:r>
-              <a:rPr lang="en-US" sz="900" spc="-25" noProof="0" dirty="0">
-                <a:latin typeface="Calibri"/>
-                <a:cs typeface="Calibri"/>
-              </a:rPr>
-              <a:t> </a:t>
-            </a:r>
-            <a:r>
-              <a:rPr lang="en-US" sz="900" noProof="0" dirty="0">
-                <a:latin typeface="Calibri"/>
-                <a:cs typeface="Calibri"/>
-              </a:rPr>
-              <a:t>heavy</a:t>
-            </a:r>
-            <a:r>
-              <a:rPr lang="en-US" sz="900" spc="-10" noProof="0" dirty="0">
-                <a:latin typeface="Calibri"/>
-                <a:cs typeface="Calibri"/>
-              </a:rPr>
-              <a:t> </a:t>
-            </a:r>
-            <a:r>
-              <a:rPr lang="en-US" sz="900" noProof="0" dirty="0">
-                <a:latin typeface="Calibri"/>
-                <a:cs typeface="Calibri"/>
-              </a:rPr>
-              <a:t>traffic</a:t>
-            </a:r>
-            <a:r>
-              <a:rPr lang="en-US" sz="900" spc="-15" noProof="0" dirty="0">
-                <a:latin typeface="Calibri"/>
-                <a:cs typeface="Calibri"/>
-              </a:rPr>
-              <a:t> Amazon </a:t>
-            </a:r>
-            <a:r>
-              <a:rPr lang="en-US" sz="900" noProof="0" dirty="0">
-                <a:latin typeface="Calibri"/>
-                <a:cs typeface="Calibri"/>
-              </a:rPr>
-              <a:t>web</a:t>
-            </a:r>
-            <a:r>
-              <a:rPr lang="en-US" sz="900" spc="-20" noProof="0" dirty="0">
-                <a:latin typeface="Calibri"/>
-                <a:cs typeface="Calibri"/>
-              </a:rPr>
-              <a:t> apps </a:t>
-            </a:r>
-            <a:r>
-              <a:rPr lang="en-US" sz="900" noProof="0" dirty="0">
-                <a:latin typeface="Calibri"/>
-                <a:cs typeface="Calibri"/>
-              </a:rPr>
-              <a:t>deployed</a:t>
-            </a:r>
-            <a:r>
-              <a:rPr lang="en-US" sz="900" spc="-10" noProof="0" dirty="0">
-                <a:latin typeface="Calibri"/>
-                <a:cs typeface="Calibri"/>
-              </a:rPr>
-              <a:t> Worldwide</a:t>
-            </a:r>
-            <a:r>
-              <a:rPr lang="en-US" sz="900" spc="-25" noProof="0" dirty="0">
-                <a:latin typeface="Calibri"/>
-                <a:cs typeface="Calibri"/>
-              </a:rPr>
-              <a:t> </a:t>
-            </a:r>
-            <a:r>
-              <a:rPr lang="en-US" sz="900" noProof="0" dirty="0">
-                <a:latin typeface="Calibri"/>
-                <a:cs typeface="Calibri"/>
-              </a:rPr>
-              <a:t>using</a:t>
-            </a:r>
-            <a:r>
-              <a:rPr lang="en-US" sz="900" spc="-5" noProof="0" dirty="0">
-                <a:latin typeface="Calibri"/>
-                <a:cs typeface="Calibri"/>
-              </a:rPr>
-              <a:t> </a:t>
-            </a:r>
-            <a:r>
-              <a:rPr lang="en-US" sz="900" noProof="0" dirty="0">
-                <a:latin typeface="Calibri"/>
-                <a:cs typeface="Calibri"/>
-              </a:rPr>
-              <a:t>AWS</a:t>
-            </a:r>
-            <a:r>
-              <a:rPr lang="en-US" sz="900" spc="-30" noProof="0" dirty="0">
-                <a:latin typeface="Calibri"/>
-                <a:cs typeface="Calibri"/>
-              </a:rPr>
-              <a:t> </a:t>
-            </a:r>
-            <a:r>
-              <a:rPr lang="en-US" sz="900" spc="-10" noProof="0" dirty="0">
-                <a:latin typeface="Calibri"/>
-                <a:cs typeface="Calibri"/>
-              </a:rPr>
-              <a:t>Cloud - Serverless </a:t>
-            </a:r>
-            <a:r>
-              <a:rPr lang="en-US" sz="900" spc="-10" dirty="0">
-                <a:latin typeface="Calibri"/>
-                <a:cs typeface="Calibri"/>
-              </a:rPr>
-              <a:t>- </a:t>
-            </a:r>
-            <a:r>
-              <a:rPr lang="en-US" sz="900" spc="-10" noProof="0" dirty="0">
-                <a:latin typeface="Calibri"/>
-                <a:cs typeface="Calibri"/>
-              </a:rPr>
-              <a:t> Microservices - </a:t>
-            </a:r>
-            <a:r>
-              <a:rPr lang="en-US" sz="900" spc="-10" noProof="0" dirty="0" err="1">
-                <a:latin typeface="Calibri"/>
-                <a:cs typeface="Calibri"/>
-              </a:rPr>
-              <a:t>Scalabilty</a:t>
-            </a:r>
-            <a:r>
-              <a:rPr lang="en-US" sz="900" spc="-10" noProof="0" dirty="0">
-                <a:latin typeface="Calibri"/>
-                <a:cs typeface="Calibri"/>
-              </a:rPr>
-              <a:t>.  Infrastructure design/deployment. Interviewer</a:t>
-            </a:r>
-            <a:r>
-              <a:rPr lang="en-US" sz="900" spc="15" noProof="0" dirty="0">
-                <a:latin typeface="Calibri"/>
-                <a:cs typeface="Calibri"/>
-              </a:rPr>
-              <a:t> </a:t>
-            </a:r>
-            <a:r>
-              <a:rPr lang="en-US" sz="900" noProof="0" dirty="0">
-                <a:latin typeface="Calibri"/>
-                <a:cs typeface="Calibri"/>
-              </a:rPr>
-              <a:t>during</a:t>
-            </a:r>
-            <a:r>
-              <a:rPr lang="en-US" sz="900" spc="30" noProof="0" dirty="0">
-                <a:latin typeface="Calibri"/>
-                <a:cs typeface="Calibri"/>
-              </a:rPr>
-              <a:t> </a:t>
-            </a:r>
-            <a:r>
-              <a:rPr lang="en-US" sz="900" spc="-10" noProof="0" dirty="0">
-                <a:latin typeface="Calibri"/>
-                <a:cs typeface="Calibri"/>
-              </a:rPr>
-              <a:t>recruitment</a:t>
-            </a:r>
-            <a:r>
-              <a:rPr lang="en-US" sz="900" spc="30" noProof="0" dirty="0">
-                <a:latin typeface="Calibri"/>
-                <a:cs typeface="Calibri"/>
-              </a:rPr>
-              <a:t> </a:t>
-            </a:r>
-            <a:r>
-              <a:rPr lang="en-US" sz="900" spc="-10" noProof="0" dirty="0">
-                <a:latin typeface="Calibri"/>
-                <a:cs typeface="Calibri"/>
-              </a:rPr>
-              <a:t>processes…</a:t>
-            </a:r>
-            <a:r>
-              <a:rPr lang="en-US" sz="900" spc="-10" dirty="0">
-                <a:latin typeface="Calibri"/>
-                <a:cs typeface="Calibri"/>
-              </a:rPr>
-              <a:t> Expert in </a:t>
-            </a:r>
-            <a:r>
-              <a:rPr lang="en-US" sz="900" spc="-10" noProof="0" dirty="0">
-                <a:latin typeface="Calibri"/>
-                <a:cs typeface="Calibri"/>
-              </a:rPr>
-              <a:t>Cloud Computing (AWS) – CI/CD deployments</a:t>
-            </a:r>
-            <a:endParaRPr lang="en-US" sz="900" noProof="0" dirty="0">
-              <a:latin typeface="Calibri"/>
-              <a:cs typeface="Calibri"/>
-            </a:endParaRPr>
+              <a:t>Hands-on technical leader of a 5-engineer team. Built and ran high-traffic Amazon web applications deployed worldwide. Designed full-stack features, AWS serverless architectures, CI/CD pipelines, monitoring and production support. Interviewer and mentor during recruitment loops.</a:t>
+            </a:r>
           </a:p>
           <a:p>
             <a:pPr marL="177165">
@@ -9498,252 +6027,7 @@
                 <a:latin typeface="Calibri"/>
                 <a:cs typeface="Calibri"/>
               </a:rPr>
-              <a:t>Stack</a:t>
-            </a:r>
-            <a:r>
-              <a:rPr lang="en-US" sz="900" noProof="0" dirty="0">
-                <a:latin typeface="Calibri"/>
-                <a:cs typeface="Calibri"/>
-              </a:rPr>
-              <a:t>:</a:t>
-            </a:r>
-            <a:r>
-              <a:rPr lang="en-US" sz="900" spc="-10" noProof="0" dirty="0">
-                <a:latin typeface="Calibri"/>
-                <a:cs typeface="Calibri"/>
-              </a:rPr>
-              <a:t> </a:t>
-            </a:r>
-            <a:r>
-              <a:rPr lang="en-US" sz="900" noProof="0" dirty="0">
-                <a:latin typeface="Calibri"/>
-                <a:cs typeface="Calibri"/>
-              </a:rPr>
-              <a:t>Angular, React,</a:t>
-            </a:r>
-            <a:r>
-              <a:rPr lang="en-US" sz="900" spc="-10" noProof="0" dirty="0">
-                <a:latin typeface="Calibri"/>
-                <a:cs typeface="Calibri"/>
-              </a:rPr>
-              <a:t> </a:t>
-            </a:r>
-            <a:r>
-              <a:rPr lang="en-US" sz="900" noProof="0" dirty="0">
-                <a:latin typeface="Calibri"/>
-                <a:cs typeface="Calibri"/>
-              </a:rPr>
-              <a:t>Flask, </a:t>
-            </a:r>
-            <a:r>
-              <a:rPr lang="en-US" sz="900" spc="-10" noProof="0" dirty="0">
-                <a:latin typeface="Calibri"/>
-                <a:cs typeface="Calibri"/>
-              </a:rPr>
-              <a:t>Python,</a:t>
-            </a:r>
-            <a:r>
-              <a:rPr lang="en-US" sz="900" spc="-20" noProof="0" dirty="0">
-                <a:latin typeface="Calibri"/>
-                <a:cs typeface="Calibri"/>
-              </a:rPr>
-              <a:t> </a:t>
-            </a:r>
-            <a:r>
-              <a:rPr lang="en-US" sz="900" noProof="0" dirty="0">
-                <a:latin typeface="Calibri"/>
-                <a:cs typeface="Calibri"/>
-              </a:rPr>
-              <a:t>Bootstrap,</a:t>
-            </a:r>
-            <a:r>
-              <a:rPr lang="en-US" sz="900" spc="-10" noProof="0" dirty="0">
-                <a:latin typeface="Calibri"/>
-                <a:cs typeface="Calibri"/>
-              </a:rPr>
-              <a:t> </a:t>
-            </a:r>
-            <a:r>
-              <a:rPr lang="en-US" sz="900" noProof="0" dirty="0">
-                <a:latin typeface="Calibri"/>
-                <a:cs typeface="Calibri"/>
-              </a:rPr>
-              <a:t>SASS,</a:t>
-            </a:r>
-            <a:r>
-              <a:rPr lang="en-US" sz="900" spc="-5" noProof="0" dirty="0">
-                <a:latin typeface="Calibri"/>
-                <a:cs typeface="Calibri"/>
-              </a:rPr>
-              <a:t> </a:t>
-            </a:r>
-            <a:r>
-              <a:rPr lang="en-US" sz="900" spc="-10" noProof="0" dirty="0">
-                <a:latin typeface="Calibri"/>
-                <a:cs typeface="Calibri"/>
-              </a:rPr>
-              <a:t>PostgreSQL, DynamoDB TypeScript, Photoshop. </a:t>
-            </a:r>
-            <a:r>
-              <a:rPr lang="en-US" sz="900" noProof="0" dirty="0">
-                <a:latin typeface="Calibri"/>
-                <a:cs typeface="Calibri"/>
-              </a:rPr>
-              <a:t>AWS</a:t>
-            </a:r>
-            <a:r>
-              <a:rPr lang="en-US" sz="900" spc="-15" noProof="0" dirty="0">
-                <a:latin typeface="Calibri"/>
-                <a:cs typeface="Calibri"/>
-              </a:rPr>
-              <a:t> </a:t>
-            </a:r>
-            <a:r>
-              <a:rPr lang="en-US" sz="900" noProof="0" dirty="0">
-                <a:latin typeface="Calibri"/>
-                <a:cs typeface="Calibri"/>
-              </a:rPr>
-              <a:t>Services:</a:t>
-            </a:r>
-            <a:r>
-              <a:rPr lang="en-US" sz="900" spc="5" noProof="0" dirty="0">
-                <a:latin typeface="Calibri"/>
-                <a:cs typeface="Calibri"/>
-              </a:rPr>
-              <a:t> </a:t>
-            </a:r>
-            <a:r>
-              <a:rPr lang="en-US" sz="900" noProof="0" dirty="0">
-                <a:latin typeface="Calibri"/>
-                <a:cs typeface="Calibri"/>
-              </a:rPr>
-              <a:t>CloudWatch,</a:t>
-            </a:r>
-            <a:r>
-              <a:rPr lang="en-US" sz="900" spc="-15" noProof="0" dirty="0">
-                <a:latin typeface="Calibri"/>
-                <a:cs typeface="Calibri"/>
-              </a:rPr>
-              <a:t> </a:t>
-            </a:r>
-            <a:r>
-              <a:rPr lang="en-US" sz="900" noProof="0" dirty="0">
-                <a:latin typeface="Calibri"/>
-                <a:cs typeface="Calibri"/>
-              </a:rPr>
-              <a:t>Lambda,</a:t>
-            </a:r>
-            <a:r>
-              <a:rPr lang="en-US" sz="900" spc="-15" noProof="0" dirty="0">
-                <a:latin typeface="Calibri"/>
-                <a:cs typeface="Calibri"/>
-              </a:rPr>
-              <a:t> </a:t>
-            </a:r>
-            <a:r>
-              <a:rPr lang="en-US" sz="900" noProof="0" dirty="0">
-                <a:latin typeface="Calibri"/>
-                <a:cs typeface="Calibri"/>
-              </a:rPr>
-              <a:t>API</a:t>
-            </a:r>
-            <a:r>
-              <a:rPr lang="en-US" sz="900" spc="-10" noProof="0" dirty="0">
-                <a:latin typeface="Calibri"/>
-                <a:cs typeface="Calibri"/>
-              </a:rPr>
-              <a:t> </a:t>
-            </a:r>
-            <a:r>
-              <a:rPr lang="en-US" sz="900" noProof="0" dirty="0">
-                <a:latin typeface="Calibri"/>
-                <a:cs typeface="Calibri"/>
-              </a:rPr>
-              <a:t>Gateway,</a:t>
-            </a:r>
-            <a:r>
-              <a:rPr lang="en-US" sz="900" spc="-15" noProof="0" dirty="0">
-                <a:latin typeface="Calibri"/>
-                <a:cs typeface="Calibri"/>
-              </a:rPr>
-              <a:t> </a:t>
-            </a:r>
-            <a:r>
-              <a:rPr lang="en-US" sz="900" noProof="0" dirty="0">
-                <a:latin typeface="Calibri"/>
-                <a:cs typeface="Calibri"/>
-              </a:rPr>
-              <a:t>Athena,</a:t>
-            </a:r>
-            <a:r>
-              <a:rPr lang="en-US" sz="900" spc="10" noProof="0" dirty="0">
-                <a:latin typeface="Calibri"/>
-                <a:cs typeface="Calibri"/>
-              </a:rPr>
-              <a:t> </a:t>
-            </a:r>
-            <a:r>
-              <a:rPr lang="en-US" sz="900" spc="-10" noProof="0" dirty="0" err="1">
-                <a:latin typeface="Calibri"/>
-                <a:cs typeface="Calibri"/>
-              </a:rPr>
-              <a:t>QuickSight</a:t>
-            </a:r>
-            <a:r>
-              <a:rPr lang="en-US" sz="900" spc="-10" noProof="0" dirty="0">
-                <a:latin typeface="Calibri"/>
-                <a:cs typeface="Calibri"/>
-              </a:rPr>
-              <a:t>,</a:t>
-            </a:r>
-            <a:r>
-              <a:rPr lang="en-US" sz="900" spc="10" noProof="0" dirty="0">
-                <a:latin typeface="Calibri"/>
-                <a:cs typeface="Calibri"/>
-              </a:rPr>
-              <a:t> </a:t>
-            </a:r>
-            <a:r>
-              <a:rPr lang="en-US" sz="900" spc="-20" noProof="0" dirty="0">
-                <a:latin typeface="Calibri"/>
-                <a:cs typeface="Calibri"/>
-              </a:rPr>
-              <a:t>SES, </a:t>
-            </a:r>
-            <a:r>
-              <a:rPr lang="en-US" sz="900" noProof="0" dirty="0">
-                <a:latin typeface="Calibri"/>
-                <a:cs typeface="Calibri"/>
-              </a:rPr>
-              <a:t>SNS,</a:t>
-            </a:r>
-            <a:r>
-              <a:rPr lang="en-US" sz="900" spc="5" noProof="0" dirty="0">
-                <a:latin typeface="Calibri"/>
-                <a:cs typeface="Calibri"/>
-              </a:rPr>
-              <a:t> SQS, </a:t>
-            </a:r>
-            <a:r>
-              <a:rPr lang="en-US" sz="900" spc="-10" noProof="0" dirty="0">
-                <a:latin typeface="Calibri"/>
-                <a:cs typeface="Calibri"/>
-              </a:rPr>
-              <a:t>DynamoDB, </a:t>
-            </a:r>
-            <a:r>
-              <a:rPr lang="en-US" sz="900" noProof="0" dirty="0">
-                <a:latin typeface="Calibri"/>
-                <a:cs typeface="Calibri"/>
-              </a:rPr>
-              <a:t>RDS, </a:t>
-            </a:r>
-            <a:r>
-              <a:rPr lang="en-US" sz="900" spc="-10" noProof="0" dirty="0">
-                <a:latin typeface="Calibri"/>
-                <a:cs typeface="Calibri"/>
-              </a:rPr>
-              <a:t>EC2...</a:t>
+              <a:t>Stack: React, Angular, TypeScript, Python, Flask, PostgreSQL, DynamoDB. AWS: Lambda, API Gateway, CloudWatch, SNS, SQS, DynamoDB, RDS, EC2, Athena, QuickSight...</a:t>
             </a:r>
             <a:endParaRPr lang="en-US" sz="900" noProof="0" dirty="0">
               <a:latin typeface="Calibri"/>
@@ -9800,7 +6084,7 @@
                 <a:latin typeface="Calibri"/>
                 <a:cs typeface="Calibri"/>
               </a:rPr>
-              <a:t>ENGINEER SQUAD LEADER</a:t>
+              <a:t>HANDS-ON ENGINEERING SQUAD LEAD</a:t>
             </a:r>
             <a:endParaRPr lang="en-US" sz="1100" noProof="0" dirty="0">
               <a:latin typeface="Calibri"/>
@@ -9821,33 +6105,8 @@
                 <a:latin typeface="Calibri"/>
                 <a:cs typeface="Calibri"/>
               </a:rPr>
-              <a:t>KINGFISHER|</a:t>
-            </a:r>
-            <a:r>
-              <a:rPr lang="en-US" sz="1400" spc="-55" noProof="0" dirty="0">
-                <a:latin typeface="Calibri"/>
-                <a:cs typeface="Calibri"/>
-              </a:rPr>
-              <a:t> </a:t>
-            </a:r>
-            <a:r>
-              <a:rPr lang="en-US" sz="1400" noProof="0" dirty="0">
-                <a:latin typeface="Calibri"/>
-                <a:cs typeface="Calibri"/>
-              </a:rPr>
-              <a:t>Dec</a:t>
-            </a:r>
-            <a:r>
-              <a:rPr lang="en-US" sz="1400" spc="-50" noProof="0" dirty="0">
-                <a:latin typeface="Calibri"/>
-                <a:cs typeface="Calibri"/>
-              </a:rPr>
-              <a:t> 2025</a:t>
-            </a:r>
-            <a:endParaRPr lang="en-US" sz="1400" noProof="0" dirty="0">
-              <a:latin typeface="Calibri"/>
-              <a:cs typeface="Calibri"/>
-            </a:endParaRPr>
+              <a:t>KINGFISHER | 2026 to present</a:t>
+            </a:r>
           </a:p>
           <a:p>
             <a:pPr marL="177165" marR="269240">
@@ -9863,63 +6122,24 @@
                 <a:latin typeface="Calibri"/>
                 <a:cs typeface="Calibri"/>
               </a:rPr>
-              <a:t>Technical</a:t>
-            </a:r>
-            <a:r>
-              <a:rPr lang="en-US" sz="900" spc="-20" noProof="0" dirty="0">
+              <a:t>Hands-on leader of a 7-engineer squad. Coaching, technical decision-making, code reviews and delivery ownership for a large-scale digital platform. Focus on full-stack delivery, developer experience, CI/CD, observability and production reliability.</a:t>
+            </a:r>
+          </a:p>
+          <a:p>
+            <a:pPr marL="177165" marR="269240">
+              <a:lnSpc>
+                <a:spcPct val="101099"/>
+              </a:lnSpc>
+              <a:spcBef>
+                <a:spcPts val="45"/>
+              </a:spcBef>
+            </a:pPr>
+            <a:r>
+              <a:rPr lang="en-US" sz="900" i="1" noProof="0" dirty="0">
                 <a:latin typeface="Calibri"/>
                 <a:cs typeface="Calibri"/>
               </a:rPr>
-              <a:t> </a:t>
-            </a:r>
-            <a:r>
-              <a:rPr lang="en-US" sz="900" noProof="0" dirty="0">
-                <a:latin typeface="Calibri"/>
-                <a:cs typeface="Calibri"/>
-              </a:rPr>
-              <a:t>leader/manager</a:t>
-            </a:r>
-            <a:r>
-              <a:rPr lang="en-US" sz="900" spc="5" noProof="0" dirty="0">
-                <a:latin typeface="Calibri"/>
-                <a:cs typeface="Calibri"/>
-              </a:rPr>
-              <a:t> </a:t>
-            </a:r>
-            <a:r>
-              <a:rPr lang="en-US" sz="900" noProof="0" dirty="0">
-                <a:latin typeface="Calibri"/>
-                <a:cs typeface="Calibri"/>
-              </a:rPr>
-              <a:t>of</a:t>
-            </a:r>
-            <a:r>
-              <a:rPr lang="en-US" sz="900" spc="-30" noProof="0" dirty="0">
-                <a:latin typeface="Calibri"/>
-                <a:cs typeface="Calibri"/>
-              </a:rPr>
-              <a:t> a </a:t>
-            </a:r>
-            <a:r>
-              <a:rPr lang="en-US" sz="900" noProof="0" dirty="0">
-                <a:latin typeface="Calibri"/>
-                <a:cs typeface="Calibri"/>
-              </a:rPr>
-              <a:t>4 developers' team. Mentoring, coaching, t</a:t>
-            </a:r>
-            <a:r>
-              <a:rPr lang="en-US" sz="900" dirty="0" err="1">
-                <a:latin typeface="Calibri"/>
-                <a:cs typeface="Calibri"/>
-              </a:rPr>
-              <a:t>eam</a:t>
-            </a:r>
-            <a:r>
-              <a:rPr lang="en-US" sz="900" dirty="0">
-                <a:latin typeface="Calibri"/>
-                <a:cs typeface="Calibri"/>
-              </a:rPr>
-              <a:t> building, recruitment loops, best practices of Agile methodologies… In charge of maintenance/evolution of the future Brico Depot e-commerce (100M€ annum). </a:t>
+              <a:t>Stack: Vue, TypeScript, Tailwind, Alokai, Node.js, MySQL, AWS, GitLab CI, Terraform, Jira, Confluence, Datadog, New Relic...</a:t>
             </a:r>
             <a:endParaRPr lang="en-US" sz="900" noProof="0" dirty="0">
               <a:latin typeface="Calibri"/>
@@ -9935,104 +6155,6 @@
                 <a:spcPts val="45"/>
               </a:spcBef>
             </a:pPr>
-            <a:r>
-              <a:rPr lang="en-US" sz="900" i="1" noProof="0" dirty="0">
-                <a:latin typeface="Calibri"/>
-                <a:cs typeface="Calibri"/>
-              </a:rPr>
-              <a:t>Stack</a:t>
-            </a:r>
-            <a:r>
-              <a:rPr lang="en-US" sz="900" noProof="0" dirty="0">
-                <a:latin typeface="Calibri"/>
-                <a:cs typeface="Calibri"/>
-              </a:rPr>
-              <a:t>:</a:t>
-            </a:r>
-            <a:r>
-              <a:rPr lang="en-US" sz="900" spc="-10" noProof="0" dirty="0">
-                <a:latin typeface="Calibri"/>
-                <a:cs typeface="Calibri"/>
-              </a:rPr>
-              <a:t> </a:t>
-            </a:r>
-            <a:r>
-              <a:rPr lang="en-US" sz="900" noProof="0" dirty="0">
-                <a:latin typeface="Calibri"/>
-                <a:cs typeface="Calibri"/>
-              </a:rPr>
-              <a:t>Vue, Tailwind, </a:t>
-            </a:r>
-            <a:r>
-              <a:rPr lang="en-US" sz="900" noProof="0" dirty="0" err="1">
-                <a:latin typeface="Calibri"/>
-                <a:cs typeface="Calibri"/>
-              </a:rPr>
-              <a:t>Alokai</a:t>
-            </a:r>
-            <a:r>
-              <a:rPr lang="en-US" sz="900" noProof="0" dirty="0">
-                <a:latin typeface="Calibri"/>
-                <a:cs typeface="Calibri"/>
-              </a:rPr>
-              <a:t> (Headless CMS), Magento,</a:t>
-            </a:r>
-            <a:r>
-              <a:rPr lang="en-US" sz="900" spc="-10" noProof="0" dirty="0">
-                <a:latin typeface="Calibri"/>
-                <a:cs typeface="Calibri"/>
-              </a:rPr>
-              <a:t> </a:t>
-            </a:r>
-            <a:r>
-              <a:rPr lang="en-US" sz="900" noProof="0" dirty="0">
-                <a:latin typeface="Calibri"/>
-                <a:cs typeface="Calibri"/>
-              </a:rPr>
-              <a:t>My</a:t>
-            </a:r>
-            <a:r>
-              <a:rPr lang="en-US" sz="900" spc="-10" noProof="0" dirty="0">
-                <a:latin typeface="Calibri"/>
-                <a:cs typeface="Calibri"/>
-              </a:rPr>
-              <a:t>SQL, </a:t>
-            </a:r>
-            <a:r>
-              <a:rPr lang="en-US" sz="900" noProof="0" dirty="0">
-                <a:latin typeface="Calibri"/>
-                <a:cs typeface="Calibri"/>
-              </a:rPr>
-              <a:t>AWS, GitLab CI, Jira, confluence, Terraform</a:t>
-            </a:r>
-            <a:r>
-              <a:rPr lang="en-US" sz="900" spc="-10" noProof="0" dirty="0">
-                <a:latin typeface="Calibri"/>
-                <a:cs typeface="Calibri"/>
-              </a:rPr>
-              <a:t>...</a:t>
-            </a:r>
-            <a:endParaRPr lang="en-US" sz="900" noProof="0" dirty="0">
-              <a:latin typeface="Calibri"/>
-              <a:cs typeface="Calibri"/>
-            </a:endParaRPr>
-          </a:p>
-          <a:p>
-            <a:pPr marL="177165" marR="269240">
-              <a:lnSpc>
-                <a:spcPct val="101099"/>
-              </a:lnSpc>
-              <a:spcBef>
-                <a:spcPts val="45"/>
-              </a:spcBef>
-            </a:pPr>
-            <a:r>
-              <a:rPr lang="en-US" sz="900" spc="-15" noProof="0" dirty="0">
-                <a:latin typeface="Calibri"/>
-                <a:cs typeface="Calibri"/>
-              </a:rPr>
-              <a:t> </a:t>
-            </a:r>
             <a:endParaRPr lang="en-US" sz="900" noProof="0" dirty="0">
               <a:latin typeface="Calibri"/>
               <a:cs typeface="Calibri"/>
@@ -10040,6 +6162,34 @@
           </a:p>
         </p:txBody>
       </p:sp>
+      <p:pic>
+        <p:nvPicPr>
+          <p:cNvPr id="41" name="object 75">
+            <a:extLst>
+              <a:ext uri="{FF2B5EF4-FFF2-40B4-BE49-F238E27FC236}">
+                <a16:creationId xmlns:a16="http://schemas.microsoft.com/office/drawing/2014/main" id="{6D6303AC-A78D-2E8E-F52F-98081CF84EAA}"/>
+              </a:ext>
+            </a:extLst>
+          </p:cNvPr>
+          <p:cNvPicPr/>
+          <p:nvPr/>
+        </p:nvPicPr>
+        <p:blipFill>
+          <a:blip r:embed="rId14" cstate="print"/>
+          <a:stretch>
+            <a:fillRect/>
+          </a:stretch>
+        </p:blipFill>
+        <p:spPr>
+          <a:xfrm>
+            <a:off x="1230502" y="6781927"/>
+            <a:ext cx="217932" cy="216407"/>
+          </a:xfrm>
+          <a:prstGeom prst="rect">
+            <a:avLst/>
+          </a:prstGeom>
+        </p:spPr>
+      </p:pic>
     </p:spTree>
   </p:cSld>
   <p:clrMapOvr>
@@ -10143,34 +6293,7 @@
                 <a:latin typeface="Calibri"/>
                 <a:cs typeface="Calibri"/>
               </a:rPr>
-              <a:t>AWS AI Practitioner</a:t>
-            </a:r>
-            <a:r>
-              <a:rPr lang="en-US" sz="1100" b="1" noProof="0" dirty="0">
-                <a:solidFill>
-                  <a:srgbClr val="09172C"/>
-                </a:solidFill>
-                <a:latin typeface="Calibri"/>
-                <a:cs typeface="Calibri"/>
-              </a:rPr>
-              <a:t>|</a:t>
-            </a:r>
-            <a:r>
-              <a:rPr lang="en-US" sz="1100" b="1" spc="-20" noProof="0" dirty="0">
-                <a:solidFill>
-                  <a:srgbClr val="09172C"/>
-                </a:solidFill>
-                <a:latin typeface="Calibri"/>
-                <a:cs typeface="Calibri"/>
-              </a:rPr>
-              <a:t> </a:t>
-            </a:r>
-            <a:r>
-              <a:rPr lang="en-US" sz="1100" spc="-20" noProof="0" dirty="0">
-                <a:latin typeface="Calibri"/>
-                <a:cs typeface="Calibri"/>
-              </a:rPr>
-              <a:t>2025</a:t>
+              <a:t>AWS AI Practitioner | 2025</a:t>
             </a:r>
           </a:p>
           <a:p>
@@ -10201,34 +6324,7 @@
                 <a:latin typeface="Calibri"/>
                 <a:cs typeface="Calibri"/>
               </a:rPr>
-              <a:t>AWS Solutions Architect Associate </a:t>
-            </a:r>
-            <a:r>
-              <a:rPr lang="en-US" sz="1100" b="1" noProof="0" dirty="0">
-                <a:solidFill>
-                  <a:srgbClr val="09172C"/>
-                </a:solidFill>
-                <a:latin typeface="Calibri"/>
-                <a:cs typeface="Calibri"/>
-              </a:rPr>
-              <a:t>|</a:t>
-            </a:r>
-            <a:r>
-              <a:rPr lang="en-US" sz="1100" b="1" spc="-20" noProof="0" dirty="0">
-                <a:solidFill>
-                  <a:srgbClr val="09172C"/>
-                </a:solidFill>
-                <a:latin typeface="Calibri"/>
-                <a:cs typeface="Calibri"/>
-              </a:rPr>
-              <a:t> </a:t>
-            </a:r>
-            <a:r>
-              <a:rPr lang="en-US" sz="1100" spc="-20" noProof="0" dirty="0">
-                <a:latin typeface="Calibri"/>
-                <a:cs typeface="Calibri"/>
-              </a:rPr>
-              <a:t>2024</a:t>
+              <a:t>AWS Solutions Architect Associate | 2024</a:t>
             </a:r>
           </a:p>
           <a:p>
@@ -10259,84 +6355,7 @@
                 <a:latin typeface="Calibri"/>
                 <a:cs typeface="Calibri"/>
               </a:rPr>
-              <a:t>AWS</a:t>
-            </a:r>
-            <a:r>
-              <a:rPr lang="en-US" sz="1400" b="1" spc="-20" noProof="0" dirty="0">
-                <a:solidFill>
-                  <a:srgbClr val="3A6278"/>
-                </a:solidFill>
-                <a:latin typeface="Calibri"/>
-                <a:cs typeface="Calibri"/>
-              </a:rPr>
-              <a:t> </a:t>
-            </a:r>
-            <a:r>
-              <a:rPr lang="en-US" sz="1400" b="1" noProof="0" dirty="0">
-                <a:solidFill>
-                  <a:srgbClr val="3A6278"/>
-                </a:solidFill>
-                <a:latin typeface="Calibri"/>
-                <a:cs typeface="Calibri"/>
-              </a:rPr>
-              <a:t>Certified</a:t>
-            </a:r>
-            <a:r>
-              <a:rPr lang="en-US" sz="1400" b="1" spc="-30" noProof="0" dirty="0">
-                <a:solidFill>
-                  <a:srgbClr val="3A6278"/>
-                </a:solidFill>
-                <a:latin typeface="Calibri"/>
-                <a:cs typeface="Calibri"/>
-              </a:rPr>
-              <a:t> </a:t>
-            </a:r>
-            <a:r>
-              <a:rPr lang="en-US" sz="1400" b="1" noProof="0" dirty="0">
-                <a:solidFill>
-                  <a:srgbClr val="3A6278"/>
-                </a:solidFill>
-                <a:latin typeface="Calibri"/>
-                <a:cs typeface="Calibri"/>
-              </a:rPr>
-              <a:t>Developer</a:t>
-            </a:r>
-            <a:r>
-              <a:rPr lang="en-US" sz="1400" b="1" spc="-10" noProof="0" dirty="0">
-                <a:solidFill>
-                  <a:srgbClr val="3A6278"/>
-                </a:solidFill>
-                <a:latin typeface="Calibri"/>
-                <a:cs typeface="Calibri"/>
-              </a:rPr>
-              <a:t> </a:t>
-            </a:r>
-            <a:r>
-              <a:rPr lang="en-US" sz="1100" b="1" noProof="0" dirty="0">
-                <a:solidFill>
-                  <a:srgbClr val="09172C"/>
-                </a:solidFill>
-                <a:latin typeface="Calibri"/>
-                <a:cs typeface="Calibri"/>
-              </a:rPr>
-              <a:t>|</a:t>
-            </a:r>
-            <a:r>
-              <a:rPr lang="en-US" sz="1100" b="1" spc="-20" noProof="0" dirty="0">
-                <a:solidFill>
-                  <a:srgbClr val="09172C"/>
-                </a:solidFill>
-                <a:latin typeface="Calibri"/>
-                <a:cs typeface="Calibri"/>
-              </a:rPr>
-              <a:t> </a:t>
-            </a:r>
-            <a:r>
-              <a:rPr lang="en-US" sz="1100" spc="-20" noProof="0" dirty="0">
-                <a:latin typeface="Calibri"/>
-                <a:cs typeface="Calibri"/>
-              </a:rPr>
-              <a:t>2020</a:t>
+              <a:t>AWS Certified Developer | 2020</a:t>
             </a:r>
             <a:endParaRPr lang="en-US" sz="1100" noProof="0" dirty="0">
               <a:latin typeface="Calibri"/>
@@ -10360,84 +6379,7 @@
                 <a:latin typeface="Calibri"/>
                 <a:cs typeface="Calibri"/>
               </a:rPr>
-              <a:t>AWS</a:t>
-            </a:r>
-            <a:r>
-              <a:rPr lang="en-US" sz="1100" b="1" spc="-30" noProof="0" dirty="0">
-                <a:solidFill>
-                  <a:srgbClr val="3A6278"/>
-                </a:solidFill>
-                <a:latin typeface="Calibri"/>
-                <a:cs typeface="Calibri"/>
-              </a:rPr>
-              <a:t> </a:t>
-            </a:r>
-            <a:r>
-              <a:rPr lang="en-US" sz="1100" b="1" noProof="0" dirty="0">
-                <a:solidFill>
-                  <a:srgbClr val="3A6278"/>
-                </a:solidFill>
-                <a:latin typeface="Calibri"/>
-                <a:cs typeface="Calibri"/>
-              </a:rPr>
-              <a:t>Cloud</a:t>
-            </a:r>
-            <a:r>
-              <a:rPr lang="en-US" sz="1100" b="1" spc="-30" noProof="0" dirty="0">
-                <a:solidFill>
-                  <a:srgbClr val="3A6278"/>
-                </a:solidFill>
-                <a:latin typeface="Calibri"/>
-                <a:cs typeface="Calibri"/>
-              </a:rPr>
-              <a:t> </a:t>
-            </a:r>
-            <a:r>
-              <a:rPr lang="en-US" sz="1100" b="1" noProof="0" dirty="0">
-                <a:solidFill>
-                  <a:srgbClr val="3A6278"/>
-                </a:solidFill>
-                <a:latin typeface="Calibri"/>
-                <a:cs typeface="Calibri"/>
-              </a:rPr>
-              <a:t>Practitioner</a:t>
-            </a:r>
-            <a:r>
-              <a:rPr lang="en-US" sz="1100" b="1" spc="-25" noProof="0" dirty="0">
-                <a:solidFill>
-                  <a:srgbClr val="3A6278"/>
-                </a:solidFill>
-                <a:latin typeface="Calibri"/>
-                <a:cs typeface="Calibri"/>
-              </a:rPr>
-              <a:t> </a:t>
-            </a:r>
-            <a:r>
-              <a:rPr lang="en-US" sz="1100" b="1" noProof="0" dirty="0">
-                <a:solidFill>
-                  <a:srgbClr val="09172C"/>
-                </a:solidFill>
-                <a:latin typeface="Calibri"/>
-                <a:cs typeface="Calibri"/>
-              </a:rPr>
-              <a:t>|</a:t>
-            </a:r>
-            <a:r>
-              <a:rPr lang="en-US" sz="1100" b="1" spc="-20" noProof="0" dirty="0">
-                <a:solidFill>
-                  <a:srgbClr val="09172C"/>
-                </a:solidFill>
-                <a:latin typeface="Calibri"/>
-                <a:cs typeface="Calibri"/>
-              </a:rPr>
-              <a:t> </a:t>
-            </a:r>
-            <a:r>
-              <a:rPr lang="en-US" sz="1100" spc="-20" noProof="0" dirty="0">
-                <a:latin typeface="Calibri"/>
-                <a:cs typeface="Calibri"/>
-              </a:rPr>
-              <a:t>2020 &amp; 2024</a:t>
+              <a:t>AWS Cloud Practitioner | 2020 &amp; 2024</a:t>
             </a:r>
             <a:endParaRPr lang="en-US" sz="1100" noProof="0" dirty="0">
               <a:latin typeface="Calibri"/>
@@ -10461,144 +6403,7 @@
                 <a:latin typeface="Calibri"/>
                 <a:cs typeface="Calibri"/>
               </a:rPr>
-              <a:t>Professional</a:t>
-            </a:r>
-            <a:r>
-              <a:rPr lang="en-US" sz="1100" b="1" spc="-25" noProof="0" dirty="0">
-                <a:solidFill>
-                  <a:srgbClr val="3A6278"/>
-                </a:solidFill>
-                <a:latin typeface="Calibri"/>
-                <a:cs typeface="Calibri"/>
-              </a:rPr>
-              <a:t> </a:t>
-            </a:r>
-            <a:r>
-              <a:rPr lang="en-US" sz="1100" b="1" noProof="0" dirty="0">
-                <a:solidFill>
-                  <a:srgbClr val="3A6278"/>
-                </a:solidFill>
-                <a:latin typeface="Calibri"/>
-                <a:cs typeface="Calibri"/>
-              </a:rPr>
-              <a:t>Scrum</a:t>
-            </a:r>
-            <a:r>
-              <a:rPr lang="en-US" sz="1100" b="1" spc="-10" noProof="0" dirty="0">
-                <a:solidFill>
-                  <a:srgbClr val="3A6278"/>
-                </a:solidFill>
-                <a:latin typeface="Calibri"/>
-                <a:cs typeface="Calibri"/>
-              </a:rPr>
-              <a:t> </a:t>
-            </a:r>
-            <a:r>
-              <a:rPr lang="en-US" sz="1100" b="1" noProof="0" dirty="0">
-                <a:solidFill>
-                  <a:srgbClr val="3A6278"/>
-                </a:solidFill>
-                <a:latin typeface="Calibri"/>
-                <a:cs typeface="Calibri"/>
-              </a:rPr>
-              <a:t>Master</a:t>
-            </a:r>
-            <a:r>
-              <a:rPr lang="en-US" sz="1100" b="1" spc="-10" noProof="0" dirty="0">
-                <a:solidFill>
-                  <a:srgbClr val="3A6278"/>
-                </a:solidFill>
-                <a:latin typeface="Calibri"/>
-                <a:cs typeface="Calibri"/>
-              </a:rPr>
-              <a:t> </a:t>
-            </a:r>
-            <a:r>
-              <a:rPr lang="en-US" sz="1100" b="1" noProof="0" dirty="0">
-                <a:solidFill>
-                  <a:srgbClr val="3A6278"/>
-                </a:solidFill>
-                <a:latin typeface="Calibri"/>
-                <a:cs typeface="Calibri"/>
-              </a:rPr>
-              <a:t>1</a:t>
-            </a:r>
-            <a:r>
-              <a:rPr lang="en-US" sz="1100" b="1" spc="20" noProof="0" dirty="0">
-                <a:solidFill>
-                  <a:srgbClr val="3A6278"/>
-                </a:solidFill>
-                <a:latin typeface="Calibri"/>
-                <a:cs typeface="Calibri"/>
-              </a:rPr>
-              <a:t> </a:t>
-            </a:r>
-            <a:r>
-              <a:rPr lang="en-US" sz="1100" b="1" noProof="0" dirty="0">
-                <a:solidFill>
-                  <a:srgbClr val="09172C"/>
-                </a:solidFill>
-                <a:latin typeface="Calibri"/>
-                <a:cs typeface="Calibri"/>
-              </a:rPr>
-              <a:t>|</a:t>
-            </a:r>
-            <a:r>
-              <a:rPr lang="en-US" sz="1100" b="1" spc="-10" noProof="0" dirty="0">
-                <a:solidFill>
-                  <a:srgbClr val="09172C"/>
-                </a:solidFill>
-                <a:latin typeface="Calibri"/>
-                <a:cs typeface="Calibri"/>
-              </a:rPr>
-              <a:t> </a:t>
-            </a:r>
-            <a:r>
-              <a:rPr lang="en-US" sz="1100" noProof="0" dirty="0">
-                <a:solidFill>
-                  <a:srgbClr val="09172C"/>
-                </a:solidFill>
-                <a:latin typeface="Calibri"/>
-                <a:cs typeface="Calibri"/>
-              </a:rPr>
-              <a:t>Scrum.org</a:t>
-            </a:r>
-            <a:r>
-              <a:rPr lang="en-US" sz="1100" spc="-30" noProof="0" dirty="0">
-                <a:solidFill>
-                  <a:srgbClr val="09172C"/>
-                </a:solidFill>
-                <a:latin typeface="Calibri"/>
-                <a:cs typeface="Calibri"/>
-              </a:rPr>
-              <a:t> </a:t>
-            </a:r>
-            <a:r>
-              <a:rPr lang="en-US" sz="1100" b="1" noProof="0" dirty="0">
-                <a:solidFill>
-                  <a:srgbClr val="09172C"/>
-                </a:solidFill>
-                <a:latin typeface="Calibri"/>
-                <a:cs typeface="Calibri"/>
-              </a:rPr>
-              <a:t>|</a:t>
-            </a:r>
-            <a:r>
-              <a:rPr lang="en-US" sz="1100" b="1" spc="5" noProof="0" dirty="0">
-                <a:solidFill>
-                  <a:srgbClr val="09172C"/>
-                </a:solidFill>
-                <a:latin typeface="Calibri"/>
-                <a:cs typeface="Calibri"/>
-              </a:rPr>
-              <a:t> </a:t>
-            </a:r>
-            <a:r>
-              <a:rPr lang="en-US" sz="1100" spc="-20" noProof="0" dirty="0">
-                <a:latin typeface="Calibri"/>
-                <a:cs typeface="Calibri"/>
-              </a:rPr>
-              <a:t>2019</a:t>
+              <a:t>Professional Scrum Master 1 | Scrum.org | 2019</a:t>
             </a:r>
             <a:endParaRPr lang="en-US" sz="1100" noProof="0" dirty="0">
               <a:latin typeface="Calibri"/>
@@ -10622,154 +6427,7 @@
                 <a:latin typeface="Calibri"/>
                 <a:cs typeface="Calibri"/>
               </a:rPr>
-              <a:t>Professional</a:t>
-            </a:r>
-            <a:r>
-              <a:rPr lang="en-US" sz="1100" b="1" spc="-25" noProof="0" dirty="0">
-                <a:solidFill>
-                  <a:srgbClr val="3A6278"/>
-                </a:solidFill>
-                <a:latin typeface="Calibri"/>
-                <a:cs typeface="Calibri"/>
-              </a:rPr>
-              <a:t> </a:t>
-            </a:r>
-            <a:r>
-              <a:rPr lang="en-US" sz="1100" b="1" noProof="0" dirty="0">
-                <a:solidFill>
-                  <a:srgbClr val="3A6278"/>
-                </a:solidFill>
-                <a:latin typeface="Calibri"/>
-                <a:cs typeface="Calibri"/>
-              </a:rPr>
-              <a:t>Scrum</a:t>
-            </a:r>
-            <a:r>
-              <a:rPr lang="en-US" sz="1100" b="1" spc="-15" noProof="0" dirty="0">
-                <a:solidFill>
-                  <a:srgbClr val="3A6278"/>
-                </a:solidFill>
-                <a:latin typeface="Calibri"/>
-                <a:cs typeface="Calibri"/>
-              </a:rPr>
-              <a:t> </a:t>
-            </a:r>
-            <a:r>
-              <a:rPr lang="en-US" sz="1100" b="1" noProof="0" dirty="0">
-                <a:solidFill>
-                  <a:srgbClr val="3A6278"/>
-                </a:solidFill>
-                <a:latin typeface="Calibri"/>
-                <a:cs typeface="Calibri"/>
-              </a:rPr>
-              <a:t>Product</a:t>
-            </a:r>
-            <a:r>
-              <a:rPr lang="en-US" sz="1100" b="1" spc="-15" noProof="0" dirty="0">
-                <a:solidFill>
-                  <a:srgbClr val="3A6278"/>
-                </a:solidFill>
-                <a:latin typeface="Calibri"/>
-                <a:cs typeface="Calibri"/>
-              </a:rPr>
-              <a:t> </a:t>
-            </a:r>
-            <a:r>
-              <a:rPr lang="en-US" sz="1100" b="1" noProof="0" dirty="0">
-                <a:solidFill>
-                  <a:srgbClr val="3A6278"/>
-                </a:solidFill>
-                <a:latin typeface="Calibri"/>
-                <a:cs typeface="Calibri"/>
-              </a:rPr>
-              <a:t>Owner</a:t>
-            </a:r>
-            <a:r>
-              <a:rPr lang="en-US" sz="1100" b="1" spc="-10" noProof="0" dirty="0">
-                <a:solidFill>
-                  <a:srgbClr val="3A6278"/>
-                </a:solidFill>
-                <a:latin typeface="Calibri"/>
-                <a:cs typeface="Calibri"/>
-              </a:rPr>
-              <a:t> </a:t>
-            </a:r>
-            <a:r>
-              <a:rPr lang="en-US" sz="1100" b="1" noProof="0" dirty="0">
-                <a:solidFill>
-                  <a:srgbClr val="3A6278"/>
-                </a:solidFill>
-                <a:latin typeface="Calibri"/>
-                <a:cs typeface="Calibri"/>
-              </a:rPr>
-              <a:t>1</a:t>
-            </a:r>
-            <a:r>
-              <a:rPr lang="en-US" sz="1100" b="1" spc="5" noProof="0" dirty="0">
-                <a:solidFill>
-                  <a:srgbClr val="3A6278"/>
-                </a:solidFill>
-                <a:latin typeface="Calibri"/>
-                <a:cs typeface="Calibri"/>
-              </a:rPr>
-              <a:t> </a:t>
-            </a:r>
-            <a:r>
-              <a:rPr lang="en-US" sz="1100" b="1" noProof="0" dirty="0">
-                <a:solidFill>
-                  <a:srgbClr val="09172C"/>
-                </a:solidFill>
-                <a:latin typeface="Calibri"/>
-                <a:cs typeface="Calibri"/>
-              </a:rPr>
-              <a:t>| </a:t>
-            </a:r>
-            <a:r>
-              <a:rPr lang="en-US" sz="1100" noProof="0" dirty="0">
-                <a:solidFill>
-                  <a:srgbClr val="09172C"/>
-                </a:solidFill>
-                <a:latin typeface="Calibri"/>
-                <a:cs typeface="Calibri"/>
-              </a:rPr>
-              <a:t>Scrum.org</a:t>
-            </a:r>
-            <a:r>
-              <a:rPr lang="en-US" sz="1100" spc="-30" noProof="0" dirty="0">
-                <a:solidFill>
-                  <a:srgbClr val="09172C"/>
-                </a:solidFill>
-                <a:latin typeface="Calibri"/>
-                <a:cs typeface="Calibri"/>
-              </a:rPr>
-              <a:t> </a:t>
-            </a:r>
-            <a:r>
-              <a:rPr lang="en-US" sz="1100" b="1" noProof="0" dirty="0">
-                <a:solidFill>
-                  <a:srgbClr val="09172C"/>
-                </a:solidFill>
-                <a:latin typeface="Calibri"/>
-                <a:cs typeface="Calibri"/>
-              </a:rPr>
-              <a:t>|</a:t>
-            </a:r>
-            <a:r>
-              <a:rPr lang="en-US" sz="1100" b="1" spc="-10" noProof="0" dirty="0">
-                <a:solidFill>
-                  <a:srgbClr val="09172C"/>
-                </a:solidFill>
-                <a:latin typeface="Calibri"/>
-                <a:cs typeface="Calibri"/>
-              </a:rPr>
-              <a:t> </a:t>
-            </a:r>
-            <a:r>
-              <a:rPr lang="en-US" sz="1100" spc="-20" noProof="0" dirty="0">
-                <a:latin typeface="Calibri"/>
-                <a:cs typeface="Calibri"/>
-              </a:rPr>
-              <a:t>2019</a:t>
+              <a:t>Professional Scrum Product Owner 1 | Scrum.org | 2019</a:t>
             </a:r>
             <a:endParaRPr lang="en-US" sz="1100" noProof="0" dirty="0">
               <a:latin typeface="Calibri"/>
@@ -10793,144 +6451,7 @@
                 <a:latin typeface="Calibri"/>
                 <a:cs typeface="Calibri"/>
               </a:rPr>
-              <a:t>Professional</a:t>
-            </a:r>
-            <a:r>
-              <a:rPr lang="en-US" sz="1100" b="1" spc="-20" noProof="0" dirty="0">
-                <a:solidFill>
-                  <a:srgbClr val="3A6278"/>
-                </a:solidFill>
-                <a:latin typeface="Calibri"/>
-                <a:cs typeface="Calibri"/>
-              </a:rPr>
-              <a:t> </a:t>
-            </a:r>
-            <a:r>
-              <a:rPr lang="en-US" sz="1100" b="1" noProof="0" dirty="0">
-                <a:solidFill>
-                  <a:srgbClr val="3A6278"/>
-                </a:solidFill>
-                <a:latin typeface="Calibri"/>
-                <a:cs typeface="Calibri"/>
-              </a:rPr>
-              <a:t>Scrum</a:t>
-            </a:r>
-            <a:r>
-              <a:rPr lang="en-US" sz="1100" b="1" spc="-10" noProof="0" dirty="0">
-                <a:solidFill>
-                  <a:srgbClr val="3A6278"/>
-                </a:solidFill>
-                <a:latin typeface="Calibri"/>
-                <a:cs typeface="Calibri"/>
-              </a:rPr>
-              <a:t> </a:t>
-            </a:r>
-            <a:r>
-              <a:rPr lang="en-US" sz="1100" b="1" noProof="0" dirty="0">
-                <a:solidFill>
-                  <a:srgbClr val="3A6278"/>
-                </a:solidFill>
-                <a:latin typeface="Calibri"/>
-                <a:cs typeface="Calibri"/>
-              </a:rPr>
-              <a:t>Developer</a:t>
-            </a:r>
-            <a:r>
-              <a:rPr lang="en-US" sz="1100" b="1" spc="-10" noProof="0" dirty="0">
-                <a:solidFill>
-                  <a:srgbClr val="3A6278"/>
-                </a:solidFill>
-                <a:latin typeface="Calibri"/>
-                <a:cs typeface="Calibri"/>
-              </a:rPr>
-              <a:t> </a:t>
-            </a:r>
-            <a:r>
-              <a:rPr lang="en-US" sz="1100" b="1" noProof="0" dirty="0">
-                <a:solidFill>
-                  <a:srgbClr val="3A6278"/>
-                </a:solidFill>
-                <a:latin typeface="Calibri"/>
-                <a:cs typeface="Calibri"/>
-              </a:rPr>
-              <a:t>1</a:t>
-            </a:r>
-            <a:r>
-              <a:rPr lang="en-US" sz="1100" b="1" spc="10" noProof="0" dirty="0">
-                <a:solidFill>
-                  <a:srgbClr val="3A6278"/>
-                </a:solidFill>
-                <a:latin typeface="Calibri"/>
-                <a:cs typeface="Calibri"/>
-              </a:rPr>
-              <a:t> </a:t>
-            </a:r>
-            <a:r>
-              <a:rPr lang="en-US" sz="1100" b="1" noProof="0" dirty="0">
-                <a:solidFill>
-                  <a:srgbClr val="09172C"/>
-                </a:solidFill>
-                <a:latin typeface="Calibri"/>
-                <a:cs typeface="Calibri"/>
-              </a:rPr>
-              <a:t>|</a:t>
-            </a:r>
-            <a:r>
-              <a:rPr lang="en-US" sz="1100" b="1" spc="5" noProof="0" dirty="0">
-                <a:solidFill>
-                  <a:srgbClr val="09172C"/>
-                </a:solidFill>
-                <a:latin typeface="Calibri"/>
-                <a:cs typeface="Calibri"/>
-              </a:rPr>
-              <a:t> </a:t>
-            </a:r>
-            <a:r>
-              <a:rPr lang="en-US" sz="1100" noProof="0" dirty="0">
-                <a:solidFill>
-                  <a:srgbClr val="09172C"/>
-                </a:solidFill>
-                <a:latin typeface="Calibri"/>
-                <a:cs typeface="Calibri"/>
-              </a:rPr>
-              <a:t>Scrum.org</a:t>
-            </a:r>
-            <a:r>
-              <a:rPr lang="en-US" sz="1100" spc="-25" noProof="0" dirty="0">
-                <a:solidFill>
-                  <a:srgbClr val="09172C"/>
-                </a:solidFill>
-                <a:latin typeface="Calibri"/>
-                <a:cs typeface="Calibri"/>
-              </a:rPr>
-              <a:t> </a:t>
-            </a:r>
-            <a:r>
-              <a:rPr lang="en-US" sz="1100" b="1" noProof="0" dirty="0">
-                <a:solidFill>
-                  <a:srgbClr val="09172C"/>
-                </a:solidFill>
-                <a:latin typeface="Calibri"/>
-                <a:cs typeface="Calibri"/>
-              </a:rPr>
-              <a:t>|</a:t>
-            </a:r>
-            <a:r>
-              <a:rPr lang="en-US" sz="1100" b="1" spc="-5" noProof="0" dirty="0">
-                <a:solidFill>
-                  <a:srgbClr val="09172C"/>
-                </a:solidFill>
-                <a:latin typeface="Calibri"/>
-                <a:cs typeface="Calibri"/>
-              </a:rPr>
-              <a:t> </a:t>
-            </a:r>
-            <a:r>
-              <a:rPr lang="en-US" sz="1100" spc="-20" noProof="0" dirty="0">
-                <a:latin typeface="Calibri"/>
-                <a:cs typeface="Calibri"/>
-              </a:rPr>
-              <a:t>2019</a:t>
+              <a:t>Professional Scrum Developer 1 | Scrum.org | 2019</a:t>
             </a:r>
             <a:endParaRPr lang="en-US" sz="1100" noProof="0" dirty="0">
               <a:latin typeface="Calibri"/>
@@ -10946,213 +6467,6 @@
                 <a:spcPts val="1165"/>
               </a:spcBef>
             </a:pPr>
-            <a:r>
-              <a:rPr lang="en-US" sz="1100" b="1" noProof="0" dirty="0">
-                <a:solidFill>
-                  <a:srgbClr val="3A6278"/>
-                </a:solidFill>
-                <a:latin typeface="Calibri"/>
-                <a:cs typeface="Calibri"/>
-              </a:rPr>
-              <a:t>Symfony</a:t>
-            </a:r>
-            <a:r>
-              <a:rPr lang="en-US" sz="1100" b="1" spc="-20" noProof="0" dirty="0">
-                <a:solidFill>
-                  <a:srgbClr val="3A6278"/>
-                </a:solidFill>
-                <a:latin typeface="Calibri"/>
-                <a:cs typeface="Calibri"/>
-              </a:rPr>
-              <a:t> </a:t>
-            </a:r>
-            <a:r>
-              <a:rPr lang="en-US" sz="1100" b="1" noProof="0" dirty="0">
-                <a:solidFill>
-                  <a:srgbClr val="3A6278"/>
-                </a:solidFill>
-                <a:latin typeface="Calibri"/>
-                <a:cs typeface="Calibri"/>
-              </a:rPr>
-              <a:t>–</a:t>
-            </a:r>
-            <a:r>
-              <a:rPr lang="en-US" sz="1100" b="1" spc="-25" noProof="0" dirty="0">
-                <a:solidFill>
-                  <a:srgbClr val="3A6278"/>
-                </a:solidFill>
-                <a:latin typeface="Calibri"/>
-                <a:cs typeface="Calibri"/>
-              </a:rPr>
-              <a:t> </a:t>
-            </a:r>
-            <a:r>
-              <a:rPr lang="en-US" sz="1100" b="1" noProof="0" dirty="0">
-                <a:solidFill>
-                  <a:srgbClr val="3A6278"/>
-                </a:solidFill>
-                <a:latin typeface="Calibri"/>
-                <a:cs typeface="Calibri"/>
-              </a:rPr>
-              <a:t>Hack</a:t>
-            </a:r>
-            <a:r>
-              <a:rPr lang="en-US" sz="1100" b="1" spc="-30" noProof="0" dirty="0">
-                <a:solidFill>
-                  <a:srgbClr val="3A6278"/>
-                </a:solidFill>
-                <a:latin typeface="Calibri"/>
-                <a:cs typeface="Calibri"/>
-              </a:rPr>
-              <a:t> </a:t>
-            </a:r>
-            <a:r>
-              <a:rPr lang="en-US" sz="1100" b="1" noProof="0" dirty="0">
-                <a:solidFill>
-                  <a:srgbClr val="3A6278"/>
-                </a:solidFill>
-                <a:latin typeface="Calibri"/>
-                <a:cs typeface="Calibri"/>
-              </a:rPr>
-              <a:t>and</a:t>
-            </a:r>
-            <a:r>
-              <a:rPr lang="en-US" sz="1100" b="1" spc="-5" noProof="0" dirty="0">
-                <a:solidFill>
-                  <a:srgbClr val="3A6278"/>
-                </a:solidFill>
-                <a:latin typeface="Calibri"/>
-                <a:cs typeface="Calibri"/>
-              </a:rPr>
-              <a:t> </a:t>
-            </a:r>
-            <a:r>
-              <a:rPr lang="en-US" sz="1100" b="1" noProof="0" dirty="0">
-                <a:solidFill>
-                  <a:srgbClr val="3A6278"/>
-                </a:solidFill>
-                <a:latin typeface="Calibri"/>
-                <a:cs typeface="Calibri"/>
-              </a:rPr>
-              <a:t>Extend</a:t>
-            </a:r>
-            <a:r>
-              <a:rPr lang="en-US" sz="1100" b="1" spc="-20" noProof="0" dirty="0">
-                <a:solidFill>
-                  <a:srgbClr val="3A6278"/>
-                </a:solidFill>
-                <a:latin typeface="Calibri"/>
-                <a:cs typeface="Calibri"/>
-              </a:rPr>
-              <a:t> </a:t>
-            </a:r>
-            <a:r>
-              <a:rPr lang="en-US" sz="1100" b="1" noProof="0" dirty="0">
-                <a:solidFill>
-                  <a:srgbClr val="3A6278"/>
-                </a:solidFill>
-                <a:latin typeface="Calibri"/>
-                <a:cs typeface="Calibri"/>
-              </a:rPr>
-              <a:t>the</a:t>
-            </a:r>
-            <a:r>
-              <a:rPr lang="en-US" sz="1100" b="1" spc="-20" noProof="0" dirty="0">
-                <a:solidFill>
-                  <a:srgbClr val="3A6278"/>
-                </a:solidFill>
-                <a:latin typeface="Calibri"/>
-                <a:cs typeface="Calibri"/>
-              </a:rPr>
-              <a:t> </a:t>
-            </a:r>
-            <a:r>
-              <a:rPr lang="en-US" sz="1100" b="1" noProof="0" dirty="0">
-                <a:solidFill>
-                  <a:srgbClr val="3A6278"/>
-                </a:solidFill>
-                <a:latin typeface="Calibri"/>
-                <a:cs typeface="Calibri"/>
-              </a:rPr>
-              <a:t>Framework</a:t>
-            </a:r>
-            <a:r>
-              <a:rPr lang="en-US" sz="1100" b="1" spc="-25" noProof="0" dirty="0">
-                <a:solidFill>
-                  <a:srgbClr val="3A6278"/>
-                </a:solidFill>
-                <a:latin typeface="Calibri"/>
-                <a:cs typeface="Calibri"/>
-              </a:rPr>
-              <a:t> </a:t>
-            </a:r>
-            <a:r>
-              <a:rPr lang="en-US" sz="1100" b="1" noProof="0" dirty="0">
-                <a:solidFill>
-                  <a:srgbClr val="09172C"/>
-                </a:solidFill>
-                <a:latin typeface="Calibri"/>
-                <a:cs typeface="Calibri"/>
-              </a:rPr>
-              <a:t>|</a:t>
-            </a:r>
-            <a:r>
-              <a:rPr lang="en-US" sz="1100" b="1" spc="-20" noProof="0" dirty="0">
-                <a:solidFill>
-                  <a:srgbClr val="09172C"/>
-                </a:solidFill>
-                <a:latin typeface="Calibri"/>
-                <a:cs typeface="Calibri"/>
-              </a:rPr>
-              <a:t> </a:t>
-            </a:r>
-            <a:r>
-              <a:rPr lang="en-US" sz="1100" noProof="0" dirty="0" err="1">
-                <a:solidFill>
-                  <a:srgbClr val="09172C"/>
-                </a:solidFill>
-                <a:latin typeface="Calibri"/>
-                <a:cs typeface="Calibri"/>
-              </a:rPr>
-              <a:t>Sensiolabs</a:t>
-            </a:r>
-            <a:r>
-              <a:rPr lang="en-US" sz="1100" spc="-20" noProof="0" dirty="0">
-                <a:solidFill>
-                  <a:srgbClr val="09172C"/>
-                </a:solidFill>
-                <a:latin typeface="Calibri"/>
-                <a:cs typeface="Calibri"/>
-              </a:rPr>
-              <a:t> </a:t>
-            </a:r>
-            <a:r>
-              <a:rPr lang="en-US" sz="1100" b="1" noProof="0" dirty="0">
-                <a:solidFill>
-                  <a:srgbClr val="09172C"/>
-                </a:solidFill>
-                <a:latin typeface="Calibri"/>
-                <a:cs typeface="Calibri"/>
-              </a:rPr>
-              <a:t>|</a:t>
-            </a:r>
-            <a:r>
-              <a:rPr lang="en-US" sz="1100" b="1" spc="-10" noProof="0" dirty="0">
-                <a:solidFill>
-                  <a:srgbClr val="09172C"/>
-                </a:solidFill>
-                <a:latin typeface="Calibri"/>
-                <a:cs typeface="Calibri"/>
-              </a:rPr>
-              <a:t> </a:t>
-            </a:r>
-            <a:r>
-              <a:rPr lang="en-US" sz="1100" spc="-20" noProof="0" dirty="0">
-                <a:latin typeface="Calibri"/>
-                <a:cs typeface="Calibri"/>
-              </a:rPr>
-              <a:t>2018</a:t>
-            </a:r>
             <a:endParaRPr lang="en-US" sz="1100" noProof="0" dirty="0">
               <a:latin typeface="Calibri"/>
               <a:cs typeface="Calibri"/>
@@ -15662,7 +10976,7 @@
         <p:spPr>
           <a:xfrm>
             <a:off x="2328798" y="5968454"/>
-            <a:ext cx="4431030" cy="3023905"/>
+            <a:ext cx="4431030" cy="2741776"/>
           </a:xfrm>
           <a:prstGeom prst="rect">
             <a:avLst/>
@@ -15675,16 +10989,13 @@
           <a:lstStyle/>
           <a:p>
             <a:pPr marL="179705" marR="86360">
-              <a:lnSpc>
-                <a:spcPct val="150000"/>
-              </a:lnSpc>
               <a:spcBef>
                 <a:spcPts val="1655"/>
               </a:spcBef>
             </a:pPr>
             <a:r>
               <a:rPr lang="en-US" noProof="0" dirty="0"/>
-              <a:t>Software Design: </a:t>
+              <a:t>Full Stack Engineering</a:t>
             </a:r>
             <a:r>
               <a:rPr lang="en-US" b="0" spc="15" dirty="0">
@@ -15692,7 +11003,7 @@
                   <a:srgbClr val="000000"/>
                 </a:solidFill>
               </a:rPr>
-              <a:t>High / Mid / Low level design</a:t>
+              <a:t>: TypeScript / React / Angular / Vue / Astro Node.js / Python / Flask / FastAPI / REST APIs / PHP / Symfony</a:t>
             </a:r>
             <a:br>
               <a:rPr lang="en-US" b="0" spc="15" dirty="0">
@@ -15701,9 +11012,16 @@
                 </a:solidFill>
               </a:rPr>
             </a:br>
+            <a:br>
+              <a:rPr lang="en-US" b="0" spc="15" dirty="0">
+                <a:solidFill>
+                  <a:srgbClr val="000000"/>
+                </a:solidFill>
+              </a:rPr>
+            </a:br>
             <a:r>
               <a:rPr lang="en-US" noProof="0" dirty="0"/>
-              <a:t>Backend</a:t>
+              <a:t>Cloud &amp; DevOps</a:t>
             </a:r>
             <a:r>
               <a:rPr lang="en-US" b="0" noProof="0" dirty="0">
@@ -15713,17 +11031,7 @@
                 <a:latin typeface="Calibri"/>
                 <a:cs typeface="Calibri"/>
               </a:rPr>
-              <a:t>:</a:t>
-            </a:r>
-            <a:r>
-              <a:rPr lang="en-US" b="0" spc="15" noProof="0" dirty="0">
-                <a:solidFill>
-                  <a:srgbClr val="000000"/>
-                </a:solidFill>
-                <a:latin typeface="Calibri"/>
-                <a:cs typeface="Calibri"/>
-              </a:rPr>
-              <a:t> Python / </a:t>
+              <a:t>: AWS Lambda / API Gateway / CloudWatch / SQS / SNS / DynamoDB / RDS / EC2 / CloudFront / CDK / </a:t>
             </a:r>
             <a:r>
               <a:rPr lang="en-US" b="0" dirty="0">
@@ -15731,340 +11039,7 @@
                   <a:srgbClr val="000000"/>
                 </a:solidFill>
               </a:rPr>
-              <a:t>Django</a:t>
-            </a:r>
-            <a:r>
-              <a:rPr lang="en-US" b="0" spc="-5" dirty="0">
-                <a:solidFill>
-                  <a:srgbClr val="000000"/>
-                </a:solidFill>
-              </a:rPr>
-              <a:t> </a:t>
-            </a:r>
-            <a:r>
-              <a:rPr lang="en-US" b="0" dirty="0">
-                <a:solidFill>
-                  <a:srgbClr val="000000"/>
-                </a:solidFill>
-              </a:rPr>
-              <a:t>/</a:t>
-            </a:r>
-            <a:r>
-              <a:rPr lang="en-US" b="0" spc="-10" dirty="0">
-                <a:solidFill>
-                  <a:srgbClr val="000000"/>
-                </a:solidFill>
-              </a:rPr>
-              <a:t> Flask / PHP / Symfony</a:t>
-            </a:r>
-            <a:r>
-              <a:rPr lang="en-US" b="0" spc="-20" dirty="0">
-                <a:solidFill>
-                  <a:srgbClr val="000000"/>
-                </a:solidFill>
-              </a:rPr>
-              <a:t> </a:t>
-            </a:r>
-            <a:r>
-              <a:rPr lang="en-US" b="0" dirty="0">
-                <a:solidFill>
-                  <a:srgbClr val="000000"/>
-                </a:solidFill>
-              </a:rPr>
-              <a:t>/</a:t>
-            </a:r>
-            <a:r>
-              <a:rPr lang="en-US" b="0" spc="5" dirty="0">
-                <a:solidFill>
-                  <a:srgbClr val="000000"/>
-                </a:solidFill>
-              </a:rPr>
-              <a:t> </a:t>
-            </a:r>
-            <a:r>
-              <a:rPr lang="en-US" b="0" spc="-10" dirty="0" err="1">
-                <a:solidFill>
-                  <a:srgbClr val="000000"/>
-                </a:solidFill>
-              </a:rPr>
-              <a:t>CakePHP</a:t>
-            </a:r>
-            <a:endParaRPr lang="en-US" b="0" spc="-20" noProof="0" dirty="0">
-              <a:solidFill>
-                <a:srgbClr val="000000"/>
-              </a:solidFill>
-              <a:latin typeface="Calibri"/>
-              <a:cs typeface="Calibri"/>
-            </a:endParaRPr>
-          </a:p>
-          <a:p>
-            <a:pPr marL="179705" marR="271780">
-              <a:lnSpc>
-                <a:spcPct val="100000"/>
-              </a:lnSpc>
-              <a:spcBef>
-                <a:spcPts val="960"/>
-              </a:spcBef>
-            </a:pPr>
-            <a:r>
-              <a:rPr lang="en-US" noProof="0" dirty="0"/>
-              <a:t>Frontend</a:t>
-            </a:r>
-            <a:r>
-              <a:rPr lang="en-US" b="0" noProof="0" dirty="0">
-                <a:solidFill>
-                  <a:srgbClr val="000000"/>
-                </a:solidFill>
-                <a:latin typeface="Calibri"/>
-                <a:cs typeface="Calibri"/>
-              </a:rPr>
-              <a:t>:</a:t>
-            </a:r>
-            <a:r>
-              <a:rPr lang="en-US" b="0" spc="5" noProof="0" dirty="0">
-                <a:solidFill>
-                  <a:srgbClr val="000000"/>
-                </a:solidFill>
-                <a:latin typeface="Calibri"/>
-                <a:cs typeface="Calibri"/>
-              </a:rPr>
-              <a:t> </a:t>
-            </a:r>
-            <a:r>
-              <a:rPr lang="en-US" b="0" spc="-10" dirty="0">
-                <a:solidFill>
-                  <a:srgbClr val="000000"/>
-                </a:solidFill>
-              </a:rPr>
-              <a:t>JavaScript</a:t>
-            </a:r>
-            <a:r>
-              <a:rPr lang="en-US" b="0" spc="-25" dirty="0">
-                <a:solidFill>
-                  <a:srgbClr val="000000"/>
-                </a:solidFill>
-              </a:rPr>
-              <a:t> </a:t>
-            </a:r>
-            <a:r>
-              <a:rPr lang="en-US" b="0" dirty="0">
-                <a:solidFill>
-                  <a:srgbClr val="000000"/>
-                </a:solidFill>
-              </a:rPr>
-              <a:t>/</a:t>
-            </a:r>
-            <a:r>
-              <a:rPr lang="en-US" b="0" spc="-15" dirty="0">
-                <a:solidFill>
-                  <a:srgbClr val="000000"/>
-                </a:solidFill>
-              </a:rPr>
-              <a:t> </a:t>
-            </a:r>
-            <a:r>
-              <a:rPr lang="en-US" b="0" spc="-10" dirty="0">
-                <a:solidFill>
-                  <a:srgbClr val="000000"/>
-                </a:solidFill>
-              </a:rPr>
-              <a:t>TypeScript</a:t>
-            </a:r>
-            <a:r>
-              <a:rPr lang="en-US" b="0" spc="-40" dirty="0">
-                <a:solidFill>
-                  <a:srgbClr val="000000"/>
-                </a:solidFill>
-              </a:rPr>
-              <a:t> </a:t>
-            </a:r>
-            <a:r>
-              <a:rPr lang="en-US" b="0" dirty="0">
-                <a:solidFill>
-                  <a:srgbClr val="000000"/>
-                </a:solidFill>
-              </a:rPr>
-              <a:t>/</a:t>
-            </a:r>
-            <a:r>
-              <a:rPr lang="en-US" b="0" spc="-5" dirty="0">
-                <a:solidFill>
-                  <a:srgbClr val="000000"/>
-                </a:solidFill>
-              </a:rPr>
-              <a:t> </a:t>
-            </a:r>
-            <a:r>
-              <a:rPr lang="en-US" b="0" dirty="0">
-                <a:solidFill>
-                  <a:srgbClr val="000000"/>
-                </a:solidFill>
-              </a:rPr>
-              <a:t>React</a:t>
-            </a:r>
-            <a:r>
-              <a:rPr lang="en-US" b="0" spc="10" dirty="0">
-                <a:solidFill>
-                  <a:srgbClr val="000000"/>
-                </a:solidFill>
-              </a:rPr>
-              <a:t> </a:t>
-            </a:r>
-            <a:r>
-              <a:rPr lang="en-US" b="0" dirty="0">
-                <a:solidFill>
-                  <a:srgbClr val="000000"/>
-                </a:solidFill>
-              </a:rPr>
-              <a:t>/</a:t>
-            </a:r>
-            <a:r>
-              <a:rPr lang="en-US" b="0" spc="-15" dirty="0">
-                <a:solidFill>
-                  <a:srgbClr val="000000"/>
-                </a:solidFill>
-              </a:rPr>
-              <a:t> </a:t>
-            </a:r>
-            <a:r>
-              <a:rPr lang="en-US" b="0" noProof="0" dirty="0">
-                <a:solidFill>
-                  <a:srgbClr val="000000"/>
-                </a:solidFill>
-                <a:latin typeface="Calibri"/>
-                <a:cs typeface="Calibri"/>
-              </a:rPr>
-              <a:t>Angular</a:t>
-            </a:r>
-            <a:r>
-              <a:rPr lang="en-US" b="0" spc="-40" noProof="0" dirty="0">
-                <a:solidFill>
-                  <a:srgbClr val="000000"/>
-                </a:solidFill>
-                <a:latin typeface="Calibri"/>
-                <a:cs typeface="Calibri"/>
-              </a:rPr>
-              <a:t> </a:t>
-            </a:r>
-            <a:r>
-              <a:rPr lang="en-US" b="0" noProof="0" dirty="0">
-                <a:solidFill>
-                  <a:srgbClr val="000000"/>
-                </a:solidFill>
-                <a:latin typeface="Calibri"/>
-                <a:cs typeface="Calibri"/>
-              </a:rPr>
-              <a:t>/</a:t>
-            </a:r>
-            <a:r>
-              <a:rPr lang="en-US" b="0" spc="-5" noProof="0" dirty="0">
-                <a:solidFill>
-                  <a:srgbClr val="000000"/>
-                </a:solidFill>
-                <a:latin typeface="Calibri"/>
-                <a:cs typeface="Calibri"/>
-              </a:rPr>
-              <a:t> </a:t>
-            </a:r>
-            <a:r>
-              <a:rPr lang="en-US" b="0" noProof="0" dirty="0">
-                <a:solidFill>
-                  <a:srgbClr val="000000"/>
-                </a:solidFill>
-                <a:latin typeface="Calibri"/>
-                <a:cs typeface="Calibri"/>
-              </a:rPr>
-              <a:t>Node.js</a:t>
-            </a:r>
-            <a:r>
-              <a:rPr lang="en-US" b="0" spc="-20" noProof="0" dirty="0">
-                <a:solidFill>
-                  <a:srgbClr val="000000"/>
-                </a:solidFill>
-                <a:latin typeface="Calibri"/>
-                <a:cs typeface="Calibri"/>
-              </a:rPr>
-              <a:t> </a:t>
-            </a:r>
-            <a:r>
-              <a:rPr lang="en-US" b="0" noProof="0" dirty="0">
-                <a:solidFill>
-                  <a:srgbClr val="000000"/>
-                </a:solidFill>
-                <a:latin typeface="Calibri"/>
-                <a:cs typeface="Calibri"/>
-              </a:rPr>
-              <a:t>/</a:t>
-            </a:r>
-            <a:r>
-              <a:rPr lang="en-US" b="0" spc="-15" noProof="0" dirty="0">
-                <a:solidFill>
-                  <a:srgbClr val="000000"/>
-                </a:solidFill>
-                <a:latin typeface="Calibri"/>
-                <a:cs typeface="Calibri"/>
-              </a:rPr>
-              <a:t> </a:t>
-            </a:r>
-            <a:r>
-              <a:rPr lang="en-US" b="0" noProof="0" dirty="0">
-                <a:solidFill>
-                  <a:srgbClr val="000000"/>
-                </a:solidFill>
-                <a:latin typeface="Calibri"/>
-                <a:cs typeface="Calibri"/>
-              </a:rPr>
-              <a:t>jQuery</a:t>
-            </a:r>
-            <a:r>
-              <a:rPr lang="en-US" b="0" spc="-25" noProof="0" dirty="0">
-                <a:solidFill>
-                  <a:srgbClr val="000000"/>
-                </a:solidFill>
-                <a:latin typeface="Calibri"/>
-                <a:cs typeface="Calibri"/>
-              </a:rPr>
-              <a:t> / LESS / SASS / Bootstrap / Material / Ionic / </a:t>
-            </a:r>
-            <a:r>
-              <a:rPr lang="en-US" b="0" dirty="0">
-                <a:solidFill>
-                  <a:srgbClr val="000000"/>
-                </a:solidFill>
-              </a:rPr>
-              <a:t>HTML5</a:t>
-            </a:r>
-            <a:r>
-              <a:rPr lang="en-US" b="0" spc="-5" dirty="0">
-                <a:solidFill>
-                  <a:srgbClr val="000000"/>
-                </a:solidFill>
-              </a:rPr>
-              <a:t> </a:t>
-            </a:r>
-            <a:r>
-              <a:rPr lang="en-US" b="0" dirty="0">
-                <a:solidFill>
-                  <a:srgbClr val="000000"/>
-                </a:solidFill>
-              </a:rPr>
-              <a:t>/</a:t>
-            </a:r>
-            <a:r>
-              <a:rPr lang="en-US" b="0" spc="-15" dirty="0">
-                <a:solidFill>
-                  <a:srgbClr val="000000"/>
-                </a:solidFill>
-              </a:rPr>
-              <a:t> </a:t>
-            </a:r>
-            <a:r>
-              <a:rPr lang="en-US" b="0" dirty="0">
-                <a:solidFill>
-                  <a:srgbClr val="000000"/>
-                </a:solidFill>
-              </a:rPr>
-              <a:t>CSS3</a:t>
+              <a:t>GitLab…</a:t>
             </a:r>
             <a:endParaRPr lang="en-US" b="0" spc="-25" noProof="0" dirty="0">
               <a:solidFill>
@@ -16082,7 +11057,7 @@
             </a:pPr>
             <a:r>
               <a:rPr lang="en-US" noProof="0" dirty="0"/>
-              <a:t>Databases</a:t>
+              <a:t>Architecture</a:t>
             </a:r>
             <a:r>
               <a:rPr lang="en-US" b="0" spc="-10" noProof="0" dirty="0">
@@ -16092,175 +11067,7 @@
                 <a:latin typeface="Calibri"/>
                 <a:cs typeface="Calibri"/>
               </a:rPr>
-              <a:t>: </a:t>
-            </a:r>
-            <a:r>
-              <a:rPr lang="en-US" b="0" spc="-10" dirty="0">
-                <a:solidFill>
-                  <a:srgbClr val="000000"/>
-                </a:solidFill>
-              </a:rPr>
-              <a:t>PostgreSQL</a:t>
-            </a:r>
-            <a:r>
-              <a:rPr lang="en-US" b="0" spc="-25" dirty="0">
-                <a:solidFill>
-                  <a:srgbClr val="000000"/>
-                </a:solidFill>
-              </a:rPr>
-              <a:t> </a:t>
-            </a:r>
-            <a:r>
-              <a:rPr lang="en-US" b="0" dirty="0">
-                <a:solidFill>
-                  <a:srgbClr val="000000"/>
-                </a:solidFill>
-              </a:rPr>
-              <a:t>/ MySQL</a:t>
-            </a:r>
-            <a:r>
-              <a:rPr lang="en-US" b="0" spc="-20" dirty="0">
-                <a:solidFill>
-                  <a:srgbClr val="000000"/>
-                </a:solidFill>
-              </a:rPr>
-              <a:t> </a:t>
-            </a:r>
-            <a:r>
-              <a:rPr lang="en-US" b="0" dirty="0">
-                <a:solidFill>
-                  <a:srgbClr val="000000"/>
-                </a:solidFill>
-              </a:rPr>
-              <a:t>/</a:t>
-            </a:r>
-            <a:r>
-              <a:rPr lang="en-US" b="0" spc="-5" dirty="0">
-                <a:solidFill>
-                  <a:srgbClr val="000000"/>
-                </a:solidFill>
-              </a:rPr>
-              <a:t> </a:t>
-            </a:r>
-            <a:r>
-              <a:rPr lang="en-US" b="0" dirty="0">
-                <a:solidFill>
-                  <a:srgbClr val="000000"/>
-                </a:solidFill>
-              </a:rPr>
-              <a:t>REDIS</a:t>
-            </a:r>
-            <a:r>
-              <a:rPr lang="en-US" b="0" spc="-20" dirty="0">
-                <a:solidFill>
-                  <a:srgbClr val="000000"/>
-                </a:solidFill>
-              </a:rPr>
-              <a:t> </a:t>
-            </a:r>
-            <a:r>
-              <a:rPr lang="en-US" b="0" dirty="0">
-                <a:solidFill>
-                  <a:srgbClr val="000000"/>
-                </a:solidFill>
-              </a:rPr>
-              <a:t>/</a:t>
-            </a:r>
-            <a:r>
-              <a:rPr lang="en-US" b="0" spc="-5" dirty="0">
-                <a:solidFill>
-                  <a:srgbClr val="000000"/>
-                </a:solidFill>
-              </a:rPr>
-              <a:t> </a:t>
-            </a:r>
-            <a:r>
-              <a:rPr lang="en-US" b="0" spc="-10" dirty="0">
-                <a:solidFill>
-                  <a:srgbClr val="000000"/>
-                </a:solidFill>
-              </a:rPr>
-              <a:t>Elasticsearch / DynamoDB</a:t>
-            </a:r>
-            <a:r>
-              <a:rPr lang="en-US" b="0" spc="5" dirty="0">
-                <a:solidFill>
-                  <a:srgbClr val="000000"/>
-                </a:solidFill>
-              </a:rPr>
-              <a:t> </a:t>
-            </a:r>
-            <a:r>
-              <a:rPr lang="en-US" sz="1000" b="0" dirty="0">
-                <a:solidFill>
-                  <a:srgbClr val="000000"/>
-                </a:solidFill>
-              </a:rPr>
-              <a:t>/</a:t>
-            </a:r>
-            <a:r>
-              <a:rPr lang="en-US" sz="1000" b="0" spc="-10" dirty="0">
-                <a:solidFill>
-                  <a:srgbClr val="000000"/>
-                </a:solidFill>
-              </a:rPr>
-              <a:t> </a:t>
-            </a:r>
-            <a:r>
-              <a:rPr lang="en-US" sz="1000" b="0" dirty="0">
-                <a:solidFill>
-                  <a:srgbClr val="000000"/>
-                </a:solidFill>
-              </a:rPr>
-              <a:t>SQL</a:t>
-            </a:r>
-            <a:r>
-              <a:rPr lang="en-US" sz="1000" b="0" spc="5" dirty="0">
-                <a:solidFill>
-                  <a:srgbClr val="000000"/>
-                </a:solidFill>
-              </a:rPr>
-              <a:t> </a:t>
-            </a:r>
-            <a:r>
-              <a:rPr lang="en-US" sz="1000" b="0" dirty="0">
-                <a:solidFill>
-                  <a:srgbClr val="000000"/>
-                </a:solidFill>
-              </a:rPr>
-              <a:t>Server</a:t>
-            </a:r>
-            <a:r>
-              <a:rPr lang="en-US" sz="1000" b="0" spc="25" dirty="0">
-                <a:solidFill>
-                  <a:srgbClr val="000000"/>
-                </a:solidFill>
-              </a:rPr>
-              <a:t> </a:t>
-            </a:r>
-            <a:r>
-              <a:rPr lang="en-US" sz="1000" b="0" dirty="0">
-                <a:solidFill>
-                  <a:srgbClr val="000000"/>
-                </a:solidFill>
-              </a:rPr>
-              <a:t>/</a:t>
-            </a:r>
-            <a:r>
-              <a:rPr lang="en-US" sz="1000" b="0" spc="-15" dirty="0">
-                <a:solidFill>
-                  <a:srgbClr val="000000"/>
-                </a:solidFill>
-              </a:rPr>
-              <a:t> </a:t>
-            </a:r>
-            <a:r>
-              <a:rPr lang="en-US" sz="1000" b="0" spc="-10" dirty="0">
-                <a:solidFill>
-                  <a:srgbClr val="000000"/>
-                </a:solidFill>
-              </a:rPr>
-              <a:t>Oracle</a:t>
+              <a:t>: Product architecture / high, mid and low-level design / serverless / distributed systems</a:t>
             </a:r>
             <a:endParaRPr lang="en-US" sz="1000" dirty="0"/>
           </a:p>
@@ -16272,7 +11079,7 @@
             </a:pPr>
             <a:r>
               <a:rPr lang="en-US" dirty="0"/>
-              <a:t>DevOps</a:t>
+              <a:t>Databases</a:t>
             </a:r>
             <a:r>
               <a:rPr lang="en-US" b="0" spc="-10" dirty="0">
@@ -16280,7 +11087,7 @@
                   <a:srgbClr val="000000"/>
                 </a:solidFill>
               </a:rPr>
-              <a:t>: IaaS, CDK, CI/CD, Pipeline construction, Monitoring</a:t>
+              <a:t>: PostgreSQL / MySQL / Redis / Elasticsearch / DynamoDB</a:t>
             </a:r>
           </a:p>
           <a:p>
@@ -16294,7 +11101,7 @@
             </a:pPr>
             <a:r>
               <a:rPr lang="en-US" noProof="0" dirty="0"/>
-              <a:t>Could Computing</a:t>
+              <a:t>AI &amp; Automation</a:t>
             </a:r>
             <a:r>
               <a:rPr lang="en-US" b="0" spc="-10" noProof="0" dirty="0">
@@ -16304,43 +11111,8 @@
                 <a:latin typeface="Calibri"/>
                 <a:cs typeface="Calibri"/>
               </a:rPr>
-              <a:t>: AWS Lambda, API Gateway, CloudWatch, SQS, SNS, </a:t>
-            </a:r>
-            <a:r>
-              <a:rPr lang="en-US" b="0" spc="-10" noProof="0" dirty="0" err="1">
-                <a:solidFill>
-                  <a:srgbClr val="000000"/>
-                </a:solidFill>
-                <a:latin typeface="Calibri"/>
-                <a:cs typeface="Calibri"/>
-              </a:rPr>
-              <a:t>Quicksight</a:t>
-            </a:r>
-            <a:r>
-              <a:rPr lang="en-US" b="0" spc="-10" noProof="0" dirty="0">
-                <a:solidFill>
-                  <a:srgbClr val="000000"/>
-                </a:solidFill>
-                <a:latin typeface="Calibri"/>
-                <a:cs typeface="Calibri"/>
-              </a:rPr>
-              <a:t>, Amazon Q, Bedrock, SageMaker, EC2, CloudFront</a:t>
-            </a:r>
-            <a:r>
-              <a:rPr lang="en-US" b="0" spc="-10" dirty="0">
-                <a:solidFill>
-                  <a:srgbClr val="000000"/>
-                </a:solidFill>
-              </a:rPr>
-              <a:t>…</a:t>
-            </a:r>
-            <a:endParaRPr lang="en-US" b="0" spc="-10" noProof="0" dirty="0">
-              <a:solidFill>
-                <a:srgbClr val="000000"/>
-              </a:solidFill>
-              <a:latin typeface="Calibri"/>
-              <a:cs typeface="Calibri"/>
-            </a:endParaRPr>
+              <a:t>: Codex, Claude Code, OpenAI API, Amazon Q / Bedrock / SageMaker / AI-assisted delivery / developer productivity</a:t>
+            </a:r>
           </a:p>
           <a:p>
             <a:pPr marL="179705" marR="46990">
@@ -16353,7 +11125,7 @@
             </a:pPr>
             <a:r>
               <a:rPr lang="en-US" spc="-20" noProof="0" dirty="0"/>
-              <a:t>Tools</a:t>
+              <a:t>Engineering Practices</a:t>
             </a:r>
             <a:r>
               <a:rPr lang="en-US" b="0" spc="-20" noProof="0" dirty="0">
@@ -16363,531 +11135,7 @@
                 <a:latin typeface="Calibri"/>
                 <a:cs typeface="Calibri"/>
               </a:rPr>
-              <a:t>:</a:t>
-            </a:r>
-            <a:r>
-              <a:rPr lang="en-US" b="0" spc="-10" noProof="0" dirty="0">
-                <a:solidFill>
-                  <a:srgbClr val="000000"/>
-                </a:solidFill>
-                <a:latin typeface="Calibri"/>
-                <a:cs typeface="Calibri"/>
-              </a:rPr>
-              <a:t> </a:t>
-            </a:r>
-            <a:r>
-              <a:rPr lang="en-US" b="0" dirty="0">
-                <a:solidFill>
-                  <a:srgbClr val="000000"/>
-                </a:solidFill>
-              </a:rPr>
-              <a:t>Jira</a:t>
-            </a:r>
-            <a:r>
-              <a:rPr lang="en-US" b="0" spc="-15" dirty="0">
-                <a:solidFill>
-                  <a:srgbClr val="000000"/>
-                </a:solidFill>
-              </a:rPr>
-              <a:t> </a:t>
-            </a:r>
-            <a:r>
-              <a:rPr lang="en-US" b="0" dirty="0">
-                <a:solidFill>
-                  <a:srgbClr val="000000"/>
-                </a:solidFill>
-              </a:rPr>
-              <a:t>/</a:t>
-            </a:r>
-            <a:r>
-              <a:rPr lang="en-US" b="0" spc="-25" dirty="0">
-                <a:solidFill>
-                  <a:srgbClr val="000000"/>
-                </a:solidFill>
-              </a:rPr>
-              <a:t> </a:t>
-            </a:r>
-            <a:r>
-              <a:rPr lang="en-US" b="0" dirty="0">
-                <a:solidFill>
-                  <a:srgbClr val="000000"/>
-                </a:solidFill>
-              </a:rPr>
-              <a:t>Confluence /</a:t>
-            </a:r>
-            <a:r>
-              <a:rPr lang="en-US" b="0" spc="-20" dirty="0">
-                <a:solidFill>
-                  <a:srgbClr val="000000"/>
-                </a:solidFill>
-              </a:rPr>
-              <a:t> </a:t>
-            </a:r>
-            <a:r>
-              <a:rPr lang="en-US" b="0" dirty="0">
-                <a:solidFill>
-                  <a:srgbClr val="000000"/>
-                </a:solidFill>
-              </a:rPr>
-              <a:t>Docker</a:t>
-            </a:r>
-            <a:r>
-              <a:rPr lang="en-US" b="0" spc="-15" dirty="0">
-                <a:solidFill>
-                  <a:srgbClr val="000000"/>
-                </a:solidFill>
-              </a:rPr>
-              <a:t> </a:t>
-            </a:r>
-            <a:r>
-              <a:rPr lang="en-US" b="0" dirty="0">
-                <a:solidFill>
-                  <a:srgbClr val="000000"/>
-                </a:solidFill>
-              </a:rPr>
-              <a:t>/</a:t>
-            </a:r>
-            <a:r>
-              <a:rPr lang="en-US" b="0" spc="-10" dirty="0">
-                <a:solidFill>
-                  <a:srgbClr val="000000"/>
-                </a:solidFill>
-              </a:rPr>
-              <a:t> </a:t>
-            </a:r>
-            <a:r>
-              <a:rPr lang="en-US" b="0" dirty="0">
-                <a:solidFill>
-                  <a:srgbClr val="000000"/>
-                </a:solidFill>
-              </a:rPr>
-              <a:t>Git</a:t>
-            </a:r>
-            <a:r>
-              <a:rPr lang="en-US" b="0" spc="-15" dirty="0">
-                <a:solidFill>
-                  <a:srgbClr val="000000"/>
-                </a:solidFill>
-              </a:rPr>
-              <a:t> </a:t>
-            </a:r>
-            <a:r>
-              <a:rPr lang="en-US" b="0" dirty="0">
-                <a:solidFill>
-                  <a:srgbClr val="000000"/>
-                </a:solidFill>
-              </a:rPr>
-              <a:t>/</a:t>
-            </a:r>
-            <a:r>
-              <a:rPr lang="en-US" b="0" spc="-20" dirty="0">
-                <a:solidFill>
-                  <a:srgbClr val="000000"/>
-                </a:solidFill>
-              </a:rPr>
-              <a:t> </a:t>
-            </a:r>
-            <a:r>
-              <a:rPr lang="en-US" b="0" dirty="0">
-                <a:solidFill>
-                  <a:srgbClr val="000000"/>
-                </a:solidFill>
-              </a:rPr>
-              <a:t>Gitlab</a:t>
-            </a:r>
-            <a:r>
-              <a:rPr lang="en-US" b="0" spc="-25" dirty="0">
-                <a:solidFill>
-                  <a:srgbClr val="000000"/>
-                </a:solidFill>
-              </a:rPr>
-              <a:t> </a:t>
-            </a:r>
-            <a:r>
-              <a:rPr lang="en-US" b="0" dirty="0">
-                <a:solidFill>
-                  <a:srgbClr val="000000"/>
-                </a:solidFill>
-              </a:rPr>
-              <a:t>/</a:t>
-            </a:r>
-            <a:r>
-              <a:rPr lang="en-US" b="0" spc="-20" dirty="0">
-                <a:solidFill>
-                  <a:srgbClr val="000000"/>
-                </a:solidFill>
-              </a:rPr>
-              <a:t> </a:t>
-            </a:r>
-            <a:r>
-              <a:rPr lang="en-US" b="0" noProof="0" dirty="0">
-                <a:solidFill>
-                  <a:srgbClr val="000000"/>
-                </a:solidFill>
-                <a:latin typeface="Calibri"/>
-                <a:cs typeface="Calibri"/>
-              </a:rPr>
-              <a:t>Photoshop</a:t>
-            </a:r>
-            <a:r>
-              <a:rPr lang="en-US" b="0" spc="-30" noProof="0" dirty="0">
-                <a:solidFill>
-                  <a:srgbClr val="000000"/>
-                </a:solidFill>
-                <a:latin typeface="Calibri"/>
-                <a:cs typeface="Calibri"/>
-              </a:rPr>
-              <a:t> </a:t>
-            </a:r>
-            <a:r>
-              <a:rPr lang="en-US" b="0" noProof="0" dirty="0">
-                <a:solidFill>
-                  <a:srgbClr val="000000"/>
-                </a:solidFill>
-                <a:latin typeface="Calibri"/>
-                <a:cs typeface="Calibri"/>
-              </a:rPr>
-              <a:t>/</a:t>
-            </a:r>
-            <a:r>
-              <a:rPr lang="en-US" b="0" spc="-15" noProof="0" dirty="0">
-                <a:solidFill>
-                  <a:srgbClr val="000000"/>
-                </a:solidFill>
-                <a:latin typeface="Calibri"/>
-                <a:cs typeface="Calibri"/>
-              </a:rPr>
-              <a:t> </a:t>
-            </a:r>
-            <a:r>
-              <a:rPr lang="en-US" b="0" noProof="0" dirty="0">
-                <a:solidFill>
-                  <a:srgbClr val="000000"/>
-                </a:solidFill>
-                <a:latin typeface="Calibri"/>
-                <a:cs typeface="Calibri"/>
-              </a:rPr>
-              <a:t>Gimp</a:t>
-            </a:r>
-            <a:r>
-              <a:rPr lang="en-US" b="0" spc="-10" noProof="0" dirty="0">
-                <a:solidFill>
-                  <a:srgbClr val="000000"/>
-                </a:solidFill>
-                <a:latin typeface="Calibri"/>
-                <a:cs typeface="Calibri"/>
-              </a:rPr>
-              <a:t> </a:t>
-            </a:r>
-            <a:r>
-              <a:rPr lang="en-US" b="0" noProof="0" dirty="0">
-                <a:solidFill>
-                  <a:srgbClr val="000000"/>
-                </a:solidFill>
-                <a:latin typeface="Calibri"/>
-                <a:cs typeface="Calibri"/>
-              </a:rPr>
-              <a:t>/</a:t>
-            </a:r>
-            <a:r>
-              <a:rPr lang="en-US" b="0" spc="-15" noProof="0" dirty="0">
-                <a:solidFill>
-                  <a:srgbClr val="000000"/>
-                </a:solidFill>
-                <a:latin typeface="Calibri"/>
-                <a:cs typeface="Calibri"/>
-              </a:rPr>
-              <a:t> </a:t>
-            </a:r>
-            <a:r>
-              <a:rPr lang="en-US" b="0" spc="-15" noProof="0" dirty="0" err="1">
-                <a:solidFill>
-                  <a:srgbClr val="000000"/>
-                </a:solidFill>
-                <a:latin typeface="Calibri"/>
-                <a:cs typeface="Calibri"/>
-              </a:rPr>
-              <a:t>PlantUML</a:t>
-            </a:r>
-            <a:r>
-              <a:rPr lang="en-US" b="0" spc="-15" noProof="0" dirty="0">
-                <a:solidFill>
-                  <a:srgbClr val="000000"/>
-                </a:solidFill>
-                <a:latin typeface="Calibri"/>
-                <a:cs typeface="Calibri"/>
-              </a:rPr>
-              <a:t> </a:t>
-            </a:r>
-            <a:r>
-              <a:rPr lang="en-US" b="0" noProof="0" dirty="0">
-                <a:solidFill>
-                  <a:srgbClr val="000000"/>
-                </a:solidFill>
-                <a:latin typeface="Calibri"/>
-                <a:cs typeface="Calibri"/>
-              </a:rPr>
-              <a:t>/</a:t>
-            </a:r>
-            <a:r>
-              <a:rPr lang="en-US" b="0" spc="-15" noProof="0" dirty="0">
-                <a:solidFill>
-                  <a:srgbClr val="000000"/>
-                </a:solidFill>
-                <a:latin typeface="Calibri"/>
-                <a:cs typeface="Calibri"/>
-              </a:rPr>
-              <a:t> </a:t>
-            </a:r>
-            <a:r>
-              <a:rPr lang="en-US" b="0" noProof="0" dirty="0">
-                <a:solidFill>
-                  <a:srgbClr val="000000"/>
-                </a:solidFill>
-                <a:latin typeface="Calibri"/>
-                <a:cs typeface="Calibri"/>
-              </a:rPr>
-              <a:t>MySQL</a:t>
-            </a:r>
-            <a:r>
-              <a:rPr lang="en-US" b="0" spc="-15" noProof="0" dirty="0">
-                <a:solidFill>
-                  <a:srgbClr val="000000"/>
-                </a:solidFill>
-                <a:latin typeface="Calibri"/>
-                <a:cs typeface="Calibri"/>
-              </a:rPr>
-              <a:t> </a:t>
-            </a:r>
-            <a:r>
-              <a:rPr lang="en-US" b="0" spc="-10" noProof="0" dirty="0">
-                <a:solidFill>
-                  <a:srgbClr val="000000"/>
-                </a:solidFill>
-                <a:latin typeface="Calibri"/>
-                <a:cs typeface="Calibri"/>
-              </a:rPr>
-              <a:t>Workbench</a:t>
-            </a:r>
-            <a:r>
-              <a:rPr lang="en-US" b="0" spc="-40" noProof="0" dirty="0">
-                <a:solidFill>
-                  <a:srgbClr val="000000"/>
-                </a:solidFill>
-                <a:latin typeface="Calibri"/>
-                <a:cs typeface="Calibri"/>
-              </a:rPr>
-              <a:t> </a:t>
-            </a:r>
-            <a:r>
-              <a:rPr lang="en-US" b="0" dirty="0">
-                <a:solidFill>
-                  <a:srgbClr val="000000"/>
-                </a:solidFill>
-              </a:rPr>
-              <a:t>/</a:t>
-            </a:r>
-            <a:r>
-              <a:rPr lang="en-US" b="0" spc="-5" dirty="0">
-                <a:solidFill>
-                  <a:srgbClr val="000000"/>
-                </a:solidFill>
-              </a:rPr>
-              <a:t> </a:t>
-            </a:r>
-            <a:r>
-              <a:rPr lang="en-US" b="0" spc="-10" dirty="0">
-                <a:solidFill>
-                  <a:srgbClr val="000000"/>
-                </a:solidFill>
-              </a:rPr>
-              <a:t>WordPress</a:t>
-            </a:r>
-            <a:r>
-              <a:rPr lang="en-US" b="0" spc="-25" dirty="0">
-                <a:solidFill>
-                  <a:srgbClr val="000000"/>
-                </a:solidFill>
-              </a:rPr>
-              <a:t> </a:t>
-            </a:r>
-            <a:r>
-              <a:rPr lang="en-US" b="0" dirty="0">
-                <a:solidFill>
-                  <a:srgbClr val="000000"/>
-                </a:solidFill>
-              </a:rPr>
-              <a:t>/</a:t>
-            </a:r>
-            <a:r>
-              <a:rPr lang="en-US" b="0" spc="20" dirty="0">
-                <a:solidFill>
-                  <a:srgbClr val="000000"/>
-                </a:solidFill>
-              </a:rPr>
-              <a:t> </a:t>
-            </a:r>
-            <a:r>
-              <a:rPr lang="en-US" b="0" spc="-10" dirty="0" err="1">
-                <a:solidFill>
-                  <a:srgbClr val="000000"/>
-                </a:solidFill>
-              </a:rPr>
-              <a:t>PrestaShop</a:t>
-            </a:r>
-            <a:r>
-              <a:rPr lang="en-US" b="0" spc="-30" dirty="0">
-                <a:solidFill>
-                  <a:srgbClr val="000000"/>
-                </a:solidFill>
-              </a:rPr>
-              <a:t> </a:t>
-            </a:r>
-            <a:r>
-              <a:rPr lang="en-US" b="0" dirty="0">
-                <a:solidFill>
-                  <a:srgbClr val="000000"/>
-                </a:solidFill>
-              </a:rPr>
-              <a:t>/</a:t>
-            </a:r>
-            <a:r>
-              <a:rPr lang="en-US" b="0" spc="-10" dirty="0">
-                <a:solidFill>
-                  <a:srgbClr val="000000"/>
-                </a:solidFill>
-              </a:rPr>
-              <a:t> Joomla </a:t>
-            </a:r>
-            <a:r>
-              <a:rPr lang="en-US" b="0" noProof="0" dirty="0">
-                <a:solidFill>
-                  <a:srgbClr val="000000"/>
-                </a:solidFill>
-                <a:latin typeface="Calibri"/>
-                <a:cs typeface="Calibri"/>
-              </a:rPr>
-              <a:t>/</a:t>
-            </a:r>
-            <a:r>
-              <a:rPr lang="en-US" b="0" spc="-10" noProof="0" dirty="0">
-                <a:solidFill>
-                  <a:srgbClr val="000000"/>
-                </a:solidFill>
-                <a:latin typeface="Calibri"/>
-                <a:cs typeface="Calibri"/>
-              </a:rPr>
-              <a:t> Google </a:t>
-            </a:r>
-            <a:r>
-              <a:rPr lang="en-US" b="0" noProof="0" dirty="0">
-                <a:solidFill>
-                  <a:srgbClr val="000000"/>
-                </a:solidFill>
-                <a:latin typeface="Calibri"/>
-                <a:cs typeface="Calibri"/>
-              </a:rPr>
-              <a:t>Analytics</a:t>
-            </a:r>
-            <a:r>
-              <a:rPr lang="en-US" b="0" spc="-10" noProof="0" dirty="0">
-                <a:solidFill>
-                  <a:srgbClr val="000000"/>
-                </a:solidFill>
-                <a:latin typeface="Calibri"/>
-                <a:cs typeface="Calibri"/>
-              </a:rPr>
-              <a:t> </a:t>
-            </a:r>
-            <a:r>
-              <a:rPr lang="en-US" b="0" noProof="0" dirty="0">
-                <a:solidFill>
-                  <a:srgbClr val="000000"/>
-                </a:solidFill>
-                <a:latin typeface="Calibri"/>
-                <a:cs typeface="Calibri"/>
-              </a:rPr>
-              <a:t>/</a:t>
-            </a:r>
-            <a:r>
-              <a:rPr lang="en-US" b="0" spc="-15" noProof="0" dirty="0">
-                <a:solidFill>
-                  <a:srgbClr val="000000"/>
-                </a:solidFill>
-                <a:latin typeface="Calibri"/>
-                <a:cs typeface="Calibri"/>
-              </a:rPr>
-              <a:t> </a:t>
-            </a:r>
-            <a:r>
-              <a:rPr lang="en-US" b="0" noProof="0" dirty="0">
-                <a:solidFill>
-                  <a:srgbClr val="000000"/>
-                </a:solidFill>
-                <a:latin typeface="Calibri"/>
-                <a:cs typeface="Calibri"/>
-              </a:rPr>
-              <a:t>AdSense</a:t>
-            </a:r>
-            <a:r>
-              <a:rPr lang="en-US" b="0" spc="-15" noProof="0" dirty="0">
-                <a:solidFill>
-                  <a:srgbClr val="000000"/>
-                </a:solidFill>
-                <a:latin typeface="Calibri"/>
-                <a:cs typeface="Calibri"/>
-              </a:rPr>
-              <a:t> </a:t>
-            </a:r>
-            <a:r>
-              <a:rPr lang="en-US" b="0" noProof="0" dirty="0">
-                <a:solidFill>
-                  <a:srgbClr val="000000"/>
-                </a:solidFill>
-                <a:latin typeface="Calibri"/>
-                <a:cs typeface="Calibri"/>
-              </a:rPr>
-              <a:t>/</a:t>
-            </a:r>
-            <a:r>
-              <a:rPr lang="en-US" b="0" spc="-5" noProof="0" dirty="0">
-                <a:solidFill>
-                  <a:srgbClr val="000000"/>
-                </a:solidFill>
-                <a:latin typeface="Calibri"/>
-                <a:cs typeface="Calibri"/>
-              </a:rPr>
-              <a:t> </a:t>
-            </a:r>
-            <a:r>
-              <a:rPr lang="en-US" b="0" spc="-10" noProof="0" dirty="0">
-                <a:solidFill>
-                  <a:srgbClr val="000000"/>
-                </a:solidFill>
-                <a:latin typeface="Calibri"/>
-                <a:cs typeface="Calibri"/>
-              </a:rPr>
-              <a:t>AdWords</a:t>
-            </a:r>
-            <a:r>
-              <a:rPr lang="en-US" b="0" spc="-40" noProof="0" dirty="0">
-                <a:solidFill>
-                  <a:srgbClr val="000000"/>
-                </a:solidFill>
-                <a:latin typeface="Calibri"/>
-                <a:cs typeface="Calibri"/>
-              </a:rPr>
-              <a:t> </a:t>
-            </a:r>
-            <a:r>
-              <a:rPr lang="en-US" b="0" spc="-20" noProof="0" dirty="0">
-                <a:solidFill>
-                  <a:srgbClr val="000000"/>
-                </a:solidFill>
-                <a:latin typeface="Calibri"/>
-                <a:cs typeface="Calibri"/>
-              </a:rPr>
-              <a:t>…</a:t>
+              <a:t>: Full remote collaboration / mentoring / code reviews / observability / incident analysis / agile delivery</a:t>
             </a:r>
           </a:p>
         </p:txBody>
@@ -17220,27 +11468,7 @@
                 <a:latin typeface="Calibri"/>
                 <a:cs typeface="Calibri"/>
               </a:rPr>
-              <a:t>PERSONAL</a:t>
-            </a:r>
-            <a:r>
-              <a:rPr lang="en-US" sz="1800" b="1" spc="-50" noProof="0" dirty="0">
-                <a:solidFill>
-                  <a:srgbClr val="FFFFFF"/>
-                </a:solidFill>
-                <a:latin typeface="Calibri"/>
-                <a:cs typeface="Calibri"/>
-              </a:rPr>
-              <a:t> </a:t>
-            </a:r>
-            <a:r>
-              <a:rPr lang="en-US" sz="1800" b="1" spc="-10" noProof="0" dirty="0">
-                <a:solidFill>
-                  <a:srgbClr val="FFFFFF"/>
-                </a:solidFill>
-                <a:latin typeface="Calibri"/>
-                <a:cs typeface="Calibri"/>
-              </a:rPr>
-              <a:t>ACHIEVEMENTS</a:t>
+              <a:t>PERSONAL WEBSITE</a:t>
             </a:r>
             <a:endParaRPr lang="en-US" sz="1800" noProof="0" dirty="0">
               <a:latin typeface="Calibri"/>
@@ -17263,7 +11491,7 @@
         </p:nvSpPr>
         <p:spPr>
           <a:xfrm>
-            <a:off x="2334895" y="9712196"/>
+            <a:off x="2334895" y="9600000"/>
             <a:ext cx="4599305" cy="209353"/>
           </a:xfrm>
           <a:prstGeom prst="rect">
@@ -17288,33 +11516,16 @@
               </a:spcBef>
             </a:pPr>
             <a:r>
-              <a:rPr lang="en-US" sz="1200" noProof="0" dirty="0">
+              <a:rPr lang="en-US" sz="1200" b="1" noProof="0" dirty="0">
                 <a:solidFill>
                   <a:srgbClr val="396278"/>
                 </a:solidFill>
                 <a:latin typeface="Arial"/>
                 <a:cs typeface="Arial"/>
               </a:rPr>
-              <a:t>Please visit </a:t>
-            </a:r>
-            <a:r>
-              <a:rPr lang="en-US" sz="1200" b="1" noProof="0" dirty="0">
-                <a:solidFill>
-                  <a:srgbClr val="396278"/>
-                </a:solidFill>
-                <a:latin typeface="Arial"/>
-                <a:cs typeface="Arial"/>
-                <a:hlinkClick r:id="rId11">
-                  <a:extLst>
-                    <a:ext uri="{A12FA001-AC4F-418D-AE19-62706E023703}">
-                      <ahyp:hlinkClr xmlns:ahyp="http://schemas.microsoft.com/office/drawing/2018/hyperlinkcolor" val="tx"/>
-                    </a:ext>
-                  </a:extLst>
-                </a:hlinkClick>
-              </a:rPr>
               <a:t>www.antoinechedebois.com</a:t>
             </a:r>
-            <a:endParaRPr lang="en-US" sz="1000" noProof="0" dirty="0">
+            <a:endParaRPr lang="en-US" sz="1000" b="1" noProof="0" dirty="0">
               <a:solidFill>
                 <a:srgbClr val="396278"/>
               </a:solidFill>

--- a/assets/pdf/CV_Antoine_CHEDEBOIS_GB.pptx
+++ b/assets/pdf/CV_Antoine_CHEDEBOIS_GB.pptx
@@ -2964,7 +2964,7 @@
         <p:spPr>
           <a:xfrm>
             <a:off x="323799" y="1925472"/>
-            <a:ext cx="1717675" cy="1161415"/>
+            <a:ext cx="1896745" cy="947054"/>
           </a:xfrm>
           <a:prstGeom prst="rect">
             <a:avLst/>
@@ -2975,64 +2975,6 @@
             <a:spAutoFit/>
           </a:bodyPr>
           <a:lstStyle/>
-          <a:p>
-            <a:pPr marL="84455" indent="-71755">
-              <a:lnSpc>
-                <a:spcPct val="100000"/>
-              </a:lnSpc>
-              <a:spcBef>
-                <a:spcPts val="685"/>
-              </a:spcBef>
-              <a:buFont typeface="Arial"/>
-              <a:buChar char="•"/>
-              <a:tabLst>
-                <a:tab pos="84455" algn="l"/>
-              </a:tabLst>
-            </a:pPr>
-            <a:r>
-              <a:rPr lang="en-US" sz="1000" noProof="0" dirty="0">
-                <a:solidFill>
-                  <a:srgbClr val="FFFFFF"/>
-                </a:solidFill>
-                <a:latin typeface="Calibri"/>
-                <a:cs typeface="Calibri"/>
-              </a:rPr>
-              <a:t>Remote from France - Paris</a:t>
-            </a:r>
-            <a:endParaRPr lang="en-US" sz="1000" noProof="0" dirty="0">
-              <a:latin typeface="Calibri"/>
-              <a:cs typeface="Calibri"/>
-            </a:endParaRPr>
-          </a:p>
-          <a:p>
-            <a:pPr marL="84455" indent="-71755">
-              <a:lnSpc>
-                <a:spcPct val="100000"/>
-              </a:lnSpc>
-              <a:spcBef>
-                <a:spcPts val="590"/>
-              </a:spcBef>
-              <a:buFont typeface="Arial"/>
-              <a:buChar char="•"/>
-              <a:tabLst>
-                <a:tab pos="84455" algn="l"/>
-              </a:tabLst>
-            </a:pPr>
-            <a:r>
-              <a:rPr lang="en-US" sz="1000" noProof="0" dirty="0">
-                <a:solidFill>
-                  <a:srgbClr val="FFFFFF"/>
-                </a:solidFill>
-                <a:latin typeface="Calibri"/>
-                <a:cs typeface="Calibri"/>
-              </a:rPr>
-              <a:t>Hands-on Full Stack roles</a:t>
-            </a:r>
-            <a:endParaRPr lang="en-US" sz="1000" noProof="0" dirty="0">
-              <a:latin typeface="Calibri"/>
-              <a:cs typeface="Calibri"/>
-            </a:endParaRPr>
-          </a:p>
           <a:p>
             <a:pPr marL="12700">
               <a:lnSpc>
@@ -3127,10 +3069,36 @@
               </a:rPr>
               <a:t>antoinechedebois.com</a:t>
             </a:r>
-            <a:endParaRPr lang="en-US" sz="1000" noProof="0" dirty="0">
+            <a:endParaRPr lang="en-US" sz="1000" b="1" spc="-10" noProof="0" dirty="0">
               <a:solidFill>
                 <a:schemeClr val="bg1"/>
               </a:solidFill>
+              <a:latin typeface="Calibri"/>
+              <a:cs typeface="Calibri"/>
+            </a:endParaRPr>
+          </a:p>
+          <a:p>
+            <a:pPr marL="84455" indent="-71755">
+              <a:spcBef>
+                <a:spcPts val="710"/>
+              </a:spcBef>
+              <a:buFont typeface="Arial"/>
+              <a:buChar char="•"/>
+              <a:tabLst>
+                <a:tab pos="84455" algn="l"/>
+              </a:tabLst>
+            </a:pPr>
+            <a:r>
+              <a:rPr lang="en-US" sz="1000" noProof="0" dirty="0">
+                <a:solidFill>
+                  <a:srgbClr val="FFFFFF"/>
+                </a:solidFill>
+                <a:latin typeface="Calibri"/>
+                <a:cs typeface="Calibri"/>
+              </a:rPr>
+              <a:t>Remote from France – Paris Area</a:t>
+            </a:r>
+            <a:endParaRPr lang="en-US" sz="1000" noProof="0" dirty="0">
               <a:latin typeface="Calibri"/>
               <a:cs typeface="Calibri"/>
             </a:endParaRPr>
@@ -3145,7 +3113,7 @@
         </p:nvSpPr>
         <p:spPr>
           <a:xfrm>
-            <a:off x="2348230" y="4767740"/>
+            <a:off x="2348230" y="4891565"/>
             <a:ext cx="4419726" cy="1099660"/>
           </a:xfrm>
           <a:prstGeom prst="rect">
@@ -3251,7 +3219,7 @@
         </p:nvSpPr>
         <p:spPr>
           <a:xfrm>
-            <a:off x="2343150" y="5963920"/>
+            <a:off x="2343150" y="6120772"/>
             <a:ext cx="4419726" cy="813428"/>
           </a:xfrm>
           <a:prstGeom prst="rect">
@@ -3361,8 +3329,8 @@
         </p:nvSpPr>
         <p:spPr>
           <a:xfrm>
-            <a:off x="2348230" y="6969760"/>
-            <a:ext cx="4405756" cy="953338"/>
+            <a:off x="2348230" y="7098882"/>
+            <a:ext cx="4509770" cy="673518"/>
           </a:xfrm>
           <a:prstGeom prst="rect">
             <a:avLst/>
@@ -3433,29 +3401,8 @@
                 <a:latin typeface="Calibri"/>
                 <a:cs typeface="Calibri"/>
               </a:rPr>
-              <a:t>Developed SaaS features for insurance brokers with end-to-end ownership from design to delivery. Managed releases, technical documentation and small projects.</a:t>
-            </a:r>
-          </a:p>
-          <a:p>
-            <a:pPr marL="177165" marR="132080">
-              <a:lnSpc>
-                <a:spcPct val="101099"/>
-              </a:lnSpc>
-              <a:spcBef>
-                <a:spcPts val="10"/>
-              </a:spcBef>
-            </a:pPr>
-            <a:r>
-              <a:rPr lang="en-US" sz="900" i="1" noProof="0" dirty="0">
-                <a:latin typeface="Calibri"/>
-                <a:cs typeface="Calibri"/>
-              </a:rPr>
-              <a:t>Stack: JavaScript, Ajax, MVC, PHP, MySQL, Apache, Bootstrap, SASS, Linux...</a:t>
-            </a:r>
-            <a:endParaRPr lang="en-US" sz="900" noProof="0" dirty="0">
-              <a:latin typeface="Calibri"/>
-              <a:cs typeface="Calibri"/>
-            </a:endParaRPr>
+              <a:t>SaaS features for insurance brokers with end-to-end ownership from design to delivery. </a:t>
+            </a:r>
           </a:p>
         </p:txBody>
       </p:sp>
@@ -3467,7 +3414,7 @@
         </p:nvSpPr>
         <p:spPr>
           <a:xfrm>
-            <a:off x="2340736" y="7989623"/>
+            <a:off x="2329180" y="7924800"/>
             <a:ext cx="4419726" cy="551180"/>
           </a:xfrm>
           <a:prstGeom prst="rect">
@@ -3682,8 +3629,8 @@
         </p:nvSpPr>
         <p:spPr>
           <a:xfrm>
-            <a:off x="2494788" y="1178052"/>
-            <a:ext cx="4191000" cy="527723"/>
+            <a:off x="2494788" y="1111377"/>
+            <a:ext cx="4191000" cy="681611"/>
           </a:xfrm>
           <a:prstGeom prst="rect">
             <a:avLst/>
@@ -3714,7 +3661,7 @@
                 <a:latin typeface="Calibri"/>
                 <a:cs typeface="Calibri"/>
               </a:rPr>
-              <a:t>Senior Full Stack Engineer &amp; hands-on Tech Lead with 25+ years' experience, including 6 years at Amazon in full remote. I build and run modern web products with TypeScript, React/Vue/Angular/Astro, Python, PHP and AWS.</a:t>
+              <a:t>Ex-Amazon Senior Software Engineer and hands-on Tech Lead with 25+ years of experience designing, delivering and operating cloud-native web platforms. AWS-certified, with strong ownership across full-stack development, CI/CD, observability, production reliability and AI-assisted developer productivity.</a:t>
             </a:r>
             <a:endParaRPr lang="en-US" sz="1000" noProof="0" dirty="0">
               <a:latin typeface="Calibri"/>
@@ -4230,7 +4177,7 @@
                 <a:latin typeface="Calibri"/>
                 <a:cs typeface="Calibri"/>
               </a:rPr>
-              <a:t>JavaScript / TypeScript</a:t>
+              <a:t>Frontend</a:t>
             </a:r>
             <a:endParaRPr lang="en-US" sz="1200" noProof="0" dirty="0">
               <a:latin typeface="Calibri"/>
@@ -4247,7 +4194,7 @@
         </p:nvSpPr>
         <p:spPr>
           <a:xfrm>
-            <a:off x="389255" y="5004181"/>
+            <a:off x="383349" y="5312914"/>
             <a:ext cx="1896745" cy="197490"/>
           </a:xfrm>
           <a:prstGeom prst="rect">
@@ -4276,7 +4223,7 @@
                 <a:latin typeface="Calibri"/>
                 <a:cs typeface="Calibri"/>
               </a:rPr>
-              <a:t>Full Stack / Node.js / APIs</a:t>
+              <a:t>Database</a:t>
             </a:r>
             <a:endParaRPr lang="en-US" sz="1200" noProof="0" dirty="0">
               <a:latin typeface="Calibri"/>
@@ -4285,234 +4232,6 @@
           </a:p>
         </p:txBody>
       </p:sp>
-      <p:grpSp>
-        <p:nvGrpSpPr>
-          <p:cNvPr id="46" name="object 46"/>
-          <p:cNvGrpSpPr/>
-          <p:nvPr/>
-        </p:nvGrpSpPr>
-        <p:grpSpPr>
-          <a:xfrm>
-            <a:off x="732155" y="4216781"/>
-            <a:ext cx="1202690" cy="218440"/>
-            <a:chOff x="647700" y="4881371"/>
-            <a:chExt cx="1202690" cy="218440"/>
-          </a:xfrm>
-        </p:grpSpPr>
-        <p:pic>
-          <p:nvPicPr>
-            <p:cNvPr id="47" name="object 47"/>
-            <p:cNvPicPr/>
-            <p:nvPr/>
-          </p:nvPicPr>
-          <p:blipFill>
-            <a:blip r:embed="rId11" cstate="print"/>
-            <a:stretch>
-              <a:fillRect/>
-            </a:stretch>
-          </p:blipFill>
-          <p:spPr>
-            <a:xfrm>
-              <a:off x="647700" y="4882895"/>
-              <a:ext cx="216408" cy="216407"/>
-            </a:xfrm>
-            <a:prstGeom prst="rect">
-              <a:avLst/>
-            </a:prstGeom>
-          </p:spPr>
-        </p:pic>
-        <p:pic>
-          <p:nvPicPr>
-            <p:cNvPr id="48" name="object 48"/>
-            <p:cNvPicPr/>
-            <p:nvPr/>
-          </p:nvPicPr>
-          <p:blipFill>
-            <a:blip r:embed="rId11" cstate="print"/>
-            <a:stretch>
-              <a:fillRect/>
-            </a:stretch>
-          </p:blipFill>
-          <p:spPr>
-            <a:xfrm>
-              <a:off x="893063" y="4882895"/>
-              <a:ext cx="217932" cy="216407"/>
-            </a:xfrm>
-            <a:prstGeom prst="rect">
-              <a:avLst/>
-            </a:prstGeom>
-          </p:spPr>
-        </p:pic>
-        <p:pic>
-          <p:nvPicPr>
-            <p:cNvPr id="49" name="object 49"/>
-            <p:cNvPicPr/>
-            <p:nvPr/>
-          </p:nvPicPr>
-          <p:blipFill>
-            <a:blip r:embed="rId12" cstate="print"/>
-            <a:stretch>
-              <a:fillRect/>
-            </a:stretch>
-          </p:blipFill>
-          <p:spPr>
-            <a:xfrm>
-              <a:off x="1139951" y="4882895"/>
-              <a:ext cx="217931" cy="216407"/>
-            </a:xfrm>
-            <a:prstGeom prst="rect">
-              <a:avLst/>
-            </a:prstGeom>
-          </p:spPr>
-        </p:pic>
-        <p:pic>
-          <p:nvPicPr>
-            <p:cNvPr id="50" name="object 50"/>
-            <p:cNvPicPr/>
-            <p:nvPr/>
-          </p:nvPicPr>
-          <p:blipFill>
-            <a:blip r:embed="rId13" cstate="print"/>
-            <a:stretch>
-              <a:fillRect/>
-            </a:stretch>
-          </p:blipFill>
-          <p:spPr>
-            <a:xfrm>
-              <a:off x="1400555" y="4881371"/>
-              <a:ext cx="449580" cy="217931"/>
-            </a:xfrm>
-            <a:prstGeom prst="rect">
-              <a:avLst/>
-            </a:prstGeom>
-          </p:spPr>
-        </p:pic>
-      </p:grpSp>
-      <p:grpSp>
-        <p:nvGrpSpPr>
-          <p:cNvPr id="51" name="object 51"/>
-          <p:cNvGrpSpPr/>
-          <p:nvPr/>
-        </p:nvGrpSpPr>
-        <p:grpSpPr>
-          <a:xfrm>
-            <a:off x="732155" y="5283581"/>
-            <a:ext cx="1202690" cy="218440"/>
-            <a:chOff x="647700" y="5494020"/>
-            <a:chExt cx="1202690" cy="218440"/>
-          </a:xfrm>
-        </p:grpSpPr>
-        <p:pic>
-          <p:nvPicPr>
-            <p:cNvPr id="52" name="object 52"/>
-            <p:cNvPicPr/>
-            <p:nvPr/>
-          </p:nvPicPr>
-          <p:blipFill>
-            <a:blip r:embed="rId14" cstate="print"/>
-            <a:stretch>
-              <a:fillRect/>
-            </a:stretch>
-          </p:blipFill>
-          <p:spPr>
-            <a:xfrm>
-              <a:off x="647700" y="5495544"/>
-              <a:ext cx="216408" cy="216407"/>
-            </a:xfrm>
-            <a:prstGeom prst="rect">
-              <a:avLst/>
-            </a:prstGeom>
-          </p:spPr>
-        </p:pic>
-        <p:pic>
-          <p:nvPicPr>
-            <p:cNvPr id="53" name="object 53"/>
-            <p:cNvPicPr/>
-            <p:nvPr/>
-          </p:nvPicPr>
-          <p:blipFill>
-            <a:blip r:embed="rId14" cstate="print"/>
-            <a:stretch>
-              <a:fillRect/>
-            </a:stretch>
-          </p:blipFill>
-          <p:spPr>
-            <a:xfrm>
-              <a:off x="893063" y="5495544"/>
-              <a:ext cx="217932" cy="216407"/>
-            </a:xfrm>
-            <a:prstGeom prst="rect">
-              <a:avLst/>
-            </a:prstGeom>
-          </p:spPr>
-        </p:pic>
-        <p:pic>
-          <p:nvPicPr>
-            <p:cNvPr id="54" name="object 54"/>
-            <p:cNvPicPr/>
-            <p:nvPr/>
-          </p:nvPicPr>
-          <p:blipFill>
-            <a:blip r:embed="rId15" cstate="print"/>
-            <a:stretch>
-              <a:fillRect/>
-            </a:stretch>
-          </p:blipFill>
-          <p:spPr>
-            <a:xfrm>
-              <a:off x="1139951" y="5495544"/>
-              <a:ext cx="217931" cy="216407"/>
-            </a:xfrm>
-            <a:prstGeom prst="rect">
-              <a:avLst/>
-            </a:prstGeom>
-          </p:spPr>
-        </p:pic>
-        <p:pic>
-          <p:nvPicPr>
-            <p:cNvPr id="55" name="object 55"/>
-            <p:cNvPicPr/>
-            <p:nvPr/>
-          </p:nvPicPr>
-          <p:blipFill>
-            <a:blip r:embed="rId16" cstate="print"/>
-            <a:stretch>
-              <a:fillRect/>
-            </a:stretch>
-          </p:blipFill>
-          <p:spPr>
-            <a:xfrm>
-              <a:off x="1633727" y="5495544"/>
-              <a:ext cx="216408" cy="216407"/>
-            </a:xfrm>
-            <a:prstGeom prst="rect">
-              <a:avLst/>
-            </a:prstGeom>
-          </p:spPr>
-        </p:pic>
-        <p:pic>
-          <p:nvPicPr>
-            <p:cNvPr id="56" name="object 56"/>
-            <p:cNvPicPr/>
-            <p:nvPr/>
-          </p:nvPicPr>
-          <p:blipFill>
-            <a:blip r:embed="rId17" cstate="print"/>
-            <a:stretch>
-              <a:fillRect/>
-            </a:stretch>
-          </p:blipFill>
-          <p:spPr>
-            <a:xfrm>
-              <a:off x="1385316" y="5494020"/>
-              <a:ext cx="217931" cy="217931"/>
-            </a:xfrm>
-            <a:prstGeom prst="rect">
-              <a:avLst/>
-            </a:prstGeom>
-          </p:spPr>
-        </p:pic>
-      </p:grpSp>
       <p:sp>
         <p:nvSpPr>
           <p:cNvPr id="64" name="object 64"/>
@@ -4521,8 +4240,8 @@
         </p:nvSpPr>
         <p:spPr>
           <a:xfrm>
-            <a:off x="389661" y="5548504"/>
-            <a:ext cx="1736268" cy="197490"/>
+            <a:off x="389661" y="5486400"/>
+            <a:ext cx="1736268" cy="566822"/>
           </a:xfrm>
           <a:prstGeom prst="rect">
             <a:avLst/>
@@ -4543,14 +4262,14 @@
               </a:spcBef>
             </a:pPr>
             <a:r>
-              <a:rPr lang="en-US" sz="1200" b="1" noProof="0" dirty="0">
+              <a:rPr lang="en-US" sz="1200" dirty="0">
                 <a:solidFill>
                   <a:srgbClr val="FFFFFF"/>
                 </a:solidFill>
                 <a:latin typeface="Calibri"/>
                 <a:cs typeface="Calibri"/>
               </a:rPr>
-              <a:t>SQL / NoSQL / Data</a:t>
+              <a:t>MySQL, PostgreSQL, DynamoDB, Redis, OpenSearch…</a:t>
             </a:r>
             <a:endParaRPr lang="en-US" sz="1200" noProof="0" dirty="0">
               <a:latin typeface="Calibri"/>
@@ -4559,109 +4278,6 @@
           </a:p>
         </p:txBody>
       </p:sp>
-      <p:grpSp>
-        <p:nvGrpSpPr>
-          <p:cNvPr id="65" name="object 65"/>
-          <p:cNvGrpSpPr/>
-          <p:nvPr/>
-        </p:nvGrpSpPr>
-        <p:grpSpPr>
-          <a:xfrm>
-            <a:off x="738250" y="5817490"/>
-            <a:ext cx="1202435" cy="217931"/>
-            <a:chOff x="653795" y="6659880"/>
-            <a:chExt cx="1202435" cy="217931"/>
-          </a:xfrm>
-        </p:grpSpPr>
-        <p:pic>
-          <p:nvPicPr>
-            <p:cNvPr id="66" name="object 66"/>
-            <p:cNvPicPr/>
-            <p:nvPr/>
-          </p:nvPicPr>
-          <p:blipFill>
-            <a:blip r:embed="rId18" cstate="print"/>
-            <a:stretch>
-              <a:fillRect/>
-            </a:stretch>
-          </p:blipFill>
-          <p:spPr>
-            <a:xfrm>
-              <a:off x="653795" y="6659880"/>
-              <a:ext cx="216408" cy="217931"/>
-            </a:xfrm>
-            <a:prstGeom prst="rect">
-              <a:avLst/>
-            </a:prstGeom>
-          </p:spPr>
-        </p:pic>
-        <p:pic>
-          <p:nvPicPr>
-            <p:cNvPr id="67" name="object 67"/>
-            <p:cNvPicPr/>
-            <p:nvPr/>
-          </p:nvPicPr>
-          <p:blipFill>
-            <a:blip r:embed="rId19" cstate="print"/>
-            <a:stretch>
-              <a:fillRect/>
-            </a:stretch>
-          </p:blipFill>
-          <p:spPr>
-            <a:xfrm>
-              <a:off x="899159" y="6659880"/>
-              <a:ext cx="217931" cy="217931"/>
-            </a:xfrm>
-            <a:prstGeom prst="rect">
-              <a:avLst/>
-            </a:prstGeom>
-          </p:spPr>
-        </p:pic>
-        <p:pic>
-          <p:nvPicPr>
-            <p:cNvPr id="68" name="object 68"/>
-            <p:cNvPicPr/>
-            <p:nvPr/>
-          </p:nvPicPr>
-          <p:blipFill>
-            <a:blip r:embed="rId8" cstate="print"/>
-            <a:stretch>
-              <a:fillRect/>
-            </a:stretch>
-          </p:blipFill>
-          <p:spPr>
-            <a:xfrm>
-              <a:off x="1146047" y="6659880"/>
-              <a:ext cx="217932" cy="217931"/>
-            </a:xfrm>
-            <a:prstGeom prst="rect">
-              <a:avLst/>
-            </a:prstGeom>
-          </p:spPr>
-        </p:pic>
-        <p:pic>
-          <p:nvPicPr>
-            <p:cNvPr id="69" name="object 69"/>
-            <p:cNvPicPr/>
-            <p:nvPr/>
-          </p:nvPicPr>
-          <p:blipFill>
-            <a:blip r:embed="rId20" cstate="print"/>
-            <a:stretch>
-              <a:fillRect/>
-            </a:stretch>
-          </p:blipFill>
-          <p:spPr>
-            <a:xfrm>
-              <a:off x="1639823" y="6659880"/>
-              <a:ext cx="216407" cy="217931"/>
-            </a:xfrm>
-            <a:prstGeom prst="rect">
-              <a:avLst/>
-            </a:prstGeom>
-          </p:spPr>
-        </p:pic>
-      </p:grpSp>
       <p:sp>
         <p:nvSpPr>
           <p:cNvPr id="71" name="object 71"/>
@@ -4670,7 +4286,7 @@
         </p:nvSpPr>
         <p:spPr>
           <a:xfrm>
-            <a:off x="388620" y="6080759"/>
+            <a:off x="391160" y="6211288"/>
             <a:ext cx="1776095" cy="197490"/>
           </a:xfrm>
           <a:prstGeom prst="rect">
@@ -4708,131 +4324,6 @@
           </a:p>
         </p:txBody>
       </p:sp>
-      <p:grpSp>
-        <p:nvGrpSpPr>
-          <p:cNvPr id="72" name="object 72"/>
-          <p:cNvGrpSpPr/>
-          <p:nvPr/>
-        </p:nvGrpSpPr>
-        <p:grpSpPr>
-          <a:xfrm>
-            <a:off x="738250" y="6324600"/>
-            <a:ext cx="1202690" cy="218440"/>
-            <a:chOff x="653795" y="7271004"/>
-            <a:chExt cx="1202690" cy="218440"/>
-          </a:xfrm>
-        </p:grpSpPr>
-        <p:pic>
-          <p:nvPicPr>
-            <p:cNvPr id="73" name="object 73"/>
-            <p:cNvPicPr/>
-            <p:nvPr/>
-          </p:nvPicPr>
-          <p:blipFill>
-            <a:blip r:embed="rId21" cstate="print"/>
-            <a:stretch>
-              <a:fillRect/>
-            </a:stretch>
-          </p:blipFill>
-          <p:spPr>
-            <a:xfrm>
-              <a:off x="653795" y="7271004"/>
-              <a:ext cx="216408" cy="216407"/>
-            </a:xfrm>
-            <a:prstGeom prst="rect">
-              <a:avLst/>
-            </a:prstGeom>
-          </p:spPr>
-        </p:pic>
-        <p:pic>
-          <p:nvPicPr>
-            <p:cNvPr id="74" name="object 74"/>
-            <p:cNvPicPr/>
-            <p:nvPr/>
-          </p:nvPicPr>
-          <p:blipFill>
-            <a:blip r:embed="rId15" cstate="print"/>
-            <a:stretch>
-              <a:fillRect/>
-            </a:stretch>
-          </p:blipFill>
-          <p:spPr>
-            <a:xfrm>
-              <a:off x="899159" y="7271004"/>
-              <a:ext cx="217931" cy="216407"/>
-            </a:xfrm>
-            <a:prstGeom prst="rect">
-              <a:avLst/>
-            </a:prstGeom>
-          </p:spPr>
-        </p:pic>
-        <p:pic>
-          <p:nvPicPr>
-            <p:cNvPr id="75" name="object 75"/>
-            <p:cNvPicPr/>
-            <p:nvPr/>
-          </p:nvPicPr>
-          <p:blipFill>
-            <a:blip r:embed="rId14" cstate="print"/>
-            <a:stretch>
-              <a:fillRect/>
-            </a:stretch>
-          </p:blipFill>
-          <p:spPr>
-            <a:xfrm>
-              <a:off x="1146047" y="7271004"/>
-              <a:ext cx="217932" cy="216407"/>
-            </a:xfrm>
-            <a:prstGeom prst="rect">
-              <a:avLst/>
-            </a:prstGeom>
-          </p:spPr>
-        </p:pic>
-        <p:pic>
-          <p:nvPicPr>
-            <p:cNvPr id="76" name="object 76"/>
-            <p:cNvPicPr/>
-            <p:nvPr/>
-          </p:nvPicPr>
-          <p:blipFill>
-            <a:blip r:embed="rId22" cstate="print"/>
-            <a:stretch>
-              <a:fillRect/>
-            </a:stretch>
-          </p:blipFill>
-          <p:spPr>
-            <a:xfrm>
-              <a:off x="1639823" y="7271004"/>
-              <a:ext cx="216407" cy="216407"/>
-            </a:xfrm>
-            <a:prstGeom prst="rect">
-              <a:avLst/>
-            </a:prstGeom>
-          </p:spPr>
-        </p:pic>
-        <p:pic>
-          <p:nvPicPr>
-            <p:cNvPr id="77" name="object 77"/>
-            <p:cNvPicPr/>
-            <p:nvPr/>
-          </p:nvPicPr>
-          <p:blipFill>
-            <a:blip r:embed="rId23" cstate="print"/>
-            <a:stretch>
-              <a:fillRect/>
-            </a:stretch>
-          </p:blipFill>
-          <p:spPr>
-            <a:xfrm>
-              <a:off x="1394459" y="7272528"/>
-              <a:ext cx="216408" cy="216408"/>
-            </a:xfrm>
-            <a:prstGeom prst="rect">
-              <a:avLst/>
-            </a:prstGeom>
-          </p:spPr>
-        </p:pic>
-      </p:grpSp>
       <p:sp>
         <p:nvSpPr>
           <p:cNvPr id="78" name="object 78"/>
@@ -4841,8 +4332,8 @@
         </p:nvSpPr>
         <p:spPr>
           <a:xfrm>
-            <a:off x="391160" y="7566025"/>
-            <a:ext cx="1750695" cy="208279"/>
+            <a:off x="375234" y="7803667"/>
+            <a:ext cx="1750695" cy="197490"/>
           </a:xfrm>
           <a:prstGeom prst="rect">
             <a:avLst/>
@@ -4870,7 +4361,7 @@
                 <a:latin typeface="Calibri"/>
                 <a:cs typeface="Calibri"/>
               </a:rPr>
-              <a:t>Product Engineering</a:t>
+              <a:t>AI Development</a:t>
             </a:r>
             <a:endParaRPr lang="en-US" sz="1200" noProof="0" dirty="0">
               <a:latin typeface="Calibri"/>
@@ -4879,131 +4370,6 @@
           </a:p>
         </p:txBody>
       </p:sp>
-      <p:grpSp>
-        <p:nvGrpSpPr>
-          <p:cNvPr id="79" name="object 79"/>
-          <p:cNvGrpSpPr/>
-          <p:nvPr/>
-        </p:nvGrpSpPr>
-        <p:grpSpPr>
-          <a:xfrm>
-            <a:off x="758648" y="7802880"/>
-            <a:ext cx="1203960" cy="222885"/>
-            <a:chOff x="658368" y="7882128"/>
-            <a:chExt cx="1203960" cy="222885"/>
-          </a:xfrm>
-        </p:grpSpPr>
-        <p:pic>
-          <p:nvPicPr>
-            <p:cNvPr id="80" name="object 80"/>
-            <p:cNvPicPr/>
-            <p:nvPr/>
-          </p:nvPicPr>
-          <p:blipFill>
-            <a:blip r:embed="rId19" cstate="print"/>
-            <a:stretch>
-              <a:fillRect/>
-            </a:stretch>
-          </p:blipFill>
-          <p:spPr>
-            <a:xfrm>
-              <a:off x="658368" y="7886700"/>
-              <a:ext cx="217931" cy="217931"/>
-            </a:xfrm>
-            <a:prstGeom prst="rect">
-              <a:avLst/>
-            </a:prstGeom>
-          </p:spPr>
-        </p:pic>
-        <p:pic>
-          <p:nvPicPr>
-            <p:cNvPr id="81" name="object 81"/>
-            <p:cNvPicPr/>
-            <p:nvPr/>
-          </p:nvPicPr>
-          <p:blipFill>
-            <a:blip r:embed="rId19" cstate="print"/>
-            <a:stretch>
-              <a:fillRect/>
-            </a:stretch>
-          </p:blipFill>
-          <p:spPr>
-            <a:xfrm>
-              <a:off x="905256" y="7886700"/>
-              <a:ext cx="217931" cy="217931"/>
-            </a:xfrm>
-            <a:prstGeom prst="rect">
-              <a:avLst/>
-            </a:prstGeom>
-          </p:spPr>
-        </p:pic>
-        <p:pic>
-          <p:nvPicPr>
-            <p:cNvPr id="82" name="object 82"/>
-            <p:cNvPicPr/>
-            <p:nvPr/>
-          </p:nvPicPr>
-          <p:blipFill>
-            <a:blip r:embed="rId24" cstate="print"/>
-            <a:stretch>
-              <a:fillRect/>
-            </a:stretch>
-          </p:blipFill>
-          <p:spPr>
-            <a:xfrm>
-              <a:off x="1152144" y="7886700"/>
-              <a:ext cx="216408" cy="217931"/>
-            </a:xfrm>
-            <a:prstGeom prst="rect">
-              <a:avLst/>
-            </a:prstGeom>
-          </p:spPr>
-        </p:pic>
-        <p:pic>
-          <p:nvPicPr>
-            <p:cNvPr id="83" name="object 83"/>
-            <p:cNvPicPr/>
-            <p:nvPr/>
-          </p:nvPicPr>
-          <p:blipFill>
-            <a:blip r:embed="rId25" cstate="print"/>
-            <a:stretch>
-              <a:fillRect/>
-            </a:stretch>
-          </p:blipFill>
-          <p:spPr>
-            <a:xfrm>
-              <a:off x="1644395" y="7886700"/>
-              <a:ext cx="217931" cy="217931"/>
-            </a:xfrm>
-            <a:prstGeom prst="rect">
-              <a:avLst/>
-            </a:prstGeom>
-          </p:spPr>
-        </p:pic>
-        <p:pic>
-          <p:nvPicPr>
-            <p:cNvPr id="84" name="object 84"/>
-            <p:cNvPicPr/>
-            <p:nvPr/>
-          </p:nvPicPr>
-          <p:blipFill>
-            <a:blip r:embed="rId22" cstate="print"/>
-            <a:stretch>
-              <a:fillRect/>
-            </a:stretch>
-          </p:blipFill>
-          <p:spPr>
-            <a:xfrm>
-              <a:off x="1395984" y="7882128"/>
-              <a:ext cx="216407" cy="216408"/>
-            </a:xfrm>
-            <a:prstGeom prst="rect">
-              <a:avLst/>
-            </a:prstGeom>
-          </p:spPr>
-        </p:pic>
-      </p:grpSp>
       <p:sp>
         <p:nvSpPr>
           <p:cNvPr id="85" name="object 85"/>
@@ -5012,7 +4378,7 @@
         </p:nvSpPr>
         <p:spPr>
           <a:xfrm>
-            <a:off x="2567813" y="8674606"/>
+            <a:off x="2540584" y="8663940"/>
             <a:ext cx="3909187" cy="45719"/>
           </a:xfrm>
           <a:custGeom>
@@ -5054,7 +4420,7 @@
         </p:nvSpPr>
         <p:spPr>
           <a:xfrm>
-            <a:off x="374015" y="4478885"/>
+            <a:off x="356106" y="4623319"/>
             <a:ext cx="1508760" cy="197490"/>
           </a:xfrm>
           <a:prstGeom prst="rect">
@@ -5083,7 +4449,7 @@
                 <a:latin typeface="Calibri"/>
                 <a:cs typeface="Calibri"/>
               </a:rPr>
-              <a:t>Python / PHP</a:t>
+              <a:t>Backend</a:t>
             </a:r>
             <a:endParaRPr lang="en-US" sz="1200" noProof="0" dirty="0">
               <a:latin typeface="Calibri"/>
@@ -5092,590 +4458,6 @@
           </a:p>
         </p:txBody>
       </p:sp>
-      <p:grpSp>
-        <p:nvGrpSpPr>
-          <p:cNvPr id="104" name="Groupe 103">
-            <a:extLst>
-              <a:ext uri="{FF2B5EF4-FFF2-40B4-BE49-F238E27FC236}">
-                <a16:creationId xmlns:a16="http://schemas.microsoft.com/office/drawing/2014/main" id="{D07020FF-9560-1BB0-970C-820F1BF46483}"/>
-              </a:ext>
-            </a:extLst>
-          </p:cNvPr>
-          <p:cNvGrpSpPr/>
-          <p:nvPr/>
-        </p:nvGrpSpPr>
-        <p:grpSpPr>
-          <a:xfrm>
-            <a:off x="732155" y="4749141"/>
-            <a:ext cx="1202435" cy="219480"/>
-            <a:chOff x="647700" y="5223256"/>
-            <a:chExt cx="1202435" cy="219480"/>
-          </a:xfrm>
-        </p:grpSpPr>
-        <p:grpSp>
-          <p:nvGrpSpPr>
-            <p:cNvPr id="87" name="object 58"/>
-            <p:cNvGrpSpPr/>
-            <p:nvPr/>
-          </p:nvGrpSpPr>
-          <p:grpSpPr>
-            <a:xfrm>
-              <a:off x="647700" y="5223256"/>
-              <a:ext cx="1202435" cy="216407"/>
-              <a:chOff x="647700" y="6082284"/>
-              <a:chExt cx="1202435" cy="216407"/>
-            </a:xfrm>
-          </p:grpSpPr>
-          <p:pic>
-            <p:nvPicPr>
-              <p:cNvPr id="88" name="object 59"/>
-              <p:cNvPicPr/>
-              <p:nvPr/>
-            </p:nvPicPr>
-            <p:blipFill>
-              <a:blip r:embed="rId11" cstate="print"/>
-              <a:stretch>
-                <a:fillRect/>
-              </a:stretch>
-            </p:blipFill>
-            <p:spPr>
-              <a:xfrm>
-                <a:off x="647700" y="6082284"/>
-                <a:ext cx="216408" cy="216407"/>
-              </a:xfrm>
-              <a:prstGeom prst="rect">
-                <a:avLst/>
-              </a:prstGeom>
-            </p:spPr>
-          </p:pic>
-          <p:pic>
-            <p:nvPicPr>
-              <p:cNvPr id="89" name="object 60"/>
-              <p:cNvPicPr/>
-              <p:nvPr/>
-            </p:nvPicPr>
-            <p:blipFill>
-              <a:blip r:embed="rId11" cstate="print"/>
-              <a:stretch>
-                <a:fillRect/>
-              </a:stretch>
-            </p:blipFill>
-            <p:spPr>
-              <a:xfrm>
-                <a:off x="893063" y="6082284"/>
-                <a:ext cx="217932" cy="216407"/>
-              </a:xfrm>
-              <a:prstGeom prst="rect">
-                <a:avLst/>
-              </a:prstGeom>
-            </p:spPr>
-          </p:pic>
-          <p:pic>
-            <p:nvPicPr>
-              <p:cNvPr id="90" name="object 61"/>
-              <p:cNvPicPr/>
-              <p:nvPr/>
-            </p:nvPicPr>
-            <p:blipFill>
-              <a:blip r:embed="rId12" cstate="print"/>
-              <a:stretch>
-                <a:fillRect/>
-              </a:stretch>
-            </p:blipFill>
-            <p:spPr>
-              <a:xfrm>
-                <a:off x="1139951" y="6082284"/>
-                <a:ext cx="217931" cy="216407"/>
-              </a:xfrm>
-              <a:prstGeom prst="rect">
-                <a:avLst/>
-              </a:prstGeom>
-            </p:spPr>
-          </p:pic>
-          <p:pic>
-            <p:nvPicPr>
-              <p:cNvPr id="91" name="object 62"/>
-              <p:cNvPicPr/>
-              <p:nvPr/>
-            </p:nvPicPr>
-            <p:blipFill>
-              <a:blip r:embed="rId26" cstate="print"/>
-              <a:stretch>
-                <a:fillRect/>
-              </a:stretch>
-            </p:blipFill>
-            <p:spPr>
-              <a:xfrm>
-                <a:off x="1633727" y="6082284"/>
-                <a:ext cx="216408" cy="216407"/>
-              </a:xfrm>
-              <a:prstGeom prst="rect">
-                <a:avLst/>
-              </a:prstGeom>
-            </p:spPr>
-          </p:pic>
-        </p:grpSp>
-        <p:pic>
-          <p:nvPicPr>
-            <p:cNvPr id="93" name="object 61">
-              <a:extLst>
-                <a:ext uri="{FF2B5EF4-FFF2-40B4-BE49-F238E27FC236}">
-                  <a16:creationId xmlns:a16="http://schemas.microsoft.com/office/drawing/2014/main" id="{79D0E9DE-EE22-3841-3A94-2EF7C95EB187}"/>
-                </a:ext>
-              </a:extLst>
-            </p:cNvPr>
-            <p:cNvPicPr/>
-            <p:nvPr/>
-          </p:nvPicPr>
-          <p:blipFill>
-            <a:blip r:embed="rId12" cstate="print"/>
-            <a:stretch>
-              <a:fillRect/>
-            </a:stretch>
-          </p:blipFill>
-          <p:spPr>
-            <a:xfrm>
-              <a:off x="1387474" y="5226329"/>
-              <a:ext cx="217931" cy="216407"/>
-            </a:xfrm>
-            <a:prstGeom prst="rect">
-              <a:avLst/>
-            </a:prstGeom>
-          </p:spPr>
-        </p:pic>
-      </p:grpSp>
-      <p:pic>
-        <p:nvPicPr>
-          <p:cNvPr id="94" name="object 68">
-            <a:extLst>
-              <a:ext uri="{FF2B5EF4-FFF2-40B4-BE49-F238E27FC236}">
-                <a16:creationId xmlns:a16="http://schemas.microsoft.com/office/drawing/2014/main" id="{EA59AC26-C090-730C-7572-BC524F3A0D1E}"/>
-              </a:ext>
-            </a:extLst>
-          </p:cNvPr>
-          <p:cNvPicPr/>
-          <p:nvPr/>
-        </p:nvPicPr>
-        <p:blipFill>
-          <a:blip r:embed="rId8" cstate="print"/>
-          <a:stretch>
-            <a:fillRect/>
-          </a:stretch>
-        </p:blipFill>
-        <p:spPr>
-          <a:xfrm>
-            <a:off x="1479804" y="5824863"/>
-            <a:ext cx="217932" cy="217931"/>
-          </a:xfrm>
-          <a:prstGeom prst="rect">
-            <a:avLst/>
-          </a:prstGeom>
-        </p:spPr>
-      </p:pic>
-      <p:grpSp>
-        <p:nvGrpSpPr>
-          <p:cNvPr id="115" name="Groupe 114">
-            <a:extLst>
-              <a:ext uri="{FF2B5EF4-FFF2-40B4-BE49-F238E27FC236}">
-                <a16:creationId xmlns:a16="http://schemas.microsoft.com/office/drawing/2014/main" id="{E7BB2F90-DA98-52FD-EBDD-AA62D6B8580B}"/>
-              </a:ext>
-            </a:extLst>
-          </p:cNvPr>
-          <p:cNvGrpSpPr/>
-          <p:nvPr/>
-        </p:nvGrpSpPr>
-        <p:grpSpPr>
-          <a:xfrm>
-            <a:off x="391160" y="6553200"/>
-            <a:ext cx="1750695" cy="443985"/>
-            <a:chOff x="306705" y="7780656"/>
-            <a:chExt cx="1750695" cy="443985"/>
-          </a:xfrm>
-        </p:grpSpPr>
-        <p:sp>
-          <p:nvSpPr>
-            <p:cNvPr id="95" name="object 78">
-              <a:extLst>
-                <a:ext uri="{FF2B5EF4-FFF2-40B4-BE49-F238E27FC236}">
-                  <a16:creationId xmlns:a16="http://schemas.microsoft.com/office/drawing/2014/main" id="{4121D52F-C01B-9875-B523-AFFD797336DF}"/>
-                </a:ext>
-              </a:extLst>
-            </p:cNvPr>
-            <p:cNvSpPr txBox="1"/>
-            <p:nvPr/>
-          </p:nvSpPr>
-          <p:spPr>
-            <a:xfrm>
-              <a:off x="306705" y="7780656"/>
-              <a:ext cx="1750695" cy="197490"/>
-            </a:xfrm>
-            <a:prstGeom prst="rect">
-              <a:avLst/>
-            </a:prstGeom>
-          </p:spPr>
-          <p:txBody>
-            <a:bodyPr vert="horz" wrap="square" lIns="0" tIns="12700" rIns="0" bIns="0" rtlCol="0">
-              <a:spAutoFit/>
-            </a:bodyPr>
-            <a:lstStyle/>
-            <a:p>
-              <a:pPr marL="12700">
-                <a:lnSpc>
-                  <a:spcPct val="100000"/>
-                </a:lnSpc>
-                <a:spcBef>
-                  <a:spcPts val="100"/>
-                </a:spcBef>
-              </a:pPr>
-              <a:r>
-                <a:rPr lang="en-US" sz="1200" b="1" noProof="0" dirty="0">
-                  <a:solidFill>
-                    <a:srgbClr val="FFFFFF"/>
-                  </a:solidFill>
-                  <a:latin typeface="Calibri"/>
-                  <a:cs typeface="Calibri"/>
-                </a:rPr>
-                <a:t>ML / AI / GenAI</a:t>
-              </a:r>
-              <a:endParaRPr lang="en-US" sz="1200" noProof="0" dirty="0">
-                <a:latin typeface="Calibri"/>
-                <a:cs typeface="Calibri"/>
-              </a:endParaRPr>
-            </a:p>
-          </p:txBody>
-        </p:sp>
-        <p:grpSp>
-          <p:nvGrpSpPr>
-            <p:cNvPr id="96" name="object 79">
-              <a:extLst>
-                <a:ext uri="{FF2B5EF4-FFF2-40B4-BE49-F238E27FC236}">
-                  <a16:creationId xmlns:a16="http://schemas.microsoft.com/office/drawing/2014/main" id="{76686C02-0D5D-BBF7-487D-041FCB1D8AAB}"/>
-                </a:ext>
-              </a:extLst>
-            </p:cNvPr>
-            <p:cNvGrpSpPr/>
-            <p:nvPr/>
-          </p:nvGrpSpPr>
-          <p:grpSpPr>
-            <a:xfrm>
-              <a:off x="656079" y="8002138"/>
-              <a:ext cx="1203958" cy="222503"/>
-              <a:chOff x="658368" y="7882128"/>
-              <a:chExt cx="1203958" cy="222503"/>
-            </a:xfrm>
-          </p:grpSpPr>
-          <p:pic>
-            <p:nvPicPr>
-              <p:cNvPr id="97" name="object 80">
-                <a:extLst>
-                  <a:ext uri="{FF2B5EF4-FFF2-40B4-BE49-F238E27FC236}">
-                    <a16:creationId xmlns:a16="http://schemas.microsoft.com/office/drawing/2014/main" id="{97B809AE-7E24-7C2D-094A-EFAB68DA3BFB}"/>
-                  </a:ext>
-                </a:extLst>
-              </p:cNvPr>
-              <p:cNvPicPr/>
-              <p:nvPr/>
-            </p:nvPicPr>
-            <p:blipFill>
-              <a:blip r:embed="rId19" cstate="print"/>
-              <a:stretch>
-                <a:fillRect/>
-              </a:stretch>
-            </p:blipFill>
-            <p:spPr>
-              <a:xfrm>
-                <a:off x="658368" y="7886700"/>
-                <a:ext cx="217931" cy="217931"/>
-              </a:xfrm>
-              <a:prstGeom prst="rect">
-                <a:avLst/>
-              </a:prstGeom>
-            </p:spPr>
-          </p:pic>
-          <p:pic>
-            <p:nvPicPr>
-              <p:cNvPr id="98" name="object 81">
-                <a:extLst>
-                  <a:ext uri="{FF2B5EF4-FFF2-40B4-BE49-F238E27FC236}">
-                    <a16:creationId xmlns:a16="http://schemas.microsoft.com/office/drawing/2014/main" id="{6270CE1B-E0F2-C8F3-73D3-DFB088DF53B8}"/>
-                  </a:ext>
-                </a:extLst>
-              </p:cNvPr>
-              <p:cNvPicPr/>
-              <p:nvPr/>
-            </p:nvPicPr>
-            <p:blipFill>
-              <a:blip r:embed="rId19" cstate="print"/>
-              <a:stretch>
-                <a:fillRect/>
-              </a:stretch>
-            </p:blipFill>
-            <p:spPr>
-              <a:xfrm>
-                <a:off x="905256" y="7886700"/>
-                <a:ext cx="217931" cy="217931"/>
-              </a:xfrm>
-              <a:prstGeom prst="rect">
-                <a:avLst/>
-              </a:prstGeom>
-            </p:spPr>
-          </p:pic>
-          <p:pic>
-            <p:nvPicPr>
-              <p:cNvPr id="100" name="object 83">
-                <a:extLst>
-                  <a:ext uri="{FF2B5EF4-FFF2-40B4-BE49-F238E27FC236}">
-                    <a16:creationId xmlns:a16="http://schemas.microsoft.com/office/drawing/2014/main" id="{DDCAA6C4-3417-17D9-90DB-0EA8FC9FF33C}"/>
-                  </a:ext>
-                </a:extLst>
-              </p:cNvPr>
-              <p:cNvPicPr/>
-              <p:nvPr/>
-            </p:nvPicPr>
-            <p:blipFill>
-              <a:blip r:embed="rId25" cstate="print"/>
-              <a:stretch>
-                <a:fillRect/>
-              </a:stretch>
-            </p:blipFill>
-            <p:spPr>
-              <a:xfrm>
-                <a:off x="1644395" y="7886700"/>
-                <a:ext cx="217931" cy="217931"/>
-              </a:xfrm>
-              <a:prstGeom prst="rect">
-                <a:avLst/>
-              </a:prstGeom>
-            </p:spPr>
-          </p:pic>
-          <p:pic>
-            <p:nvPicPr>
-              <p:cNvPr id="101" name="object 84">
-                <a:extLst>
-                  <a:ext uri="{FF2B5EF4-FFF2-40B4-BE49-F238E27FC236}">
-                    <a16:creationId xmlns:a16="http://schemas.microsoft.com/office/drawing/2014/main" id="{29EFDA6D-6E70-DE6E-E65A-F51D5D3729EC}"/>
-                  </a:ext>
-                </a:extLst>
-              </p:cNvPr>
-              <p:cNvPicPr/>
-              <p:nvPr/>
-            </p:nvPicPr>
-            <p:blipFill>
-              <a:blip r:embed="rId22" cstate="print"/>
-              <a:stretch>
-                <a:fillRect/>
-              </a:stretch>
-            </p:blipFill>
-            <p:spPr>
-              <a:xfrm>
-                <a:off x="1395984" y="7882128"/>
-                <a:ext cx="216407" cy="216408"/>
-              </a:xfrm>
-              <a:prstGeom prst="rect">
-                <a:avLst/>
-              </a:prstGeom>
-            </p:spPr>
-          </p:pic>
-        </p:grpSp>
-      </p:grpSp>
-      <p:grpSp>
-        <p:nvGrpSpPr>
-          <p:cNvPr id="107" name="Groupe 106">
-            <a:extLst>
-              <a:ext uri="{FF2B5EF4-FFF2-40B4-BE49-F238E27FC236}">
-                <a16:creationId xmlns:a16="http://schemas.microsoft.com/office/drawing/2014/main" id="{617EA40B-E5F1-94FA-9B64-58F14A2A67CA}"/>
-              </a:ext>
-            </a:extLst>
-          </p:cNvPr>
-          <p:cNvGrpSpPr/>
-          <p:nvPr/>
-        </p:nvGrpSpPr>
-        <p:grpSpPr>
-          <a:xfrm>
-            <a:off x="388619" y="7047573"/>
-            <a:ext cx="1719579" cy="491678"/>
-            <a:chOff x="279336" y="4007169"/>
-            <a:chExt cx="1719579" cy="491678"/>
-          </a:xfrm>
-        </p:grpSpPr>
-        <p:grpSp>
-          <p:nvGrpSpPr>
-            <p:cNvPr id="108" name="object 38"/>
-            <p:cNvGrpSpPr/>
-            <p:nvPr/>
-          </p:nvGrpSpPr>
-          <p:grpSpPr>
-            <a:xfrm>
-              <a:off x="644651" y="4280915"/>
-              <a:ext cx="1203959" cy="217932"/>
-              <a:chOff x="644651" y="4280915"/>
-              <a:chExt cx="1203959" cy="217932"/>
-            </a:xfrm>
-          </p:grpSpPr>
-          <p:pic>
-            <p:nvPicPr>
-              <p:cNvPr id="110" name="object 39"/>
-              <p:cNvPicPr/>
-              <p:nvPr/>
-            </p:nvPicPr>
-            <p:blipFill>
-              <a:blip r:embed="rId19" cstate="print"/>
-              <a:stretch>
-                <a:fillRect/>
-              </a:stretch>
-            </p:blipFill>
-            <p:spPr>
-              <a:xfrm>
-                <a:off x="644651" y="4280915"/>
-                <a:ext cx="217932" cy="217932"/>
-              </a:xfrm>
-              <a:prstGeom prst="rect">
-                <a:avLst/>
-              </a:prstGeom>
-            </p:spPr>
-          </p:pic>
-          <p:pic>
-            <p:nvPicPr>
-              <p:cNvPr id="111" name="object 40"/>
-              <p:cNvPicPr/>
-              <p:nvPr/>
-            </p:nvPicPr>
-            <p:blipFill>
-              <a:blip r:embed="rId19" cstate="print"/>
-              <a:stretch>
-                <a:fillRect/>
-              </a:stretch>
-            </p:blipFill>
-            <p:spPr>
-              <a:xfrm>
-                <a:off x="891539" y="4280915"/>
-                <a:ext cx="217931" cy="217932"/>
-              </a:xfrm>
-              <a:prstGeom prst="rect">
-                <a:avLst/>
-              </a:prstGeom>
-            </p:spPr>
-          </p:pic>
-          <p:pic>
-            <p:nvPicPr>
-              <p:cNvPr id="112" name="object 41"/>
-              <p:cNvPicPr/>
-              <p:nvPr/>
-            </p:nvPicPr>
-            <p:blipFill>
-              <a:blip r:embed="rId24" cstate="print"/>
-              <a:stretch>
-                <a:fillRect/>
-              </a:stretch>
-            </p:blipFill>
-            <p:spPr>
-              <a:xfrm>
-                <a:off x="1138427" y="4280915"/>
-                <a:ext cx="216408" cy="217932"/>
-              </a:xfrm>
-              <a:prstGeom prst="rect">
-                <a:avLst/>
-              </a:prstGeom>
-            </p:spPr>
-          </p:pic>
-          <p:pic>
-            <p:nvPicPr>
-              <p:cNvPr id="113" name="object 42"/>
-              <p:cNvPicPr/>
-              <p:nvPr/>
-            </p:nvPicPr>
-            <p:blipFill>
-              <a:blip r:embed="rId8" cstate="print"/>
-              <a:stretch>
-                <a:fillRect/>
-              </a:stretch>
-            </p:blipFill>
-            <p:spPr>
-              <a:xfrm>
-                <a:off x="1383791" y="4280915"/>
-                <a:ext cx="217932" cy="217932"/>
-              </a:xfrm>
-              <a:prstGeom prst="rect">
-                <a:avLst/>
-              </a:prstGeom>
-            </p:spPr>
-          </p:pic>
-          <p:pic>
-            <p:nvPicPr>
-              <p:cNvPr id="114" name="object 43"/>
-              <p:cNvPicPr/>
-              <p:nvPr/>
-            </p:nvPicPr>
-            <p:blipFill>
-              <a:blip r:embed="rId25" cstate="print"/>
-              <a:stretch>
-                <a:fillRect/>
-              </a:stretch>
-            </p:blipFill>
-            <p:spPr>
-              <a:xfrm>
-                <a:off x="1630679" y="4280915"/>
-                <a:ext cx="217931" cy="217932"/>
-              </a:xfrm>
-              <a:prstGeom prst="rect">
-                <a:avLst/>
-              </a:prstGeom>
-            </p:spPr>
-          </p:pic>
-        </p:grpSp>
-        <p:sp>
-          <p:nvSpPr>
-            <p:cNvPr id="109" name="object 44">
-              <a:extLst>
-                <a:ext uri="{FF2B5EF4-FFF2-40B4-BE49-F238E27FC236}">
-                  <a16:creationId xmlns:a16="http://schemas.microsoft.com/office/drawing/2014/main" id="{609CBCC3-FF16-EAC1-2A69-3D918472DB92}"/>
-                </a:ext>
-              </a:extLst>
-            </p:cNvPr>
-            <p:cNvSpPr txBox="1"/>
-            <p:nvPr/>
-          </p:nvSpPr>
-          <p:spPr>
-            <a:xfrm>
-              <a:off x="279336" y="4007169"/>
-              <a:ext cx="1719579" cy="197490"/>
-            </a:xfrm>
-            <a:prstGeom prst="rect">
-              <a:avLst/>
-            </a:prstGeom>
-          </p:spPr>
-          <p:txBody>
-            <a:bodyPr vert="horz" wrap="square" lIns="0" tIns="12700" rIns="0" bIns="0" rtlCol="0">
-              <a:spAutoFit/>
-            </a:bodyPr>
-            <a:lstStyle/>
-            <a:p>
-              <a:pPr algn="l">
-                <a:lnSpc>
-                  <a:spcPct val="100000"/>
-                </a:lnSpc>
-                <a:spcBef>
-                  <a:spcPts val="890"/>
-                </a:spcBef>
-              </a:pPr>
-              <a:r>
-                <a:rPr lang="en-US" sz="1200" b="1" noProof="0" dirty="0">
-                  <a:solidFill>
-                    <a:srgbClr val="FFFFFF"/>
-                  </a:solidFill>
-                  <a:latin typeface="Calibri"/>
-                  <a:cs typeface="Calibri"/>
-                </a:rPr>
-                <a:t>HTML / CSS</a:t>
-              </a:r>
-              <a:endParaRPr lang="en-US" sz="1200" noProof="0" dirty="0">
-                <a:latin typeface="Calibri"/>
-                <a:cs typeface="Calibri"/>
-              </a:endParaRPr>
-            </a:p>
-          </p:txBody>
-        </p:sp>
-      </p:grpSp>
       <p:grpSp>
         <p:nvGrpSpPr>
           <p:cNvPr id="118" name="Groupe 117">
@@ -5717,7 +4499,7 @@
               <p:nvPr/>
             </p:nvPicPr>
             <p:blipFill>
-              <a:blip r:embed="rId27" cstate="print"/>
+              <a:blip r:embed="rId11" cstate="print"/>
               <a:stretch>
                 <a:fillRect/>
               </a:stretch>
@@ -5739,7 +4521,7 @@
               <p:nvPr/>
             </p:nvPicPr>
             <p:blipFill>
-              <a:blip r:embed="rId28" cstate="print"/>
+              <a:blip r:embed="rId12" cstate="print"/>
               <a:stretch>
                 <a:fillRect/>
               </a:stretch>
@@ -5761,7 +4543,7 @@
               <p:nvPr/>
             </p:nvPicPr>
             <p:blipFill>
-              <a:blip r:embed="rId28" cstate="print"/>
+              <a:blip r:embed="rId12" cstate="print"/>
               <a:stretch>
                 <a:fillRect/>
               </a:stretch>
@@ -5783,7 +4565,7 @@
               <p:nvPr/>
             </p:nvPicPr>
             <p:blipFill>
-              <a:blip r:embed="rId29" cstate="print"/>
+              <a:blip r:embed="rId13" cstate="print"/>
               <a:stretch>
                 <a:fillRect/>
               </a:stretch>
@@ -5895,7 +4677,7 @@
           <p:nvPr/>
         </p:nvPicPr>
         <p:blipFill rotWithShape="1">
-          <a:blip r:embed="rId30" cstate="print">
+          <a:blip r:embed="rId14" cstate="print">
             <a:extLst>
               <a:ext uri="{28A0092B-C50C-407E-A947-70E740481C1C}">
                 <a14:useLocalDpi xmlns:a14="http://schemas.microsoft.com/office/drawing/2010/main" val="0"/>
@@ -5931,7 +4713,7 @@
         </p:nvSpPr>
         <p:spPr>
           <a:xfrm>
-            <a:off x="2340736" y="3478089"/>
+            <a:off x="2340736" y="3534997"/>
             <a:ext cx="4419726" cy="1265603"/>
           </a:xfrm>
           <a:prstGeom prst="rect">
@@ -6162,34 +4944,378 @@
           </a:p>
         </p:txBody>
       </p:sp>
-      <p:pic>
-        <p:nvPicPr>
-          <p:cNvPr id="41" name="object 75">
+      <p:sp>
+        <p:nvSpPr>
+          <p:cNvPr id="39" name="object 44">
             <a:extLst>
               <a:ext uri="{FF2B5EF4-FFF2-40B4-BE49-F238E27FC236}">
-                <a16:creationId xmlns:a16="http://schemas.microsoft.com/office/drawing/2014/main" id="{6D6303AC-A78D-2E8E-F52F-98081CF84EAA}"/>
+                <a16:creationId xmlns:a16="http://schemas.microsoft.com/office/drawing/2014/main" id="{6AF5DDCA-B2E6-D39D-C9FE-8FED07BA0E62}"/>
               </a:ext>
             </a:extLst>
           </p:cNvPr>
-          <p:cNvPicPr/>
+          <p:cNvSpPr txBox="1"/>
           <p:nvPr/>
-        </p:nvPicPr>
-        <p:blipFill>
-          <a:blip r:embed="rId14" cstate="print"/>
-          <a:stretch>
-            <a:fillRect/>
-          </a:stretch>
-        </p:blipFill>
+        </p:nvSpPr>
         <p:spPr>
           <a:xfrm>
-            <a:off x="1230502" y="6781927"/>
-            <a:ext cx="217932" cy="216407"/>
+            <a:off x="361314" y="4114800"/>
+            <a:ext cx="1840864" cy="382156"/>
           </a:xfrm>
           <a:prstGeom prst="rect">
             <a:avLst/>
           </a:prstGeom>
         </p:spPr>
-      </p:pic>
+        <p:txBody>
+          <a:bodyPr vert="horz" wrap="square" lIns="0" tIns="12700" rIns="0" bIns="0" rtlCol="0">
+            <a:spAutoFit/>
+          </a:bodyPr>
+          <a:lstStyle/>
+          <a:p>
+            <a:pPr marL="12700">
+              <a:lnSpc>
+                <a:spcPct val="100000"/>
+              </a:lnSpc>
+              <a:spcBef>
+                <a:spcPts val="100"/>
+              </a:spcBef>
+            </a:pPr>
+            <a:r>
+              <a:rPr lang="en-US" sz="1200" noProof="0" dirty="0">
+                <a:solidFill>
+                  <a:srgbClr val="FFFFFF"/>
+                </a:solidFill>
+                <a:latin typeface="Calibri"/>
+                <a:cs typeface="Calibri"/>
+              </a:rPr>
+              <a:t>JS, TS, React, Angular, Vue, Astro….</a:t>
+            </a:r>
+            <a:endParaRPr lang="en-US" sz="1200" noProof="0" dirty="0">
+              <a:latin typeface="Calibri"/>
+              <a:cs typeface="Calibri"/>
+            </a:endParaRPr>
+          </a:p>
+        </p:txBody>
+      </p:sp>
+      <p:sp>
+        <p:nvSpPr>
+          <p:cNvPr id="42" name="object 44">
+            <a:extLst>
+              <a:ext uri="{FF2B5EF4-FFF2-40B4-BE49-F238E27FC236}">
+                <a16:creationId xmlns:a16="http://schemas.microsoft.com/office/drawing/2014/main" id="{FA696474-4405-9BD5-09A7-7C76AD3B6670}"/>
+              </a:ext>
+            </a:extLst>
+          </p:cNvPr>
+          <p:cNvSpPr txBox="1"/>
+          <p:nvPr/>
+        </p:nvSpPr>
+        <p:spPr>
+          <a:xfrm>
+            <a:off x="361314" y="4800600"/>
+            <a:ext cx="1840864" cy="382156"/>
+          </a:xfrm>
+          <a:prstGeom prst="rect">
+            <a:avLst/>
+          </a:prstGeom>
+        </p:spPr>
+        <p:txBody>
+          <a:bodyPr vert="horz" wrap="square" lIns="0" tIns="12700" rIns="0" bIns="0" rtlCol="0">
+            <a:spAutoFit/>
+          </a:bodyPr>
+          <a:lstStyle/>
+          <a:p>
+            <a:pPr marL="12700">
+              <a:lnSpc>
+                <a:spcPct val="100000"/>
+              </a:lnSpc>
+              <a:spcBef>
+                <a:spcPts val="100"/>
+              </a:spcBef>
+            </a:pPr>
+            <a:r>
+              <a:rPr lang="en-US" sz="1200" noProof="0" dirty="0">
+                <a:solidFill>
+                  <a:srgbClr val="FFFFFF"/>
+                </a:solidFill>
+                <a:latin typeface="Calibri"/>
+                <a:cs typeface="Calibri"/>
+              </a:rPr>
+              <a:t>Python, PHP, </a:t>
+            </a:r>
+            <a:r>
+              <a:rPr lang="en-US" sz="1200" noProof="0" dirty="0" err="1">
+                <a:solidFill>
+                  <a:srgbClr val="FFFFFF"/>
+                </a:solidFill>
+                <a:latin typeface="Calibri"/>
+                <a:cs typeface="Calibri"/>
+              </a:rPr>
+              <a:t>FastAPI</a:t>
+            </a:r>
+            <a:r>
+              <a:rPr lang="en-US" sz="1200" noProof="0" dirty="0">
+                <a:solidFill>
+                  <a:srgbClr val="FFFFFF"/>
+                </a:solidFill>
+                <a:latin typeface="Calibri"/>
+                <a:cs typeface="Calibri"/>
+              </a:rPr>
+              <a:t>, Flask, Symfony…</a:t>
+            </a:r>
+            <a:endParaRPr lang="en-US" sz="1200" noProof="0" dirty="0">
+              <a:latin typeface="Calibri"/>
+              <a:cs typeface="Calibri"/>
+            </a:endParaRPr>
+          </a:p>
+        </p:txBody>
+      </p:sp>
+      <p:sp>
+        <p:nvSpPr>
+          <p:cNvPr id="59" name="object 64">
+            <a:extLst>
+              <a:ext uri="{FF2B5EF4-FFF2-40B4-BE49-F238E27FC236}">
+                <a16:creationId xmlns:a16="http://schemas.microsoft.com/office/drawing/2014/main" id="{2DB272DD-348F-9165-8855-AA7400658C64}"/>
+              </a:ext>
+            </a:extLst>
+          </p:cNvPr>
+          <p:cNvSpPr txBox="1"/>
+          <p:nvPr/>
+        </p:nvSpPr>
+        <p:spPr>
+          <a:xfrm>
+            <a:off x="389661" y="6420579"/>
+            <a:ext cx="1736268" cy="394980"/>
+          </a:xfrm>
+          <a:prstGeom prst="rect">
+            <a:avLst/>
+          </a:prstGeom>
+        </p:spPr>
+        <p:txBody>
+          <a:bodyPr vert="horz" wrap="square" lIns="0" tIns="12700" rIns="0" bIns="0" rtlCol="0">
+            <a:spAutoFit/>
+          </a:bodyPr>
+          <a:lstStyle/>
+          <a:p>
+            <a:pPr marL="12700">
+              <a:lnSpc>
+                <a:spcPct val="100000"/>
+              </a:lnSpc>
+              <a:spcBef>
+                <a:spcPts val="100"/>
+              </a:spcBef>
+            </a:pPr>
+            <a:r>
+              <a:rPr lang="en-US" sz="1200" dirty="0">
+                <a:solidFill>
+                  <a:srgbClr val="FFFFFF"/>
+                </a:solidFill>
+                <a:latin typeface="Calibri"/>
+                <a:cs typeface="Calibri"/>
+              </a:rPr>
+              <a:t>AWS Lambda, API Gateway,</a:t>
+            </a:r>
+          </a:p>
+          <a:p>
+            <a:pPr marL="12700">
+              <a:lnSpc>
+                <a:spcPct val="100000"/>
+              </a:lnSpc>
+              <a:spcBef>
+                <a:spcPts val="100"/>
+              </a:spcBef>
+            </a:pPr>
+            <a:r>
+              <a:rPr lang="en-US" sz="1200" noProof="0" dirty="0">
+                <a:solidFill>
+                  <a:srgbClr val="FFFFFF"/>
+                </a:solidFill>
+                <a:latin typeface="Calibri"/>
+                <a:cs typeface="Calibri"/>
+              </a:rPr>
+              <a:t>SQS, SNS, CloudWatch…</a:t>
+            </a:r>
+            <a:endParaRPr lang="en-US" sz="1200" noProof="0" dirty="0">
+              <a:latin typeface="Calibri"/>
+              <a:cs typeface="Calibri"/>
+            </a:endParaRPr>
+          </a:p>
+        </p:txBody>
+      </p:sp>
+      <p:sp>
+        <p:nvSpPr>
+          <p:cNvPr id="61" name="object 71">
+            <a:extLst>
+              <a:ext uri="{FF2B5EF4-FFF2-40B4-BE49-F238E27FC236}">
+                <a16:creationId xmlns:a16="http://schemas.microsoft.com/office/drawing/2014/main" id="{9E0E3061-E905-7825-5040-18D73762577E}"/>
+              </a:ext>
+            </a:extLst>
+          </p:cNvPr>
+          <p:cNvSpPr txBox="1"/>
+          <p:nvPr/>
+        </p:nvSpPr>
+        <p:spPr>
+          <a:xfrm>
+            <a:off x="364043" y="6974371"/>
+            <a:ext cx="1776095" cy="197490"/>
+          </a:xfrm>
+          <a:prstGeom prst="rect">
+            <a:avLst/>
+          </a:prstGeom>
+        </p:spPr>
+        <p:txBody>
+          <a:bodyPr vert="horz" wrap="square" lIns="0" tIns="12700" rIns="0" bIns="0" rtlCol="0">
+            <a:spAutoFit/>
+          </a:bodyPr>
+          <a:lstStyle/>
+          <a:p>
+            <a:pPr marL="12700">
+              <a:lnSpc>
+                <a:spcPct val="100000"/>
+              </a:lnSpc>
+              <a:spcBef>
+                <a:spcPts val="100"/>
+              </a:spcBef>
+            </a:pPr>
+            <a:r>
+              <a:rPr lang="en-US" sz="1200" b="1" noProof="0" dirty="0">
+                <a:solidFill>
+                  <a:srgbClr val="FFFFFF"/>
+                </a:solidFill>
+                <a:latin typeface="Calibri"/>
+                <a:cs typeface="Calibri"/>
+              </a:rPr>
+              <a:t>Delivery &amp; Reliability</a:t>
+            </a:r>
+            <a:endParaRPr lang="en-US" sz="1200" noProof="0" dirty="0">
+              <a:latin typeface="Calibri"/>
+              <a:cs typeface="Calibri"/>
+            </a:endParaRPr>
+          </a:p>
+        </p:txBody>
+      </p:sp>
+      <p:sp>
+        <p:nvSpPr>
+          <p:cNvPr id="63" name="object 64">
+            <a:extLst>
+              <a:ext uri="{FF2B5EF4-FFF2-40B4-BE49-F238E27FC236}">
+                <a16:creationId xmlns:a16="http://schemas.microsoft.com/office/drawing/2014/main" id="{825AB7B9-BC57-1CD8-7EB4-627BA9710BA9}"/>
+              </a:ext>
+            </a:extLst>
+          </p:cNvPr>
+          <p:cNvSpPr txBox="1"/>
+          <p:nvPr/>
+        </p:nvSpPr>
+        <p:spPr>
+          <a:xfrm>
+            <a:off x="363664" y="7159651"/>
+            <a:ext cx="1736268" cy="566822"/>
+          </a:xfrm>
+          <a:prstGeom prst="rect">
+            <a:avLst/>
+          </a:prstGeom>
+        </p:spPr>
+        <p:txBody>
+          <a:bodyPr vert="horz" wrap="square" lIns="0" tIns="12700" rIns="0" bIns="0" rtlCol="0">
+            <a:spAutoFit/>
+          </a:bodyPr>
+          <a:lstStyle/>
+          <a:p>
+            <a:pPr marL="12700">
+              <a:lnSpc>
+                <a:spcPct val="100000"/>
+              </a:lnSpc>
+              <a:spcBef>
+                <a:spcPts val="100"/>
+              </a:spcBef>
+            </a:pPr>
+            <a:r>
+              <a:rPr lang="en-US" sz="1200" dirty="0">
+                <a:solidFill>
+                  <a:srgbClr val="FFFFFF"/>
+                </a:solidFill>
+                <a:latin typeface="Calibri"/>
+                <a:cs typeface="Calibri"/>
+              </a:rPr>
+              <a:t>CDK, CloudFormation, Terraform, GitLab CI, Datadog, New Relic…</a:t>
+            </a:r>
+            <a:endParaRPr lang="en-US" sz="1200" noProof="0" dirty="0">
+              <a:latin typeface="Calibri"/>
+              <a:cs typeface="Calibri"/>
+            </a:endParaRPr>
+          </a:p>
+        </p:txBody>
+      </p:sp>
+      <p:sp>
+        <p:nvSpPr>
+          <p:cNvPr id="92" name="object 64">
+            <a:extLst>
+              <a:ext uri="{FF2B5EF4-FFF2-40B4-BE49-F238E27FC236}">
+                <a16:creationId xmlns:a16="http://schemas.microsoft.com/office/drawing/2014/main" id="{562CC1B8-B300-1655-964F-BDAEA36CBBFF}"/>
+              </a:ext>
+            </a:extLst>
+          </p:cNvPr>
+          <p:cNvSpPr txBox="1"/>
+          <p:nvPr/>
+        </p:nvSpPr>
+        <p:spPr>
+          <a:xfrm>
+            <a:off x="363664" y="7989272"/>
+            <a:ext cx="1736268" cy="382156"/>
+          </a:xfrm>
+          <a:prstGeom prst="rect">
+            <a:avLst/>
+          </a:prstGeom>
+        </p:spPr>
+        <p:txBody>
+          <a:bodyPr vert="horz" wrap="square" lIns="0" tIns="12700" rIns="0" bIns="0" rtlCol="0">
+            <a:spAutoFit/>
+          </a:bodyPr>
+          <a:lstStyle/>
+          <a:p>
+            <a:pPr marL="12700">
+              <a:lnSpc>
+                <a:spcPct val="100000"/>
+              </a:lnSpc>
+              <a:spcBef>
+                <a:spcPts val="100"/>
+              </a:spcBef>
+            </a:pPr>
+            <a:r>
+              <a:rPr lang="en-US" sz="1200" dirty="0">
+                <a:solidFill>
+                  <a:srgbClr val="FFFFFF"/>
+                </a:solidFill>
+                <a:latin typeface="Calibri"/>
+                <a:cs typeface="Calibri"/>
+              </a:rPr>
+              <a:t>Codex, OpenAI API, Claude code, </a:t>
+            </a:r>
+            <a:r>
+              <a:rPr lang="en-US" sz="1200" dirty="0" err="1">
+                <a:solidFill>
+                  <a:srgbClr val="FFFFFF"/>
+                </a:solidFill>
+                <a:latin typeface="Calibri"/>
+                <a:cs typeface="Calibri"/>
+              </a:rPr>
+              <a:t>BedRock</a:t>
+            </a:r>
+            <a:r>
+              <a:rPr lang="en-US" sz="1200" dirty="0">
+                <a:solidFill>
+                  <a:srgbClr val="FFFFFF"/>
+                </a:solidFill>
+                <a:latin typeface="Calibri"/>
+                <a:cs typeface="Calibri"/>
+              </a:rPr>
+              <a:t>, SageMaker</a:t>
+            </a:r>
+            <a:endParaRPr lang="en-US" sz="1200" noProof="0" dirty="0">
+              <a:latin typeface="Calibri"/>
+              <a:cs typeface="Calibri"/>
+            </a:endParaRPr>
+          </a:p>
+        </p:txBody>
+      </p:sp>
     </p:spTree>
   </p:cSld>
   <p:clrMapOvr>
@@ -6267,7 +5393,7 @@
         </p:nvSpPr>
         <p:spPr>
           <a:xfrm>
-            <a:off x="2473832" y="1143000"/>
+            <a:off x="2473832" y="4943088"/>
             <a:ext cx="3691890" cy="2600712"/>
           </a:xfrm>
           <a:prstGeom prst="rect">
@@ -6482,7 +5608,7 @@
         </p:nvGrpSpPr>
         <p:grpSpPr>
           <a:xfrm>
-            <a:off x="2076576" y="753745"/>
+            <a:off x="2076576" y="4553833"/>
             <a:ext cx="2939415" cy="541655"/>
             <a:chOff x="2076576" y="830580"/>
             <a:chExt cx="2939415" cy="541655"/>
@@ -6597,7 +5723,7 @@
         </p:nvSpPr>
         <p:spPr>
           <a:xfrm>
-            <a:off x="2325751" y="761746"/>
+            <a:off x="2328798" y="4568438"/>
             <a:ext cx="2431415" cy="299720"/>
           </a:xfrm>
           <a:prstGeom prst="rect">
@@ -6697,121 +5823,6 @@
       </p:sp>
       <p:grpSp>
         <p:nvGrpSpPr>
-          <p:cNvPr id="9" name="object 9"/>
-          <p:cNvGrpSpPr/>
-          <p:nvPr/>
-        </p:nvGrpSpPr>
-        <p:grpSpPr>
-          <a:xfrm>
-            <a:off x="2067560" y="5622290"/>
-            <a:ext cx="2951480" cy="527050"/>
-            <a:chOff x="2067560" y="5463540"/>
-            <a:chExt cx="2951480" cy="527050"/>
-          </a:xfrm>
-        </p:grpSpPr>
-        <p:sp>
-          <p:nvSpPr>
-            <p:cNvPr id="10" name="object 10"/>
-            <p:cNvSpPr/>
-            <p:nvPr/>
-          </p:nvSpPr>
-          <p:spPr>
-            <a:xfrm>
-              <a:off x="2080260" y="5463540"/>
-              <a:ext cx="2938780" cy="317500"/>
-            </a:xfrm>
-            <a:custGeom>
-              <a:avLst/>
-              <a:gdLst/>
-              <a:ahLst/>
-              <a:cxnLst/>
-              <a:rect l="l" t="t" r="r" b="b"/>
-              <a:pathLst>
-                <a:path w="2938779" h="317500">
-                  <a:moveTo>
-                    <a:pt x="2885440" y="0"/>
-                  </a:moveTo>
-                  <a:lnTo>
-                    <a:pt x="0" y="0"/>
-                  </a:lnTo>
-                  <a:lnTo>
-                    <a:pt x="0" y="316992"/>
-                  </a:lnTo>
-                  <a:lnTo>
-                    <a:pt x="2938272" y="316992"/>
-                  </a:lnTo>
-                  <a:lnTo>
-                    <a:pt x="2938272" y="52832"/>
-                  </a:lnTo>
-                  <a:lnTo>
-                    <a:pt x="2885440" y="0"/>
-                  </a:lnTo>
-                  <a:close/>
-                </a:path>
-              </a:pathLst>
-            </a:custGeom>
-            <a:solidFill>
-              <a:srgbClr val="3A6278"/>
-            </a:solidFill>
-          </p:spPr>
-          <p:txBody>
-            <a:bodyPr wrap="square" lIns="0" tIns="0" rIns="0" bIns="0" rtlCol="0"/>
-            <a:lstStyle/>
-            <a:p>
-              <a:endParaRPr lang="en-US" noProof="0" dirty="0"/>
-            </a:p>
-          </p:txBody>
-        </p:sp>
-        <p:sp>
-          <p:nvSpPr>
-            <p:cNvPr id="11" name="object 11"/>
-            <p:cNvSpPr/>
-            <p:nvPr/>
-          </p:nvSpPr>
-          <p:spPr>
-            <a:xfrm>
-              <a:off x="2067560" y="5785231"/>
-              <a:ext cx="253365" cy="205104"/>
-            </a:xfrm>
-            <a:custGeom>
-              <a:avLst/>
-              <a:gdLst/>
-              <a:ahLst/>
-              <a:cxnLst/>
-              <a:rect l="l" t="t" r="r" b="b"/>
-              <a:pathLst>
-                <a:path w="253364" h="205104">
-                  <a:moveTo>
-                    <a:pt x="0" y="0"/>
-                  </a:moveTo>
-                  <a:lnTo>
-                    <a:pt x="250316" y="204851"/>
-                  </a:lnTo>
-                  <a:lnTo>
-                    <a:pt x="253364" y="2794"/>
-                  </a:lnTo>
-                  <a:lnTo>
-                    <a:pt x="0" y="0"/>
-                  </a:lnTo>
-                  <a:close/>
-                </a:path>
-              </a:pathLst>
-            </a:custGeom>
-            <a:solidFill>
-              <a:srgbClr val="2A4653"/>
-            </a:solidFill>
-          </p:spPr>
-          <p:txBody>
-            <a:bodyPr wrap="square" lIns="0" tIns="0" rIns="0" bIns="0" rtlCol="0"/>
-            <a:lstStyle/>
-            <a:p>
-              <a:endParaRPr lang="en-US" noProof="0" dirty="0"/>
-            </a:p>
-          </p:txBody>
-        </p:sp>
-      </p:grpSp>
-      <p:grpSp>
-        <p:nvGrpSpPr>
           <p:cNvPr id="37" name="Groupe 36">
             <a:extLst>
               <a:ext uri="{FF2B5EF4-FFF2-40B4-BE49-F238E27FC236}">
@@ -6824,7 +5835,7 @@
         </p:nvGrpSpPr>
         <p:grpSpPr>
           <a:xfrm>
-            <a:off x="2064385" y="3873121"/>
+            <a:off x="2064385" y="7467600"/>
             <a:ext cx="2954655" cy="546479"/>
             <a:chOff x="2064385" y="3662046"/>
             <a:chExt cx="2954655" cy="546479"/>
@@ -6911,7 +5922,7 @@
             </p:nvSpPr>
             <p:spPr>
               <a:xfrm>
-                <a:off x="2328798" y="3674490"/>
+                <a:off x="2328798" y="3693540"/>
                 <a:ext cx="1149985" cy="299720"/>
               </a:xfrm>
               <a:prstGeom prst="rect">
@@ -10963,183 +9974,6 @@
           </p:txBody>
         </p:sp>
       </p:grpSp>
-      <p:sp>
-        <p:nvSpPr>
-          <p:cNvPr id="35" name="object 35"/>
-          <p:cNvSpPr txBox="1">
-            <a:spLocks noGrp="1"/>
-          </p:cNvSpPr>
-          <p:nvPr>
-            <p:ph type="body" idx="1"/>
-          </p:nvPr>
-        </p:nvSpPr>
-        <p:spPr>
-          <a:xfrm>
-            <a:off x="2328798" y="5968454"/>
-            <a:ext cx="4431030" cy="2741776"/>
-          </a:xfrm>
-          <a:prstGeom prst="rect">
-            <a:avLst/>
-          </a:prstGeom>
-        </p:spPr>
-        <p:txBody>
-          <a:bodyPr vert="horz" wrap="square" lIns="0" tIns="12700" rIns="0" bIns="0" rtlCol="0">
-            <a:spAutoFit/>
-          </a:bodyPr>
-          <a:lstStyle/>
-          <a:p>
-            <a:pPr marL="179705" marR="86360">
-              <a:spcBef>
-                <a:spcPts val="1655"/>
-              </a:spcBef>
-            </a:pPr>
-            <a:r>
-              <a:rPr lang="en-US" noProof="0" dirty="0"/>
-              <a:t>Full Stack Engineering</a:t>
-            </a:r>
-            <a:r>
-              <a:rPr lang="en-US" b="0" spc="15" dirty="0">
-                <a:solidFill>
-                  <a:srgbClr val="000000"/>
-                </a:solidFill>
-              </a:rPr>
-              <a:t>: TypeScript / React / Angular / Vue / Astro Node.js / Python / Flask / FastAPI / REST APIs / PHP / Symfony</a:t>
-            </a:r>
-            <a:br>
-              <a:rPr lang="en-US" b="0" spc="15" dirty="0">
-                <a:solidFill>
-                  <a:srgbClr val="000000"/>
-                </a:solidFill>
-              </a:rPr>
-            </a:br>
-            <a:br>
-              <a:rPr lang="en-US" b="0" spc="15" dirty="0">
-                <a:solidFill>
-                  <a:srgbClr val="000000"/>
-                </a:solidFill>
-              </a:rPr>
-            </a:br>
-            <a:r>
-              <a:rPr lang="en-US" noProof="0" dirty="0"/>
-              <a:t>Cloud &amp; DevOps</a:t>
-            </a:r>
-            <a:r>
-              <a:rPr lang="en-US" b="0" noProof="0" dirty="0">
-                <a:solidFill>
-                  <a:srgbClr val="000000"/>
-                </a:solidFill>
-                <a:latin typeface="Calibri"/>
-                <a:cs typeface="Calibri"/>
-              </a:rPr>
-              <a:t>: AWS Lambda / API Gateway / CloudWatch / SQS / SNS / DynamoDB / RDS / EC2 / CloudFront / CDK / </a:t>
-            </a:r>
-            <a:r>
-              <a:rPr lang="en-US" b="0" dirty="0">
-                <a:solidFill>
-                  <a:srgbClr val="000000"/>
-                </a:solidFill>
-              </a:rPr>
-              <a:t>GitLab…</a:t>
-            </a:r>
-            <a:endParaRPr lang="en-US" b="0" spc="-25" noProof="0" dirty="0">
-              <a:solidFill>
-                <a:srgbClr val="000000"/>
-              </a:solidFill>
-              <a:latin typeface="Calibri"/>
-              <a:cs typeface="Calibri"/>
-            </a:endParaRPr>
-          </a:p>
-          <a:p>
-            <a:pPr marL="179705">
-              <a:spcBef>
-                <a:spcPts val="960"/>
-              </a:spcBef>
-            </a:pPr>
-            <a:r>
-              <a:rPr lang="en-US" noProof="0" dirty="0"/>
-              <a:t>Architecture</a:t>
-            </a:r>
-            <a:r>
-              <a:rPr lang="en-US" b="0" spc="-10" noProof="0" dirty="0">
-                <a:solidFill>
-                  <a:srgbClr val="000000"/>
-                </a:solidFill>
-                <a:latin typeface="Calibri"/>
-                <a:cs typeface="Calibri"/>
-              </a:rPr>
-              <a:t>: Product architecture / high, mid and low-level design / serverless / distributed systems</a:t>
-            </a:r>
-            <a:endParaRPr lang="en-US" sz="1000" dirty="0"/>
-          </a:p>
-          <a:p>
-            <a:pPr marL="179705">
-              <a:spcBef>
-                <a:spcPts val="960"/>
-              </a:spcBef>
-            </a:pPr>
-            <a:r>
-              <a:rPr lang="en-US" dirty="0"/>
-              <a:t>Databases</a:t>
-            </a:r>
-            <a:r>
-              <a:rPr lang="en-US" b="0" spc="-10" dirty="0">
-                <a:solidFill>
-                  <a:srgbClr val="000000"/>
-                </a:solidFill>
-              </a:rPr>
-              <a:t>: PostgreSQL / MySQL / Redis / Elasticsearch / DynamoDB</a:t>
-            </a:r>
-          </a:p>
-          <a:p>
-            <a:pPr marL="179705">
-              <a:lnSpc>
-                <a:spcPct val="100000"/>
-              </a:lnSpc>
-              <a:spcBef>
-                <a:spcPts val="960"/>
-              </a:spcBef>
-            </a:pPr>
-            <a:r>
-              <a:rPr lang="en-US" noProof="0" dirty="0"/>
-              <a:t>AI &amp; Automation</a:t>
-            </a:r>
-            <a:r>
-              <a:rPr lang="en-US" b="0" spc="-10" noProof="0" dirty="0">
-                <a:solidFill>
-                  <a:srgbClr val="000000"/>
-                </a:solidFill>
-                <a:latin typeface="Calibri"/>
-                <a:cs typeface="Calibri"/>
-              </a:rPr>
-              <a:t>: Codex, Claude Code, OpenAI API, Amazon Q / Bedrock / SageMaker / AI-assisted delivery / developer productivity</a:t>
-            </a:r>
-          </a:p>
-          <a:p>
-            <a:pPr marL="179705" marR="46990">
-              <a:lnSpc>
-                <a:spcPct val="100000"/>
-              </a:lnSpc>
-              <a:spcBef>
-                <a:spcPts val="960"/>
-              </a:spcBef>
-            </a:pPr>
-            <a:r>
-              <a:rPr lang="en-US" spc="-20" noProof="0" dirty="0"/>
-              <a:t>Engineering Practices</a:t>
-            </a:r>
-            <a:r>
-              <a:rPr lang="en-US" b="0" spc="-20" noProof="0" dirty="0">
-                <a:solidFill>
-                  <a:srgbClr val="000000"/>
-                </a:solidFill>
-                <a:latin typeface="Calibri"/>
-                <a:cs typeface="Calibri"/>
-              </a:rPr>
-              <a:t>: Full remote collaboration / mentoring / code reviews / observability / incident analysis / agile delivery</a:t>
-            </a:r>
-          </a:p>
-        </p:txBody>
-      </p:sp>
       <p:pic>
         <p:nvPicPr>
           <p:cNvPr id="39" name="Image 38">
@@ -11537,58 +10371,6 @@
       </p:sp>
       <p:sp>
         <p:nvSpPr>
-          <p:cNvPr id="51" name="object 12">
-            <a:extLst>
-              <a:ext uri="{FF2B5EF4-FFF2-40B4-BE49-F238E27FC236}">
-                <a16:creationId xmlns:a16="http://schemas.microsoft.com/office/drawing/2014/main" id="{087837BB-E744-F7EC-9A39-8131F2E0FCDF}"/>
-              </a:ext>
-            </a:extLst>
-          </p:cNvPr>
-          <p:cNvSpPr txBox="1"/>
-          <p:nvPr/>
-        </p:nvSpPr>
-        <p:spPr>
-          <a:xfrm>
-            <a:off x="2318385" y="5633598"/>
-            <a:ext cx="1149985" cy="299720"/>
-          </a:xfrm>
-          <a:prstGeom prst="rect">
-            <a:avLst/>
-          </a:prstGeom>
-        </p:spPr>
-        <p:txBody>
-          <a:bodyPr vert="horz" wrap="square" lIns="0" tIns="12700" rIns="0" bIns="0" rtlCol="0">
-            <a:spAutoFit/>
-          </a:bodyPr>
-          <a:lstStyle/>
-          <a:p>
-            <a:pPr marL="12700">
-              <a:lnSpc>
-                <a:spcPct val="100000"/>
-              </a:lnSpc>
-              <a:spcBef>
-                <a:spcPts val="100"/>
-              </a:spcBef>
-            </a:pPr>
-            <a:r>
-              <a:rPr lang="en-US" sz="1800" b="1" spc="-10" noProof="0" dirty="0">
-                <a:solidFill>
-                  <a:srgbClr val="FFFFFF"/>
-                </a:solidFill>
-                <a:latin typeface="Calibri"/>
-                <a:cs typeface="Calibri"/>
-              </a:rPr>
-              <a:t>IT SKILLS</a:t>
-            </a:r>
-            <a:endParaRPr lang="en-US" sz="1800" noProof="0" dirty="0">
-              <a:latin typeface="Calibri"/>
-              <a:cs typeface="Calibri"/>
-            </a:endParaRPr>
-          </a:p>
-        </p:txBody>
-      </p:sp>
-      <p:sp>
-        <p:nvSpPr>
           <p:cNvPr id="54" name="object 35">
             <a:extLst>
               <a:ext uri="{FF2B5EF4-FFF2-40B4-BE49-F238E27FC236}">
@@ -11603,7 +10385,7 @@
         </p:nvSpPr>
         <p:spPr>
           <a:xfrm>
-            <a:off x="2318385" y="4300518"/>
+            <a:off x="2318385" y="7894997"/>
             <a:ext cx="4431030" cy="1146468"/>
           </a:xfrm>
           <a:prstGeom prst="rect">
@@ -11928,6 +10710,422 @@
           </a:p>
           <a:p>
             <a:endParaRPr lang="en-US" b="0" spc="-10" dirty="0"/>
+          </a:p>
+        </p:txBody>
+      </p:sp>
+      <p:grpSp>
+        <p:nvGrpSpPr>
+          <p:cNvPr id="40" name="object 9"/>
+          <p:cNvGrpSpPr/>
+          <p:nvPr/>
+        </p:nvGrpSpPr>
+        <p:grpSpPr>
+          <a:xfrm>
+            <a:off x="1967324" y="670593"/>
+            <a:ext cx="2951480" cy="527050"/>
+            <a:chOff x="2067560" y="5463540"/>
+            <a:chExt cx="2951480" cy="527050"/>
+          </a:xfrm>
+        </p:grpSpPr>
+        <p:sp>
+          <p:nvSpPr>
+            <p:cNvPr id="46" name="object 10"/>
+            <p:cNvSpPr/>
+            <p:nvPr/>
+          </p:nvSpPr>
+          <p:spPr>
+            <a:xfrm>
+              <a:off x="2080260" y="5463540"/>
+              <a:ext cx="2938780" cy="317500"/>
+            </a:xfrm>
+            <a:custGeom>
+              <a:avLst/>
+              <a:gdLst/>
+              <a:ahLst/>
+              <a:cxnLst/>
+              <a:rect l="l" t="t" r="r" b="b"/>
+              <a:pathLst>
+                <a:path w="2938779" h="317500">
+                  <a:moveTo>
+                    <a:pt x="2885440" y="0"/>
+                  </a:moveTo>
+                  <a:lnTo>
+                    <a:pt x="0" y="0"/>
+                  </a:lnTo>
+                  <a:lnTo>
+                    <a:pt x="0" y="316992"/>
+                  </a:lnTo>
+                  <a:lnTo>
+                    <a:pt x="2938272" y="316992"/>
+                  </a:lnTo>
+                  <a:lnTo>
+                    <a:pt x="2938272" y="52832"/>
+                  </a:lnTo>
+                  <a:lnTo>
+                    <a:pt x="2885440" y="0"/>
+                  </a:lnTo>
+                  <a:close/>
+                </a:path>
+              </a:pathLst>
+            </a:custGeom>
+            <a:solidFill>
+              <a:srgbClr val="3A6278"/>
+            </a:solidFill>
+          </p:spPr>
+          <p:txBody>
+            <a:bodyPr wrap="square" lIns="0" tIns="0" rIns="0" bIns="0" rtlCol="0"/>
+            <a:lstStyle/>
+            <a:p>
+              <a:endParaRPr lang="en-US" noProof="0" dirty="0"/>
+            </a:p>
+          </p:txBody>
+        </p:sp>
+        <p:sp>
+          <p:nvSpPr>
+            <p:cNvPr id="47" name="object 11"/>
+            <p:cNvSpPr/>
+            <p:nvPr/>
+          </p:nvSpPr>
+          <p:spPr>
+            <a:xfrm>
+              <a:off x="2067560" y="5785231"/>
+              <a:ext cx="253365" cy="205104"/>
+            </a:xfrm>
+            <a:custGeom>
+              <a:avLst/>
+              <a:gdLst/>
+              <a:ahLst/>
+              <a:cxnLst/>
+              <a:rect l="l" t="t" r="r" b="b"/>
+              <a:pathLst>
+                <a:path w="253364" h="205104">
+                  <a:moveTo>
+                    <a:pt x="0" y="0"/>
+                  </a:moveTo>
+                  <a:lnTo>
+                    <a:pt x="250316" y="204851"/>
+                  </a:lnTo>
+                  <a:lnTo>
+                    <a:pt x="253364" y="2794"/>
+                  </a:lnTo>
+                  <a:lnTo>
+                    <a:pt x="0" y="0"/>
+                  </a:lnTo>
+                  <a:close/>
+                </a:path>
+              </a:pathLst>
+            </a:custGeom>
+            <a:solidFill>
+              <a:srgbClr val="2A4653"/>
+            </a:solidFill>
+          </p:spPr>
+          <p:txBody>
+            <a:bodyPr wrap="square" lIns="0" tIns="0" rIns="0" bIns="0" rtlCol="0"/>
+            <a:lstStyle/>
+            <a:p>
+              <a:endParaRPr lang="en-US" noProof="0" dirty="0"/>
+            </a:p>
+          </p:txBody>
+        </p:sp>
+      </p:grpSp>
+      <p:sp>
+        <p:nvSpPr>
+          <p:cNvPr id="48" name="object 35"/>
+          <p:cNvSpPr txBox="1">
+            <a:spLocks noGrp="1"/>
+          </p:cNvSpPr>
+          <p:nvPr>
+            <p:ph type="body" idx="1"/>
+          </p:nvPr>
+        </p:nvSpPr>
+        <p:spPr>
+          <a:xfrm>
+            <a:off x="2228562" y="1016757"/>
+            <a:ext cx="4431030" cy="3213700"/>
+          </a:xfrm>
+          <a:prstGeom prst="rect">
+            <a:avLst/>
+          </a:prstGeom>
+        </p:spPr>
+        <p:txBody>
+          <a:bodyPr vert="horz" wrap="square" lIns="0" tIns="12700" rIns="0" bIns="0" rtlCol="0">
+            <a:spAutoFit/>
+          </a:bodyPr>
+          <a:lstStyle/>
+          <a:p>
+            <a:pPr marL="179705" marR="86360">
+              <a:spcBef>
+                <a:spcPts val="1655"/>
+              </a:spcBef>
+            </a:pPr>
+            <a:r>
+              <a:rPr lang="en-US" sz="1400" noProof="0" dirty="0"/>
+              <a:t>Amazon Reverse Logistic Production</a:t>
+            </a:r>
+            <a:r>
+              <a:rPr lang="en-US" b="0" spc="15" dirty="0">
+                <a:solidFill>
+                  <a:srgbClr val="000000"/>
+                </a:solidFill>
+              </a:rPr>
+              <a:t>: Built and operated worldwide internal application embedded in Zebra scanners for high-volume reverse logistics workflow in an international team.</a:t>
+            </a:r>
+            <a:br>
+              <a:rPr lang="en-US" b="0" spc="15" dirty="0">
+                <a:solidFill>
+                  <a:srgbClr val="000000"/>
+                </a:solidFill>
+              </a:rPr>
+            </a:br>
+            <a:r>
+              <a:rPr lang="en-US" spc="15" dirty="0">
+                <a:solidFill>
+                  <a:srgbClr val="000000"/>
+                </a:solidFill>
+              </a:rPr>
+              <a:t>Impact</a:t>
+            </a:r>
+            <a:r>
+              <a:rPr lang="en-US" b="0" spc="15" dirty="0">
+                <a:solidFill>
+                  <a:srgbClr val="000000"/>
+                </a:solidFill>
+              </a:rPr>
+              <a:t>: Supported parcel return workflows at </a:t>
+            </a:r>
+            <a:r>
+              <a:rPr lang="en-US" spc="15" dirty="0">
+                <a:solidFill>
+                  <a:srgbClr val="000000"/>
+                </a:solidFill>
+              </a:rPr>
+              <a:t>100k+ scans/day</a:t>
+            </a:r>
+            <a:r>
+              <a:rPr lang="en-US" b="0" spc="15" dirty="0">
+                <a:solidFill>
+                  <a:srgbClr val="000000"/>
+                </a:solidFill>
+              </a:rPr>
+              <a:t>.</a:t>
+            </a:r>
+            <a:br>
+              <a:rPr lang="en-US" b="0" spc="15" dirty="0">
+                <a:solidFill>
+                  <a:srgbClr val="000000"/>
+                </a:solidFill>
+              </a:rPr>
+            </a:br>
+            <a:br>
+              <a:rPr lang="en-US" b="0" spc="15" dirty="0">
+                <a:solidFill>
+                  <a:srgbClr val="000000"/>
+                </a:solidFill>
+              </a:rPr>
+            </a:br>
+            <a:r>
+              <a:rPr lang="fr-FR" sz="1400" dirty="0"/>
+              <a:t>High-Traffic </a:t>
+            </a:r>
+            <a:r>
+              <a:rPr lang="fr-FR" sz="1400" dirty="0" err="1"/>
+              <a:t>Retail</a:t>
+            </a:r>
+            <a:r>
+              <a:rPr lang="fr-FR" sz="1400" dirty="0"/>
+              <a:t> E-commerce Platform</a:t>
+            </a:r>
+            <a:r>
+              <a:rPr lang="en-US" b="0" noProof="0" dirty="0">
+                <a:solidFill>
+                  <a:srgbClr val="000000"/>
+                </a:solidFill>
+                <a:latin typeface="Calibri"/>
+                <a:cs typeface="Calibri"/>
+              </a:rPr>
+              <a:t>: Leading delivery and reliability improvements for a large-scale retail e-commerce platform generating </a:t>
+            </a:r>
+            <a:r>
+              <a:rPr lang="en-US" noProof="0" dirty="0">
+                <a:solidFill>
+                  <a:srgbClr val="000000"/>
+                </a:solidFill>
+                <a:latin typeface="Calibri"/>
+                <a:cs typeface="Calibri"/>
+              </a:rPr>
+              <a:t>100M€+ annual revenue</a:t>
+            </a:r>
+            <a:r>
+              <a:rPr lang="en-US" b="0" noProof="0" dirty="0">
+                <a:solidFill>
+                  <a:srgbClr val="000000"/>
+                </a:solidFill>
+                <a:latin typeface="Calibri"/>
+                <a:cs typeface="Calibri"/>
+              </a:rPr>
+              <a:t>.</a:t>
+            </a:r>
+            <a:br>
+              <a:rPr lang="en-US" b="0" noProof="0" dirty="0">
+                <a:solidFill>
+                  <a:srgbClr val="000000"/>
+                </a:solidFill>
+                <a:latin typeface="Calibri"/>
+                <a:cs typeface="Calibri"/>
+              </a:rPr>
+            </a:br>
+            <a:r>
+              <a:rPr lang="en-US" spc="15" dirty="0">
+                <a:solidFill>
+                  <a:srgbClr val="000000"/>
+                </a:solidFill>
+              </a:rPr>
+              <a:t>Impact</a:t>
+            </a:r>
+            <a:r>
+              <a:rPr lang="en-US" b="0" spc="15" dirty="0">
+                <a:solidFill>
+                  <a:srgbClr val="000000"/>
+                </a:solidFill>
+              </a:rPr>
+              <a:t>: Improved team execution, production reliability and technical alignment across frontend, backend, cloud and third-party systems.</a:t>
+            </a:r>
+            <a:br>
+              <a:rPr lang="en-US" b="0" spc="15" dirty="0">
+                <a:solidFill>
+                  <a:srgbClr val="000000"/>
+                </a:solidFill>
+              </a:rPr>
+            </a:br>
+            <a:br>
+              <a:rPr lang="en-US" b="0" spc="15" dirty="0">
+                <a:solidFill>
+                  <a:srgbClr val="000000"/>
+                </a:solidFill>
+              </a:rPr>
+            </a:br>
+            <a:r>
+              <a:rPr lang="fr-FR" sz="1400" dirty="0"/>
+              <a:t>AI-</a:t>
+            </a:r>
+            <a:r>
+              <a:rPr lang="fr-FR" sz="1400" dirty="0" err="1"/>
+              <a:t>Assisted</a:t>
+            </a:r>
+            <a:r>
+              <a:rPr lang="fr-FR" sz="1400" dirty="0"/>
+              <a:t> </a:t>
+            </a:r>
+            <a:r>
+              <a:rPr lang="fr-FR" sz="1400" dirty="0" err="1"/>
+              <a:t>Developer</a:t>
+            </a:r>
+            <a:r>
+              <a:rPr lang="fr-FR" sz="1400" dirty="0"/>
+              <a:t> </a:t>
+            </a:r>
+            <a:r>
+              <a:rPr lang="fr-FR" sz="1400" dirty="0" err="1"/>
+              <a:t>Productivity</a:t>
+            </a:r>
+            <a:r>
+              <a:rPr lang="fr-FR" sz="1400" dirty="0"/>
+              <a:t> Product</a:t>
+            </a:r>
+            <a:r>
+              <a:rPr lang="en-US" b="0" spc="-10" noProof="0" dirty="0">
+                <a:solidFill>
+                  <a:srgbClr val="000000"/>
+                </a:solidFill>
+                <a:latin typeface="Calibri"/>
+                <a:cs typeface="Calibri"/>
+              </a:rPr>
+              <a:t>: Designed and built an AI-assisted product to analyze repositories and generate technical insights for engineering teams.</a:t>
+            </a:r>
+            <a:br>
+              <a:rPr lang="en-US" b="0" spc="-10" noProof="0" dirty="0">
+                <a:solidFill>
+                  <a:srgbClr val="000000"/>
+                </a:solidFill>
+                <a:latin typeface="Calibri"/>
+                <a:cs typeface="Calibri"/>
+              </a:rPr>
+            </a:br>
+            <a:r>
+              <a:rPr lang="en-US" spc="15" dirty="0">
+                <a:solidFill>
+                  <a:srgbClr val="000000"/>
+                </a:solidFill>
+              </a:rPr>
+              <a:t>Impact</a:t>
+            </a:r>
+            <a:r>
+              <a:rPr lang="en-US" b="0" spc="15" dirty="0">
+                <a:solidFill>
+                  <a:srgbClr val="000000"/>
+                </a:solidFill>
+              </a:rPr>
+              <a:t>: Demonstrates hands-on ownership, modern engineering practices and ability to ship independently.</a:t>
+            </a:r>
+            <a:endParaRPr lang="en-US" b="0" spc="-20" noProof="0" dirty="0">
+              <a:solidFill>
+                <a:srgbClr val="000000"/>
+              </a:solidFill>
+              <a:latin typeface="Calibri"/>
+              <a:cs typeface="Calibri"/>
+            </a:endParaRPr>
+          </a:p>
+        </p:txBody>
+      </p:sp>
+      <p:sp>
+        <p:nvSpPr>
+          <p:cNvPr id="53" name="object 7">
+            <a:extLst>
+              <a:ext uri="{FF2B5EF4-FFF2-40B4-BE49-F238E27FC236}">
+                <a16:creationId xmlns:a16="http://schemas.microsoft.com/office/drawing/2014/main" id="{2C9064E1-5D47-D85A-4A34-BAC8FE22A31E}"/>
+              </a:ext>
+            </a:extLst>
+          </p:cNvPr>
+          <p:cNvSpPr txBox="1"/>
+          <p:nvPr/>
+        </p:nvSpPr>
+        <p:spPr>
+          <a:xfrm>
+            <a:off x="2328798" y="682239"/>
+            <a:ext cx="2431415" cy="299720"/>
+          </a:xfrm>
+          <a:prstGeom prst="rect">
+            <a:avLst/>
+          </a:prstGeom>
+        </p:spPr>
+        <p:txBody>
+          <a:bodyPr vert="horz" wrap="square" lIns="0" tIns="12700" rIns="0" bIns="0" rtlCol="0">
+            <a:spAutoFit/>
+          </a:bodyPr>
+          <a:lstStyle/>
+          <a:p>
+            <a:pPr marL="12700">
+              <a:lnSpc>
+                <a:spcPct val="100000"/>
+              </a:lnSpc>
+              <a:spcBef>
+                <a:spcPts val="100"/>
+              </a:spcBef>
+            </a:pPr>
+            <a:r>
+              <a:rPr lang="en-US" sz="1800" b="1" noProof="0" dirty="0">
+                <a:solidFill>
+                  <a:srgbClr val="FFFFFF"/>
+                </a:solidFill>
+                <a:latin typeface="Calibri"/>
+                <a:cs typeface="Calibri"/>
+              </a:rPr>
+              <a:t>CASE STUDIES</a:t>
+            </a:r>
+            <a:endParaRPr lang="en-US" sz="1800" noProof="0" dirty="0">
+              <a:latin typeface="Calibri"/>
+              <a:cs typeface="Calibri"/>
+            </a:endParaRPr>
           </a:p>
         </p:txBody>
       </p:sp>

--- a/assets/pdf/CV_Antoine_CHEDEBOIS_GB.pptx
+++ b/assets/pdf/CV_Antoine_CHEDEBOIS_GB.pptx
@@ -5393,7 +5393,7 @@
         </p:nvSpPr>
         <p:spPr>
           <a:xfrm>
-            <a:off x="2473832" y="4943088"/>
+            <a:off x="2473832" y="5095488"/>
             <a:ext cx="3691890" cy="2600712"/>
           </a:xfrm>
           <a:prstGeom prst="rect">
@@ -5608,7 +5608,7 @@
         </p:nvGrpSpPr>
         <p:grpSpPr>
           <a:xfrm>
-            <a:off x="2076576" y="4553833"/>
+            <a:off x="2076576" y="4706233"/>
             <a:ext cx="2939415" cy="541655"/>
             <a:chOff x="2076576" y="830580"/>
             <a:chExt cx="2939415" cy="541655"/>
@@ -5723,7 +5723,7 @@
         </p:nvSpPr>
         <p:spPr>
           <a:xfrm>
-            <a:off x="2328798" y="4568438"/>
+            <a:off x="2328798" y="4720838"/>
             <a:ext cx="2431415" cy="299720"/>
           </a:xfrm>
           <a:prstGeom prst="rect">
@@ -5835,7 +5835,7 @@
         </p:nvGrpSpPr>
         <p:grpSpPr>
           <a:xfrm>
-            <a:off x="2064385" y="7467600"/>
+            <a:off x="2064385" y="7608235"/>
             <a:ext cx="2954655" cy="546479"/>
             <a:chOff x="2064385" y="3662046"/>
             <a:chExt cx="2954655" cy="546479"/>
@@ -10385,7 +10385,7 @@
         </p:nvSpPr>
         <p:spPr>
           <a:xfrm>
-            <a:off x="2318385" y="7894997"/>
+            <a:off x="2318385" y="8035632"/>
             <a:ext cx="4431030" cy="1146468"/>
           </a:xfrm>
           <a:prstGeom prst="rect">
@@ -10841,7 +10841,7 @@
         <p:spPr>
           <a:xfrm>
             <a:off x="2228562" y="1016757"/>
-            <a:ext cx="4431030" cy="3213700"/>
+            <a:ext cx="4431030" cy="3429144"/>
           </a:xfrm>
           <a:prstGeom prst="rect">
             <a:avLst/>
@@ -11067,9 +11067,31 @@
               </a:rPr>
               <a:t>: Demonstrates hands-on ownership, modern engineering practices and ability to ship independently.</a:t>
             </a:r>
+            <a:br>
+              <a:rPr lang="en-US" b="0" spc="15" dirty="0">
+                <a:solidFill>
+                  <a:srgbClr val="000000"/>
+                </a:solidFill>
+              </a:rPr>
+            </a:br>
+            <a:r>
+              <a:rPr lang="en-US" b="0" spc="15" dirty="0">
+                <a:solidFill>
+                  <a:schemeClr val="tx2"/>
+                </a:solidFill>
+                <a:hlinkClick r:id="rId11">
+                  <a:extLst>
+                    <a:ext uri="{A12FA001-AC4F-418D-AE19-62706E023703}">
+                      <ahyp:hlinkClr xmlns:ahyp="http://schemas.microsoft.com/office/drawing/2018/hyperlinkcolor" val="tx"/>
+                    </a:ext>
+                  </a:extLst>
+                </a:hlinkClick>
+              </a:rPr>
+              <a:t>www.repoinsightx.com</a:t>
+            </a:r>
             <a:endParaRPr lang="en-US" b="0" spc="-20" noProof="0" dirty="0">
               <a:solidFill>
-                <a:srgbClr val="000000"/>
+                <a:schemeClr val="tx2"/>
               </a:solidFill>
               <a:latin typeface="Calibri"/>
               <a:cs typeface="Calibri"/>

--- a/assets/pdf/CV_Antoine_CHEDEBOIS_GB.pptx
+++ b/assets/pdf/CV_Antoine_CHEDEBOIS_GB.pptx
@@ -5287,17 +5287,17 @@
                 <a:latin typeface="Calibri"/>
                 <a:cs typeface="Calibri"/>
               </a:rPr>
-              <a:t>Codex, OpenAI API, Claude code, </a:t>
-            </a:r>
-            <a:r>
-              <a:rPr lang="en-US" sz="1200" dirty="0" err="1">
+              <a:t>Codex, OpenAI API, </a:t>
+            </a:r>
+            <a:r>
+              <a:rPr lang="en-US" sz="1200">
                 <a:solidFill>
                   <a:srgbClr val="FFFFFF"/>
                 </a:solidFill>
                 <a:latin typeface="Calibri"/>
                 <a:cs typeface="Calibri"/>
               </a:rPr>
-              <a:t>BedRock</a:t>
+              <a:t>Claude Code, Bedrock</a:t>
             </a:r>
             <a:r>
               <a:rPr lang="en-US" sz="1200" dirty="0">
@@ -10841,7 +10841,7 @@
         <p:spPr>
           <a:xfrm>
             <a:off x="2228562" y="1016757"/>
-            <a:ext cx="4431030" cy="3429144"/>
+            <a:ext cx="4629438" cy="3429144"/>
           </a:xfrm>
           <a:prstGeom prst="rect">
             <a:avLst/>
@@ -10859,8 +10859,16 @@
               </a:spcBef>
             </a:pPr>
             <a:r>
-              <a:rPr lang="en-US" sz="1400" noProof="0" dirty="0"/>
-              <a:t>Amazon Reverse Logistic Production</a:t>
+              <a:rPr lang="fr-FR" sz="1400" dirty="0"/>
+              <a:t>Amazon Reverse </a:t>
+            </a:r>
+            <a:r>
+              <a:rPr lang="fr-FR" sz="1400" dirty="0" err="1"/>
+              <a:t>Logistics</a:t>
+            </a:r>
+            <a:r>
+              <a:rPr lang="fr-FR" sz="1400" dirty="0"/>
+              <a:t> Platform</a:t>
             </a:r>
             <a:r>
               <a:rPr lang="en-US" b="0" spc="15" dirty="0">
@@ -10868,7 +10876,7 @@
                   <a:srgbClr val="000000"/>
                 </a:solidFill>
               </a:rPr>
-              <a:t>: Built and operated worldwide internal application embedded in Zebra scanners for high-volume reverse logistics workflow in an international team.</a:t>
+              <a:t>: Built and operated a worldwide internal application embedded in Zebra scanners for high-volume reverse logistics workflows in an international team.</a:t>
             </a:r>
             <a:br>
               <a:rPr lang="en-US" b="0" spc="15" dirty="0">
